--- a/docs/slides/Agentic-SDLC-Tech-Audience-COMPACT.pptx
+++ b/docs/slides/Agentic-SDLC-Tech-Audience-COMPACT.pptx
@@ -4,6 +4,9 @@
   <p:sldMasterIdLst>
     <p:sldMasterId id="2147483648" r:id="rId1"/>
   </p:sldMasterIdLst>
+  <p:notesMasterIdLst>
+    <p:notesMasterId r:id="rId13"/>
+  </p:notesMasterIdLst>
   <p:sldIdLst>
     <p:sldId id="256" r:id="rId2"/>
     <p:sldId id="257" r:id="rId3"/>
@@ -11,13 +14,12 @@
     <p:sldId id="259" r:id="rId5"/>
     <p:sldId id="260" r:id="rId6"/>
     <p:sldId id="261" r:id="rId7"/>
-    <p:sldId id="262" r:id="rId8"/>
-    <p:sldId id="263" r:id="rId9"/>
-    <p:sldId id="264" r:id="rId10"/>
+    <p:sldId id="267" r:id="rId8"/>
+    <p:sldId id="268" r:id="rId9"/>
+    <p:sldId id="262" r:id="rId10"/>
+    <p:sldId id="263" r:id="rId11"/>
+    <p:sldId id="264" r:id="rId12"/>
   </p:sldIdLst>
-  <p:notesMasterIdLst>
-    <p:notesMasterId r:id="rId11"/>
-  </p:notesMasterIdLst>
   <p:sldSz cx="12192000" cy="6858000"/>
   <p:notesSz cx="6858000" cy="12192000"/>
   <p:defaultTextStyle>
@@ -112,6 +114,11 @@
       </a:defRPr>
     </a:lvl9pPr>
   </p:defaultTextStyle>
+  <p:extLst>
+    <p:ext uri="{EFAFB233-063F-42B5-8137-9DF3F51BA10A}">
+      <p15:sldGuideLst xmlns:p15="http://schemas.microsoft.com/office/powerpoint/2012/main"/>
+    </p:ext>
+  </p:extLst>
 </p:presentation>
 </file>
 
@@ -137,234 +144,10 @@
           <a:chExt cx="0" cy="0"/>
         </a:xfrm>
       </p:grpSpPr>
-      <p:sp>
-        <p:nvSpPr>
-          <p:cNvPr id="2" name="Header Placeholder 1"/>
-          <p:cNvSpPr>
-            <a:spLocks noGrp="1"/>
-          </p:cNvSpPr>
-          <p:nvPr>
-            <p:ph type="hdr" sz="quarter"/>
-          </p:nvPr>
-        </p:nvSpPr>
-        <p:spPr>
-          <a:xfrm>
-            <a:off x="0" y="0"/>
-            <a:ext cx="2971800" cy="458788"/>
-          </a:xfrm>
-          <a:prstGeom prst="rect">
-            <a:avLst/>
-          </a:prstGeom>
-        </p:spPr>
-        <p:txBody>
-          <a:bodyPr vert="horz" lIns="91440" tIns="45720" rIns="91440" bIns="45720" rtlCol="0"/>
-          <a:lstStyle>
-            <a:lvl1pPr algn="l">
-              <a:defRPr sz="1200"/>
-            </a:lvl1pPr>
-          </a:lstStyle>
-          <a:p>
-            <a:endParaRPr lang="en-US"/>
-          </a:p>
-        </p:txBody>
-      </p:sp>
-      <p:sp>
-        <p:nvSpPr>
-          <p:cNvPr id="3" name="Date Placeholder 2"/>
-          <p:cNvSpPr>
-            <a:spLocks noGrp="1"/>
-          </p:cNvSpPr>
-          <p:nvPr>
-            <p:ph type="dt" idx="1"/>
-          </p:nvPr>
-        </p:nvSpPr>
-        <p:spPr>
-          <a:xfrm>
-            <a:off x="3884613" y="0"/>
-            <a:ext cx="2971800" cy="458788"/>
-          </a:xfrm>
-          <a:prstGeom prst="rect">
-            <a:avLst/>
-          </a:prstGeom>
-        </p:spPr>
-        <p:txBody>
-          <a:bodyPr vert="horz" lIns="91440" tIns="45720" rIns="91440" bIns="45720" rtlCol="0"/>
-          <a:lstStyle>
-            <a:lvl1pPr algn="r">
-              <a:defRPr sz="1200"/>
-            </a:lvl1pPr>
-          </a:lstStyle>
-          <a:p>
-            <a:fld id="{5282F153-3F37-0F45-9E97-73ACFA13230C}" type="datetimeFigureOut">
-              <a:rPr lang="en-US"/>
-              <a:t>7/23/19</a:t>
-            </a:fld>
-            <a:endParaRPr lang="en-US"/>
-          </a:p>
-        </p:txBody>
-      </p:sp>
-      <p:sp>
-        <p:nvSpPr>
-          <p:cNvPr id="4" name="Slide Image Placeholder 3"/>
-          <p:cNvSpPr>
-            <a:spLocks noGrp="1" noRot="1" noChangeAspect="1"/>
-          </p:cNvSpPr>
-          <p:nvPr>
-            <p:ph type="sldImg" idx="2"/>
-          </p:nvPr>
-        </p:nvSpPr>
-        <p:spPr>
-          <a:xfrm>
-            <a:off x="685800" y="1143000"/>
-            <a:ext cx="5486400" cy="3086100"/>
-          </a:xfrm>
-          <a:prstGeom prst="rect">
-            <a:avLst/>
-          </a:prstGeom>
-          <a:noFill/>
-          <a:ln w="12700">
-            <a:solidFill>
-              <a:prstClr val="black"/>
-            </a:solidFill>
-          </a:ln>
-        </p:spPr>
-        <p:txBody>
-          <a:bodyPr vert="horz" lIns="91440" tIns="45720" rIns="91440" bIns="45720" rtlCol="0" anchor="ctr"/>
-          <a:lstStyle/>
-          <a:p>
-            <a:endParaRPr lang="en-US"/>
-          </a:p>
-        </p:txBody>
-      </p:sp>
-      <p:sp>
-        <p:nvSpPr>
-          <p:cNvPr id="5" name="Notes Placeholder 4"/>
-          <p:cNvSpPr>
-            <a:spLocks noGrp="1"/>
-          </p:cNvSpPr>
-          <p:nvPr>
-            <p:ph type="body" sz="quarter" idx="3"/>
-          </p:nvPr>
-        </p:nvSpPr>
-        <p:spPr>
-          <a:xfrm>
-            <a:off x="685800" y="4400550"/>
-            <a:ext cx="5486400" cy="3600450"/>
-          </a:xfrm>
-          <a:prstGeom prst="rect">
-            <a:avLst/>
-          </a:prstGeom>
-        </p:spPr>
-        <p:txBody>
-          <a:bodyPr vert="horz" lIns="91440" tIns="45720" rIns="91440" bIns="45720" rtlCol="0"/>
-          <a:lstStyle/>
-          <a:p>
-            <a:pPr lvl="0"/>
-            <a:r>
-              <a:rPr lang="en-US"/>
-              <a:t>Click to edit Master text styles</a:t>
-            </a:r>
-          </a:p>
-          <a:p>
-            <a:pPr lvl="1"/>
-            <a:r>
-              <a:rPr lang="en-US"/>
-              <a:t>Second level</a:t>
-            </a:r>
-          </a:p>
-          <a:p>
-            <a:pPr lvl="2"/>
-            <a:r>
-              <a:rPr lang="en-US"/>
-              <a:t>Third level</a:t>
-            </a:r>
-          </a:p>
-          <a:p>
-            <a:pPr lvl="3"/>
-            <a:r>
-              <a:rPr lang="en-US"/>
-              <a:t>Fourth level</a:t>
-            </a:r>
-          </a:p>
-          <a:p>
-            <a:pPr lvl="4"/>
-            <a:r>
-              <a:rPr lang="en-US"/>
-              <a:t>Fifth level</a:t>
-            </a:r>
-          </a:p>
-        </p:txBody>
-      </p:sp>
-      <p:sp>
-        <p:nvSpPr>
-          <p:cNvPr id="6" name="Footer Placeholder 5"/>
-          <p:cNvSpPr>
-            <a:spLocks noGrp="1"/>
-          </p:cNvSpPr>
-          <p:nvPr>
-            <p:ph type="ftr" sz="quarter" idx="4"/>
-          </p:nvPr>
-        </p:nvSpPr>
-        <p:spPr>
-          <a:xfrm>
-            <a:off x="0" y="8685213"/>
-            <a:ext cx="2971800" cy="458787"/>
-          </a:xfrm>
-          <a:prstGeom prst="rect">
-            <a:avLst/>
-          </a:prstGeom>
-        </p:spPr>
-        <p:txBody>
-          <a:bodyPr vert="horz" lIns="91440" tIns="45720" rIns="91440" bIns="45720" rtlCol="0" anchor="b"/>
-          <a:lstStyle>
-            <a:lvl1pPr algn="l">
-              <a:defRPr sz="1200"/>
-            </a:lvl1pPr>
-          </a:lstStyle>
-          <a:p>
-            <a:endParaRPr lang="en-US"/>
-          </a:p>
-        </p:txBody>
-      </p:sp>
-      <p:sp>
-        <p:nvSpPr>
-          <p:cNvPr id="7" name="Slide Number Placeholder 6"/>
-          <p:cNvSpPr>
-            <a:spLocks noGrp="1"/>
-          </p:cNvSpPr>
-          <p:nvPr>
-            <p:ph type="sldNum" sz="quarter" idx="5"/>
-          </p:nvPr>
-        </p:nvSpPr>
-        <p:spPr>
-          <a:xfrm>
-            <a:off x="3884613" y="8685213"/>
-            <a:ext cx="2971800" cy="458787"/>
-          </a:xfrm>
-          <a:prstGeom prst="rect">
-            <a:avLst/>
-          </a:prstGeom>
-        </p:spPr>
-        <p:txBody>
-          <a:bodyPr vert="horz" lIns="91440" tIns="45720" rIns="91440" bIns="45720" rtlCol="0" anchor="b"/>
-          <a:lstStyle>
-            <a:lvl1pPr algn="r">
-              <a:defRPr sz="1200"/>
-            </a:lvl1pPr>
-          </a:lstStyle>
-          <a:p>
-            <a:fld id="{CE5E9CC1-C706-0F49-92D6-E571CC5EEA8F}" type="slidenum">
-              <a:rPr lang="en-US"/>
-              <a:t>‹#›</a:t>
-            </a:fld>
-            <a:endParaRPr lang="en-US"/>
-          </a:p>
-        </p:txBody>
-      </p:sp>
     </p:spTree>
     <p:extLst>
       <p:ext uri="{BB962C8B-B14F-4D97-AF65-F5344CB8AC3E}">
-        <p14:creationId xmlns:p14="http://schemas.microsoft.com/office/powerpoint/2010/main" val="1024086991"/>
+        <p14:creationId xmlns:p14="http://schemas.microsoft.com/office/powerpoint/2010/main" val="1877270088"/>
       </p:ext>
     </p:extLst>
   </p:cSld>
@@ -512,7 +295,6 @@
               <a:rPr lang="en-US" dirty="0"/>
               <a:t>Condensed deck: rationale, workings, both diagrams, outputs, benchmarks, strengths &amp; weaknesses.</a:t>
             </a:r>
-            <a:endParaRPr lang="en-US" dirty="0"/>
           </a:p>
         </p:txBody>
       </p:sp>
@@ -534,6 +316,180 @@
             <a:fld id="{F7021451-1387-4CA6-816F-3879F97B5CBC}" type="slidenum">
               <a:rPr lang="en-US"/>
               <a:t>1</a:t>
+            </a:fld>
+            <a:endParaRPr lang="en-US"/>
+          </a:p>
+        </p:txBody>
+      </p:sp>
+    </p:spTree>
+    <p:extLst>
+      <p:ext uri="{BB962C8B-B14F-4D97-AF65-F5344CB8AC3E}">
+        <p14:creationId xmlns:p14="http://schemas.microsoft.com/office/powerpoint/2010/main" val="1024086991"/>
+      </p:ext>
+    </p:extLst>
+  </p:cSld>
+  <p:clrMapOvr>
+    <a:masterClrMapping/>
+  </p:clrMapOvr>
+</p:notes>
+</file>
+
+<file path=ppt/notesSlides/notesSlide10.xml><?xml version="1.0" encoding="utf-8"?>
+<p:notes xmlns:a="http://schemas.openxmlformats.org/drawingml/2006/main" xmlns:r="http://schemas.openxmlformats.org/officeDocument/2006/relationships" xmlns:p="http://schemas.openxmlformats.org/presentationml/2006/main">
+  <p:cSld>
+    <p:spTree>
+      <p:nvGrpSpPr>
+        <p:cNvPr id="1" name=""/>
+        <p:cNvGrpSpPr/>
+        <p:nvPr/>
+      </p:nvGrpSpPr>
+      <p:grpSpPr>
+        <a:xfrm>
+          <a:off x="0" y="0"/>
+          <a:ext cx="0" cy="0"/>
+          <a:chOff x="0" y="0"/>
+          <a:chExt cx="0" cy="0"/>
+        </a:xfrm>
+      </p:grpSpPr>
+      <p:sp>
+        <p:nvSpPr>
+          <p:cNvPr id="2" name="Slide Image Placeholder 1"/>
+          <p:cNvSpPr>
+            <a:spLocks noGrp="1" noRot="1" noChangeAspect="1"/>
+          </p:cNvSpPr>
+          <p:nvPr>
+            <p:ph type="sldImg"/>
+          </p:nvPr>
+        </p:nvSpPr>
+        <p:spPr/>
+      </p:sp>
+      <p:sp>
+        <p:nvSpPr>
+          <p:cNvPr id="3" name="Notes Placeholder 2"/>
+          <p:cNvSpPr>
+            <a:spLocks noGrp="1"/>
+          </p:cNvSpPr>
+          <p:nvPr>
+            <p:ph type="body" idx="1"/>
+          </p:nvPr>
+        </p:nvSpPr>
+        <p:spPr/>
+        <p:txBody>
+          <a:bodyPr/>
+          <a:lstStyle/>
+          <a:p>
+            <a:r>
+              <a:rPr lang="en-US" dirty="0"/>
+              <a:t>Say the cost gap first, before they ask. The exclusions are design choices, not defects.</a:t>
+            </a:r>
+          </a:p>
+        </p:txBody>
+      </p:sp>
+      <p:sp>
+        <p:nvSpPr>
+          <p:cNvPr id="4" name="Slide Number Placeholder 3"/>
+          <p:cNvSpPr>
+            <a:spLocks noGrp="1"/>
+          </p:cNvSpPr>
+          <p:nvPr>
+            <p:ph type="sldNum" sz="quarter" idx="10"/>
+          </p:nvPr>
+        </p:nvSpPr>
+        <p:spPr/>
+        <p:txBody>
+          <a:bodyPr/>
+          <a:lstStyle/>
+          <a:p>
+            <a:fld id="{F7021451-1387-4CA6-816F-3879F97B5CBC}" type="slidenum">
+              <a:rPr lang="en-US"/>
+              <a:t>10</a:t>
+            </a:fld>
+            <a:endParaRPr lang="en-US"/>
+          </a:p>
+        </p:txBody>
+      </p:sp>
+    </p:spTree>
+    <p:extLst>
+      <p:ext uri="{BB962C8B-B14F-4D97-AF65-F5344CB8AC3E}">
+        <p14:creationId xmlns:p14="http://schemas.microsoft.com/office/powerpoint/2010/main" val="1024086991"/>
+      </p:ext>
+    </p:extLst>
+  </p:cSld>
+  <p:clrMapOvr>
+    <a:masterClrMapping/>
+  </p:clrMapOvr>
+</p:notes>
+</file>
+
+<file path=ppt/notesSlides/notesSlide11.xml><?xml version="1.0" encoding="utf-8"?>
+<p:notes xmlns:a="http://schemas.openxmlformats.org/drawingml/2006/main" xmlns:r="http://schemas.openxmlformats.org/officeDocument/2006/relationships" xmlns:p="http://schemas.openxmlformats.org/presentationml/2006/main">
+  <p:cSld>
+    <p:spTree>
+      <p:nvGrpSpPr>
+        <p:cNvPr id="1" name=""/>
+        <p:cNvGrpSpPr/>
+        <p:nvPr/>
+      </p:nvGrpSpPr>
+      <p:grpSpPr>
+        <a:xfrm>
+          <a:off x="0" y="0"/>
+          <a:ext cx="0" cy="0"/>
+          <a:chOff x="0" y="0"/>
+          <a:chExt cx="0" cy="0"/>
+        </a:xfrm>
+      </p:grpSpPr>
+      <p:sp>
+        <p:nvSpPr>
+          <p:cNvPr id="2" name="Slide Image Placeholder 1"/>
+          <p:cNvSpPr>
+            <a:spLocks noGrp="1" noRot="1" noChangeAspect="1"/>
+          </p:cNvSpPr>
+          <p:nvPr>
+            <p:ph type="sldImg"/>
+          </p:nvPr>
+        </p:nvSpPr>
+        <p:spPr/>
+      </p:sp>
+      <p:sp>
+        <p:nvSpPr>
+          <p:cNvPr id="3" name="Notes Placeholder 2"/>
+          <p:cNvSpPr>
+            <a:spLocks noGrp="1"/>
+          </p:cNvSpPr>
+          <p:nvPr>
+            <p:ph type="body" idx="1"/>
+          </p:nvPr>
+        </p:nvSpPr>
+        <p:spPr/>
+        <p:txBody>
+          <a:bodyPr/>
+          <a:lstStyle/>
+          <a:p>
+            <a:r>
+              <a:rPr lang="en-US" dirty="0"/>
+              <a:t>Close on honesty: we grade our own claims and show the gaps.</a:t>
+            </a:r>
+          </a:p>
+        </p:txBody>
+      </p:sp>
+      <p:sp>
+        <p:nvSpPr>
+          <p:cNvPr id="4" name="Slide Number Placeholder 3"/>
+          <p:cNvSpPr>
+            <a:spLocks noGrp="1"/>
+          </p:cNvSpPr>
+          <p:nvPr>
+            <p:ph type="sldNum" sz="quarter" idx="10"/>
+          </p:nvPr>
+        </p:nvSpPr>
+        <p:spPr/>
+        <p:txBody>
+          <a:bodyPr/>
+          <a:lstStyle/>
+          <a:p>
+            <a:fld id="{F7021451-1387-4CA6-816F-3879F97B5CBC}" type="slidenum">
+              <a:rPr lang="en-US"/>
+              <a:t>11</a:t>
             </a:fld>
             <a:endParaRPr lang="en-US"/>
           </a:p>
@@ -600,7 +556,6 @@
               <a:rPr lang="en-US" dirty="0"/>
               <a:t>The v2 model corrects v1's pipeline assumption; v1's overnight autonomy became drift (slide 8).</a:t>
             </a:r>
-            <a:endParaRPr lang="en-US" dirty="0"/>
           </a:p>
         </p:txBody>
       </p:sp>
@@ -688,7 +643,6 @@
               <a:rPr lang="en-US" dirty="0"/>
               <a:t>Plugin ships 5 commands; workflow skills live per project (stage-lane per the cycle diagram).</a:t>
             </a:r>
-            <a:endParaRPr lang="en-US" dirty="0"/>
           </a:p>
         </p:txBody>
       </p:sp>
@@ -776,7 +730,6 @@
               <a:rPr lang="en-US" dirty="0"/>
               <a:t>The cycle is standard SDLC; the framework only owns the lanes.</a:t>
             </a:r>
-            <a:endParaRPr lang="en-US" dirty="0"/>
           </a:p>
         </p:txBody>
       </p:sp>
@@ -864,7 +817,6 @@
               <a:rPr lang="en-US" dirty="0"/>
               <a:t>The human gates are where trust is built: spec, plan, merge.</a:t>
             </a:r>
-            <a:endParaRPr lang="en-US" dirty="0"/>
           </a:p>
         </p:txBody>
       </p:sp>
@@ -952,7 +904,6 @@
               <a:rPr lang="en-US" dirty="0"/>
               <a:t>Point at evidence/validate.py — it reproves the whole bench.</a:t>
             </a:r>
-            <a:endParaRPr lang="en-US" dirty="0"/>
           </a:p>
         </p:txBody>
       </p:sp>
@@ -1038,9 +989,8 @@
           <a:p>
             <a:r>
               <a:rPr lang="en-US" dirty="0"/>
-              <a:t>Value concentrates where difficulty lives: plan-first discipline beats churn on hard engineering; simple tasks are parity-to-small-tax.</a:t>
-            </a:r>
-            <a:endParaRPr lang="en-US" dirty="0"/>
+              <a:t>Methodology slide exists so the results are read with their confounds in frame, not as bare numbers.</a:t>
+            </a:r>
           </a:p>
         </p:txBody>
       </p:sp>
@@ -1126,9 +1076,8 @@
           <a:p>
             <a:r>
               <a:rPr lang="en-US" dirty="0"/>
-              <a:t>Say the cost gap first, before they ask. The exclusions are design choices, not defects.</a:t>
-            </a:r>
-            <a:endParaRPr lang="en-US" dirty="0"/>
+              <a:t>Verbatim bench-kit table. Read the B line out loud: halted at max_turns with more spent. The framework's value concentrates exactly here.</a:t>
+            </a:r>
           </a:p>
         </p:txBody>
       </p:sp>
@@ -1214,9 +1163,8 @@
           <a:p>
             <a:r>
               <a:rPr lang="en-US" dirty="0"/>
-              <a:t>Close on honesty: we grade our own claims and show the gaps.</a:t>
-            </a:r>
-            <a:endParaRPr lang="en-US" dirty="0"/>
+              <a:t>Value concentrates where difficulty lives: plan-first discipline beats churn on hard engineering; simple tasks are parity-to-small-tax.</a:t>
+            </a:r>
           </a:p>
         </p:txBody>
       </p:sp>
@@ -1289,6 +1237,11 @@
 <file path=ppt/slideMasters/slideMaster1.xml><?xml version="1.0" encoding="utf-8"?>
 <p:sldMaster xmlns:a="http://schemas.openxmlformats.org/drawingml/2006/main" xmlns:r="http://schemas.openxmlformats.org/officeDocument/2006/relationships" xmlns:p="http://schemas.openxmlformats.org/presentationml/2006/main">
   <p:cSld>
+    <p:bg>
+      <p:bgRef idx="1001">
+        <a:schemeClr val="bg1"/>
+      </p:bgRef>
+    </p:bg>
     <p:spTree>
       <p:nvGrpSpPr>
         <p:cNvPr id="1" name=""/>
@@ -1571,6 +1524,7 @@
         <a:solidFill>
           <a:srgbClr val="1E2761"/>
         </a:solidFill>
+        <a:effectLst/>
       </p:bgPr>
     </p:bg>
     <p:spTree>
@@ -1633,11 +1587,11 @@
           <a:bodyPr wrap="square" rtlCol="0" anchor="ctr"/>
           <a:lstStyle/>
           <a:p>
-            <a:pPr indent="0" marL="0">
-              <a:buNone/>
-            </a:pPr>
-            <a:r>
-              <a:rPr lang="en-US" sz="1500" b="1" spc="300" kern="0" dirty="0">
+            <a:pPr marL="0" indent="0">
+              <a:buNone/>
+            </a:pPr>
+            <a:r>
+              <a:rPr lang="en-US" sz="1500" b="1" kern="0" spc="300" dirty="0">
                 <a:solidFill>
                   <a:srgbClr val="F4B400"/>
                 </a:solidFill>
@@ -1672,7 +1626,7 @@
           <a:bodyPr wrap="square" rtlCol="0" anchor="ctr"/>
           <a:lstStyle/>
           <a:p>
-            <a:pPr indent="0" marL="0">
+            <a:pPr marL="0" indent="0">
               <a:buNone/>
             </a:pPr>
             <a:r>
@@ -1711,7 +1665,7 @@
           <a:bodyPr wrap="square" rtlCol="0" anchor="ctr"/>
           <a:lstStyle/>
           <a:p>
-            <a:pPr indent="0" marL="0">
+            <a:pPr marL="0" indent="0">
               <a:buNone/>
             </a:pPr>
             <a:r>
@@ -1750,7 +1704,7 @@
           <a:bodyPr wrap="square" rtlCol="0" anchor="ctr"/>
           <a:lstStyle/>
           <a:p>
-            <a:pPr indent="0" marL="0">
+            <a:pPr marL="0" indent="0">
               <a:buNone/>
             </a:pPr>
             <a:r>
@@ -1789,7 +1743,7 @@
           <a:bodyPr wrap="square" rtlCol="0" anchor="ctr"/>
           <a:lstStyle/>
           <a:p>
-            <a:pPr indent="0" marL="0">
+            <a:pPr marL="0" indent="0">
               <a:buNone/>
             </a:pPr>
             <a:r>
@@ -1855,7 +1809,7 @@
           <a:bodyPr wrap="square" lIns="0" tIns="0" rIns="0" bIns="0" rtlCol="0" anchor="ctr"/>
           <a:lstStyle/>
           <a:p>
-            <a:pPr algn="ctr" indent="0" marL="0">
+            <a:pPr marL="0" indent="0" algn="ctr">
               <a:buNone/>
             </a:pPr>
             <a:r>
@@ -1921,7 +1875,7 @@
           <a:bodyPr wrap="square" lIns="0" tIns="0" rIns="0" bIns="0" rtlCol="0" anchor="ctr"/>
           <a:lstStyle/>
           <a:p>
-            <a:pPr algn="ctr" indent="0" marL="0">
+            <a:pPr marL="0" indent="0" algn="ctr">
               <a:buNone/>
             </a:pPr>
             <a:r>
@@ -1987,7 +1941,7 @@
           <a:bodyPr wrap="square" lIns="0" tIns="0" rIns="0" bIns="0" rtlCol="0" anchor="ctr"/>
           <a:lstStyle/>
           <a:p>
-            <a:pPr algn="ctr" indent="0" marL="0">
+            <a:pPr marL="0" indent="0" algn="ctr">
               <a:buNone/>
             </a:pPr>
             <a:r>
@@ -2053,7 +2007,7 @@
           <a:bodyPr wrap="square" lIns="0" tIns="0" rIns="0" bIns="0" rtlCol="0" anchor="ctr"/>
           <a:lstStyle/>
           <a:p>
-            <a:pPr algn="ctr" indent="0" marL="0">
+            <a:pPr marL="0" indent="0" algn="ctr">
               <a:buNone/>
             </a:pPr>
             <a:r>
@@ -2092,7 +2046,7 @@
           <a:bodyPr wrap="square" rtlCol="0" anchor="ctr"/>
           <a:lstStyle/>
           <a:p>
-            <a:pPr algn="r" indent="0" marL="0">
+            <a:pPr marL="0" indent="0" algn="r">
               <a:buNone/>
             </a:pPr>
             <a:r>
@@ -2107,6 +2061,1160 @@
               <a:t>github.com/trac41799/claude-code-agentic-sdlc</a:t>
             </a:r>
             <a:endParaRPr lang="en-US" sz="1200" dirty="0"/>
+          </a:p>
+        </p:txBody>
+      </p:sp>
+    </p:spTree>
+  </p:cSld>
+  <p:clrMapOvr>
+    <a:masterClrMapping/>
+  </p:clrMapOvr>
+</p:sld>
+</file>
+
+<file path=ppt/slides/slide10.xml><?xml version="1.0" encoding="utf-8"?>
+<p:sld xmlns:a="http://schemas.openxmlformats.org/drawingml/2006/main" xmlns:r="http://schemas.openxmlformats.org/officeDocument/2006/relationships" xmlns:p="http://schemas.openxmlformats.org/presentationml/2006/main">
+  <p:cSld name="Slide 8">
+    <p:bg>
+      <p:bgPr>
+        <a:solidFill>
+          <a:srgbClr val="FFFFFF"/>
+        </a:solidFill>
+        <a:effectLst/>
+      </p:bgPr>
+    </p:bg>
+    <p:spTree>
+      <p:nvGrpSpPr>
+        <p:cNvPr id="1" name=""/>
+        <p:cNvGrpSpPr/>
+        <p:nvPr/>
+      </p:nvGrpSpPr>
+      <p:grpSpPr>
+        <a:xfrm>
+          <a:off x="0" y="0"/>
+          <a:ext cx="0" cy="0"/>
+          <a:chOff x="0" y="0"/>
+          <a:chExt cx="0" cy="0"/>
+        </a:xfrm>
+      </p:grpSpPr>
+      <p:sp>
+        <p:nvSpPr>
+          <p:cNvPr id="2" name="Text 0"/>
+          <p:cNvSpPr/>
+          <p:nvPr/>
+        </p:nvSpPr>
+        <p:spPr>
+          <a:xfrm>
+            <a:off x="502920" y="256032"/>
+            <a:ext cx="10972800" cy="292608"/>
+          </a:xfrm>
+          <a:prstGeom prst="rect">
+            <a:avLst/>
+          </a:prstGeom>
+          <a:noFill/>
+          <a:ln/>
+        </p:spPr>
+        <p:txBody>
+          <a:bodyPr wrap="square" rtlCol="0" anchor="ctr"/>
+          <a:lstStyle/>
+          <a:p>
+            <a:pPr marL="0" indent="0">
+              <a:buNone/>
+            </a:pPr>
+            <a:r>
+              <a:rPr lang="en-US" sz="1300" b="1" kern="0" spc="200" dirty="0">
+                <a:solidFill>
+                  <a:srgbClr val="B98A00"/>
+                </a:solidFill>
+                <a:latin typeface="Calibri" pitchFamily="34" charset="0"/>
+                <a:ea typeface="Calibri" pitchFamily="34" charset="-122"/>
+                <a:cs typeface="Calibri" pitchFamily="34" charset="-120"/>
+              </a:rPr>
+              <a:t>HONEST YARDSTICKS</a:t>
+            </a:r>
+            <a:endParaRPr lang="en-US" sz="1300" dirty="0"/>
+          </a:p>
+        </p:txBody>
+      </p:sp>
+      <p:sp>
+        <p:nvSpPr>
+          <p:cNvPr id="3" name="Text 1"/>
+          <p:cNvSpPr/>
+          <p:nvPr/>
+        </p:nvSpPr>
+        <p:spPr>
+          <a:xfrm>
+            <a:off x="502920" y="548640"/>
+            <a:ext cx="11155680" cy="777240"/>
+          </a:xfrm>
+          <a:prstGeom prst="rect">
+            <a:avLst/>
+          </a:prstGeom>
+          <a:noFill/>
+          <a:ln/>
+        </p:spPr>
+        <p:txBody>
+          <a:bodyPr wrap="square" rtlCol="0" anchor="ctr"/>
+          <a:lstStyle/>
+          <a:p>
+            <a:pPr marL="0" indent="0">
+              <a:buNone/>
+            </a:pPr>
+            <a:r>
+              <a:rPr lang="en-US" sz="4000" b="1" dirty="0">
+                <a:solidFill>
+                  <a:srgbClr val="1E2761"/>
+                </a:solidFill>
+                <a:latin typeface="Cambria" pitchFamily="34" charset="0"/>
+                <a:ea typeface="Cambria" pitchFamily="34" charset="-122"/>
+                <a:cs typeface="Cambria" pitchFamily="34" charset="-120"/>
+              </a:rPr>
+              <a:t>Strengths · weaknesses · deliberate cuts</a:t>
+            </a:r>
+            <a:endParaRPr lang="en-US" sz="4000" dirty="0"/>
+          </a:p>
+        </p:txBody>
+      </p:sp>
+      <p:sp>
+        <p:nvSpPr>
+          <p:cNvPr id="4" name="Text 2"/>
+          <p:cNvSpPr/>
+          <p:nvPr/>
+        </p:nvSpPr>
+        <p:spPr>
+          <a:xfrm>
+            <a:off x="502920" y="1325880"/>
+            <a:ext cx="11155680" cy="457200"/>
+          </a:xfrm>
+          <a:prstGeom prst="rect">
+            <a:avLst/>
+          </a:prstGeom>
+          <a:noFill/>
+          <a:ln/>
+        </p:spPr>
+        <p:txBody>
+          <a:bodyPr wrap="square" rtlCol="0" anchor="ctr"/>
+          <a:lstStyle/>
+          <a:p>
+            <a:pPr marL="0" indent="0">
+              <a:buNone/>
+            </a:pPr>
+            <a:r>
+              <a:rPr lang="en-US" sz="1800" dirty="0">
+                <a:solidFill>
+                  <a:srgbClr val="6B7280"/>
+                </a:solidFill>
+                <a:latin typeface="Calibri" pitchFamily="34" charset="0"/>
+                <a:ea typeface="Calibri" pitchFamily="34" charset="-122"/>
+                <a:cs typeface="Calibri" pitchFamily="34" charset="-120"/>
+              </a:rPr>
+              <a:t>Measured first — then what we left out by design.</a:t>
+            </a:r>
+            <a:endParaRPr lang="en-US" sz="1800" dirty="0"/>
+          </a:p>
+        </p:txBody>
+      </p:sp>
+      <p:sp>
+        <p:nvSpPr>
+          <p:cNvPr id="5" name="Shape 3"/>
+          <p:cNvSpPr/>
+          <p:nvPr/>
+        </p:nvSpPr>
+        <p:spPr>
+          <a:xfrm>
+            <a:off x="685800" y="2103120"/>
+            <a:ext cx="5349240" cy="2286000"/>
+          </a:xfrm>
+          <a:prstGeom prst="roundRect">
+            <a:avLst>
+              <a:gd name="adj" fmla="val 4000"/>
+            </a:avLst>
+          </a:prstGeom>
+          <a:solidFill>
+            <a:srgbClr val="EAF5EC"/>
+          </a:solidFill>
+          <a:ln w="15875">
+            <a:solidFill>
+              <a:srgbClr val="2E7D32"/>
+            </a:solidFill>
+            <a:prstDash val="solid"/>
+          </a:ln>
+        </p:spPr>
+      </p:sp>
+      <p:sp>
+        <p:nvSpPr>
+          <p:cNvPr id="6" name="Text 4"/>
+          <p:cNvSpPr/>
+          <p:nvPr/>
+        </p:nvSpPr>
+        <p:spPr>
+          <a:xfrm>
+            <a:off x="960120" y="2286000"/>
+            <a:ext cx="4800600" cy="320040"/>
+          </a:xfrm>
+          <a:prstGeom prst="rect">
+            <a:avLst/>
+          </a:prstGeom>
+          <a:noFill/>
+          <a:ln/>
+        </p:spPr>
+        <p:txBody>
+          <a:bodyPr wrap="square" rtlCol="0" anchor="ctr"/>
+          <a:lstStyle/>
+          <a:p>
+            <a:pPr marL="0" indent="0">
+              <a:buNone/>
+            </a:pPr>
+            <a:r>
+              <a:rPr lang="en-US" sz="1500" b="1" dirty="0">
+                <a:solidFill>
+                  <a:srgbClr val="1B5E20"/>
+                </a:solidFill>
+                <a:latin typeface="Calibri" pitchFamily="34" charset="0"/>
+                <a:ea typeface="Calibri" pitchFamily="34" charset="-122"/>
+                <a:cs typeface="Calibri" pitchFamily="34" charset="-120"/>
+              </a:rPr>
+              <a:t>STRENGTHS (VERIFIED)</a:t>
+            </a:r>
+            <a:endParaRPr lang="en-US" sz="1500" dirty="0"/>
+          </a:p>
+        </p:txBody>
+      </p:sp>
+      <p:sp>
+        <p:nvSpPr>
+          <p:cNvPr id="7" name="Text 5"/>
+          <p:cNvSpPr/>
+          <p:nvPr/>
+        </p:nvSpPr>
+        <p:spPr>
+          <a:xfrm>
+            <a:off x="960120" y="2697480"/>
+            <a:ext cx="4846320" cy="365760"/>
+          </a:xfrm>
+          <a:prstGeom prst="rect">
+            <a:avLst/>
+          </a:prstGeom>
+          <a:noFill/>
+          <a:ln/>
+        </p:spPr>
+        <p:txBody>
+          <a:bodyPr wrap="square" lIns="0" tIns="0" rIns="0" bIns="0" rtlCol="0" anchor="ctr"/>
+          <a:lstStyle/>
+          <a:p>
+            <a:pPr marL="0" indent="0">
+              <a:buNone/>
+            </a:pPr>
+            <a:r>
+              <a:rPr lang="en-US" sz="1350" dirty="0">
+                <a:solidFill>
+                  <a:srgbClr val="1F2937"/>
+                </a:solidFill>
+                <a:latin typeface="Calibri" pitchFamily="34" charset="0"/>
+                <a:ea typeface="Calibri" pitchFamily="34" charset="-122"/>
+                <a:cs typeface="Calibri" pitchFamily="34" charset="-120"/>
+              </a:rPr>
+              <a:t>• Value where difficulty lives — 4.2× faster on the hard case</a:t>
+            </a:r>
+            <a:endParaRPr lang="en-US" sz="1350" dirty="0"/>
+          </a:p>
+        </p:txBody>
+      </p:sp>
+      <p:sp>
+        <p:nvSpPr>
+          <p:cNvPr id="8" name="Text 6"/>
+          <p:cNvSpPr/>
+          <p:nvPr/>
+        </p:nvSpPr>
+        <p:spPr>
+          <a:xfrm>
+            <a:off x="960120" y="3099816"/>
+            <a:ext cx="4846320" cy="365760"/>
+          </a:xfrm>
+          <a:prstGeom prst="rect">
+            <a:avLst/>
+          </a:prstGeom>
+          <a:noFill/>
+          <a:ln/>
+        </p:spPr>
+        <p:txBody>
+          <a:bodyPr wrap="square" lIns="0" tIns="0" rIns="0" bIns="0" rtlCol="0" anchor="ctr"/>
+          <a:lstStyle/>
+          <a:p>
+            <a:pPr marL="0" indent="0">
+              <a:buNone/>
+            </a:pPr>
+            <a:r>
+              <a:rPr lang="en-US" sz="1350" dirty="0">
+                <a:solidFill>
+                  <a:srgbClr val="1F2937"/>
+                </a:solidFill>
+                <a:latin typeface="Calibri" pitchFamily="34" charset="0"/>
+                <a:ea typeface="Calibri" pitchFamily="34" charset="-122"/>
+                <a:cs typeface="Calibri" pitchFamily="34" charset="-120"/>
+              </a:rPr>
+              <a:t>• Traceability in 8/8 A-runs; zero in bare</a:t>
+            </a:r>
+            <a:endParaRPr lang="en-US" sz="1350" dirty="0"/>
+          </a:p>
+        </p:txBody>
+      </p:sp>
+      <p:sp>
+        <p:nvSpPr>
+          <p:cNvPr id="9" name="Text 7"/>
+          <p:cNvSpPr/>
+          <p:nvPr/>
+        </p:nvSpPr>
+        <p:spPr>
+          <a:xfrm>
+            <a:off x="960120" y="3502152"/>
+            <a:ext cx="4846320" cy="365760"/>
+          </a:xfrm>
+          <a:prstGeom prst="rect">
+            <a:avLst/>
+          </a:prstGeom>
+          <a:noFill/>
+          <a:ln/>
+        </p:spPr>
+        <p:txBody>
+          <a:bodyPr wrap="square" lIns="0" tIns="0" rIns="0" bIns="0" rtlCol="0" anchor="ctr"/>
+          <a:lstStyle/>
+          <a:p>
+            <a:pPr marL="0" indent="0">
+              <a:buNone/>
+            </a:pPr>
+            <a:r>
+              <a:rPr lang="en-US" sz="1350" dirty="0">
+                <a:solidFill>
+                  <a:srgbClr val="1F2937"/>
+                </a:solidFill>
+                <a:latin typeface="Calibri" pitchFamily="34" charset="0"/>
+                <a:ea typeface="Calibri" pitchFamily="34" charset="-122"/>
+                <a:cs typeface="Calibri" pitchFamily="34" charset="-120"/>
+              </a:rPr>
+              <a:t>• Clean install · marketplace updates · CLI-first stack</a:t>
+            </a:r>
+            <a:endParaRPr lang="en-US" sz="1350" dirty="0"/>
+          </a:p>
+        </p:txBody>
+      </p:sp>
+      <p:sp>
+        <p:nvSpPr>
+          <p:cNvPr id="10" name="Text 8"/>
+          <p:cNvSpPr/>
+          <p:nvPr/>
+        </p:nvSpPr>
+        <p:spPr>
+          <a:xfrm>
+            <a:off x="960120" y="3904488"/>
+            <a:ext cx="4846320" cy="365760"/>
+          </a:xfrm>
+          <a:prstGeom prst="rect">
+            <a:avLst/>
+          </a:prstGeom>
+          <a:noFill/>
+          <a:ln/>
+        </p:spPr>
+        <p:txBody>
+          <a:bodyPr wrap="square" lIns="0" tIns="0" rIns="0" bIns="0" rtlCol="0" anchor="ctr"/>
+          <a:lstStyle/>
+          <a:p>
+            <a:pPr marL="0" indent="0">
+              <a:buNone/>
+            </a:pPr>
+            <a:r>
+              <a:rPr lang="en-US" sz="1350" dirty="0">
+                <a:solidFill>
+                  <a:srgbClr val="1F2937"/>
+                </a:solidFill>
+                <a:latin typeface="Calibri" pitchFamily="34" charset="0"/>
+                <a:ea typeface="Calibri" pitchFamily="34" charset="-122"/>
+                <a:cs typeface="Calibri" pitchFamily="34" charset="-120"/>
+              </a:rPr>
+              <a:t>• Reproducible: evidence/ + validate.py (12/12)</a:t>
+            </a:r>
+            <a:endParaRPr lang="en-US" sz="1350" dirty="0"/>
+          </a:p>
+        </p:txBody>
+      </p:sp>
+      <p:sp>
+        <p:nvSpPr>
+          <p:cNvPr id="11" name="Shape 9"/>
+          <p:cNvSpPr/>
+          <p:nvPr/>
+        </p:nvSpPr>
+        <p:spPr>
+          <a:xfrm>
+            <a:off x="685800" y="4526280"/>
+            <a:ext cx="5349240" cy="1783080"/>
+          </a:xfrm>
+          <a:prstGeom prst="roundRect">
+            <a:avLst>
+              <a:gd name="adj" fmla="val 5128"/>
+            </a:avLst>
+          </a:prstGeom>
+          <a:solidFill>
+            <a:srgbClr val="FBF3E2"/>
+          </a:solidFill>
+          <a:ln w="15875">
+            <a:solidFill>
+              <a:srgbClr val="B98A00"/>
+            </a:solidFill>
+            <a:prstDash val="solid"/>
+          </a:ln>
+        </p:spPr>
+      </p:sp>
+      <p:sp>
+        <p:nvSpPr>
+          <p:cNvPr id="12" name="Text 10"/>
+          <p:cNvSpPr/>
+          <p:nvPr/>
+        </p:nvSpPr>
+        <p:spPr>
+          <a:xfrm>
+            <a:off x="960120" y="4709160"/>
+            <a:ext cx="4800600" cy="320040"/>
+          </a:xfrm>
+          <a:prstGeom prst="rect">
+            <a:avLst/>
+          </a:prstGeom>
+          <a:noFill/>
+          <a:ln/>
+        </p:spPr>
+        <p:txBody>
+          <a:bodyPr wrap="square" rtlCol="0" anchor="ctr"/>
+          <a:lstStyle/>
+          <a:p>
+            <a:pPr marL="0" indent="0">
+              <a:buNone/>
+            </a:pPr>
+            <a:r>
+              <a:rPr lang="en-US" sz="1500" b="1" dirty="0">
+                <a:solidFill>
+                  <a:srgbClr val="7A5C00"/>
+                </a:solidFill>
+                <a:latin typeface="Calibri" pitchFamily="34" charset="0"/>
+                <a:ea typeface="Calibri" pitchFamily="34" charset="-122"/>
+                <a:cs typeface="Calibri" pitchFamily="34" charset="-120"/>
+              </a:rPr>
+              <a:t>WEAKNESSES (VERIFIED)</a:t>
+            </a:r>
+            <a:endParaRPr lang="en-US" sz="1500" dirty="0"/>
+          </a:p>
+        </p:txBody>
+      </p:sp>
+      <p:sp>
+        <p:nvSpPr>
+          <p:cNvPr id="13" name="Text 11"/>
+          <p:cNvSpPr/>
+          <p:nvPr/>
+        </p:nvSpPr>
+        <p:spPr>
+          <a:xfrm>
+            <a:off x="960120" y="5120640"/>
+            <a:ext cx="4846320" cy="365760"/>
+          </a:xfrm>
+          <a:prstGeom prst="rect">
+            <a:avLst/>
+          </a:prstGeom>
+          <a:noFill/>
+          <a:ln/>
+        </p:spPr>
+        <p:txBody>
+          <a:bodyPr wrap="square" lIns="0" tIns="0" rIns="0" bIns="0" rtlCol="0" anchor="ctr"/>
+          <a:lstStyle/>
+          <a:p>
+            <a:pPr marL="0" indent="0">
+              <a:buNone/>
+            </a:pPr>
+            <a:r>
+              <a:rPr lang="en-US" sz="1350" dirty="0">
+                <a:solidFill>
+                  <a:srgbClr val="1F2937"/>
+                </a:solidFill>
+                <a:latin typeface="Calibri" pitchFamily="34" charset="0"/>
+                <a:ea typeface="Calibri" pitchFamily="34" charset="-122"/>
+                <a:cs typeface="Calibri" pitchFamily="34" charset="-120"/>
+              </a:rPr>
+              <a:t>• Cost loop missing — no trusted metering/budgets (GAP-ANALYSIS G1)</a:t>
+            </a:r>
+            <a:endParaRPr lang="en-US" sz="1350" dirty="0"/>
+          </a:p>
+        </p:txBody>
+      </p:sp>
+      <p:sp>
+        <p:nvSpPr>
+          <p:cNvPr id="14" name="Text 12"/>
+          <p:cNvSpPr/>
+          <p:nvPr/>
+        </p:nvSpPr>
+        <p:spPr>
+          <a:xfrm>
+            <a:off x="960120" y="5504688"/>
+            <a:ext cx="4846320" cy="365760"/>
+          </a:xfrm>
+          <a:prstGeom prst="rect">
+            <a:avLst/>
+          </a:prstGeom>
+          <a:noFill/>
+          <a:ln/>
+        </p:spPr>
+        <p:txBody>
+          <a:bodyPr wrap="square" lIns="0" tIns="0" rIns="0" bIns="0" rtlCol="0" anchor="ctr"/>
+          <a:lstStyle/>
+          <a:p>
+            <a:pPr marL="0" indent="0">
+              <a:buNone/>
+            </a:pPr>
+            <a:r>
+              <a:rPr lang="en-US" sz="1350" dirty="0">
+                <a:solidFill>
+                  <a:srgbClr val="1F2937"/>
+                </a:solidFill>
+                <a:latin typeface="Calibri" pitchFamily="34" charset="0"/>
+                <a:ea typeface="Calibri" pitchFamily="34" charset="-122"/>
+                <a:cs typeface="Calibri" pitchFamily="34" charset="-120"/>
+              </a:rPr>
+              <a:t>• Guardrails advisory, not mechanical (R4 inversion)</a:t>
+            </a:r>
+            <a:endParaRPr lang="en-US" sz="1350" dirty="0"/>
+          </a:p>
+        </p:txBody>
+      </p:sp>
+      <p:sp>
+        <p:nvSpPr>
+          <p:cNvPr id="15" name="Text 13"/>
+          <p:cNvSpPr/>
+          <p:nvPr/>
+        </p:nvSpPr>
+        <p:spPr>
+          <a:xfrm>
+            <a:off x="960120" y="5888736"/>
+            <a:ext cx="4846320" cy="365760"/>
+          </a:xfrm>
+          <a:prstGeom prst="rect">
+            <a:avLst/>
+          </a:prstGeom>
+          <a:noFill/>
+          <a:ln/>
+        </p:spPr>
+        <p:txBody>
+          <a:bodyPr wrap="square" lIns="0" tIns="0" rIns="0" bIns="0" rtlCol="0" anchor="ctr"/>
+          <a:lstStyle/>
+          <a:p>
+            <a:pPr marL="0" indent="0">
+              <a:buNone/>
+            </a:pPr>
+            <a:r>
+              <a:rPr lang="en-US" sz="1350" dirty="0">
+                <a:solidFill>
+                  <a:srgbClr val="1F2937"/>
+                </a:solidFill>
+                <a:latin typeface="Calibri" pitchFamily="34" charset="0"/>
+                <a:ea typeface="Calibri" pitchFamily="34" charset="-122"/>
+                <a:cs typeface="Calibri" pitchFamily="34" charset="-120"/>
+              </a:rPr>
+              <a:t>• N=1 per bench cell · devops lanes offline-unmeasurable</a:t>
+            </a:r>
+            <a:endParaRPr lang="en-US" sz="1350" dirty="0"/>
+          </a:p>
+        </p:txBody>
+      </p:sp>
+      <p:sp>
+        <p:nvSpPr>
+          <p:cNvPr id="16" name="Shape 14"/>
+          <p:cNvSpPr/>
+          <p:nvPr/>
+        </p:nvSpPr>
+        <p:spPr>
+          <a:xfrm>
+            <a:off x="6263640" y="2103120"/>
+            <a:ext cx="5257800" cy="4206240"/>
+          </a:xfrm>
+          <a:prstGeom prst="roundRect">
+            <a:avLst>
+              <a:gd name="adj" fmla="val 2174"/>
+            </a:avLst>
+          </a:prstGeom>
+          <a:solidFill>
+            <a:srgbClr val="EAF0FB"/>
+          </a:solidFill>
+          <a:ln w="15875">
+            <a:solidFill>
+              <a:srgbClr val="5A6B9E"/>
+            </a:solidFill>
+            <a:prstDash val="solid"/>
+          </a:ln>
+        </p:spPr>
+      </p:sp>
+      <p:sp>
+        <p:nvSpPr>
+          <p:cNvPr id="17" name="Text 15"/>
+          <p:cNvSpPr/>
+          <p:nvPr/>
+        </p:nvSpPr>
+        <p:spPr>
+          <a:xfrm>
+            <a:off x="6537960" y="2286000"/>
+            <a:ext cx="4709160" cy="320040"/>
+          </a:xfrm>
+          <a:prstGeom prst="rect">
+            <a:avLst/>
+          </a:prstGeom>
+          <a:noFill/>
+          <a:ln/>
+        </p:spPr>
+        <p:txBody>
+          <a:bodyPr wrap="square" rtlCol="0" anchor="ctr"/>
+          <a:lstStyle/>
+          <a:p>
+            <a:pPr marL="0" indent="0">
+              <a:buNone/>
+            </a:pPr>
+            <a:r>
+              <a:rPr lang="en-US" sz="1500" b="1" dirty="0">
+                <a:solidFill>
+                  <a:srgbClr val="1E2761"/>
+                </a:solidFill>
+                <a:latin typeface="Calibri" pitchFamily="34" charset="0"/>
+                <a:ea typeface="Calibri" pitchFamily="34" charset="-122"/>
+                <a:cs typeface="Calibri" pitchFamily="34" charset="-120"/>
+              </a:rPr>
+              <a:t>DELIBERATELY NOT INCLUDED</a:t>
+            </a:r>
+            <a:endParaRPr lang="en-US" sz="1500" dirty="0"/>
+          </a:p>
+        </p:txBody>
+      </p:sp>
+      <p:sp>
+        <p:nvSpPr>
+          <p:cNvPr id="18" name="Text 16"/>
+          <p:cNvSpPr/>
+          <p:nvPr/>
+        </p:nvSpPr>
+        <p:spPr>
+          <a:xfrm>
+            <a:off x="6537960" y="2697480"/>
+            <a:ext cx="4709160" cy="365760"/>
+          </a:xfrm>
+          <a:prstGeom prst="rect">
+            <a:avLst/>
+          </a:prstGeom>
+          <a:noFill/>
+          <a:ln/>
+        </p:spPr>
+        <p:txBody>
+          <a:bodyPr wrap="square" lIns="0" tIns="0" rIns="0" bIns="0" rtlCol="0" anchor="ctr"/>
+          <a:lstStyle/>
+          <a:p>
+            <a:pPr marL="0" indent="0">
+              <a:buNone/>
+            </a:pPr>
+            <a:r>
+              <a:rPr lang="en-US" sz="1350" dirty="0">
+                <a:solidFill>
+                  <a:srgbClr val="1F2937"/>
+                </a:solidFill>
+                <a:latin typeface="Calibri" pitchFamily="34" charset="0"/>
+                <a:ea typeface="Calibri" pitchFamily="34" charset="-122"/>
+                <a:cs typeface="Calibri" pitchFamily="34" charset="-120"/>
+              </a:rPr>
+              <a:t>• No hooks / auto-runtime / silent telemetry — v1 lesson</a:t>
+            </a:r>
+            <a:endParaRPr lang="en-US" sz="1350" dirty="0"/>
+          </a:p>
+        </p:txBody>
+      </p:sp>
+      <p:sp>
+        <p:nvSpPr>
+          <p:cNvPr id="19" name="Text 17"/>
+          <p:cNvSpPr/>
+          <p:nvPr/>
+        </p:nvSpPr>
+        <p:spPr>
+          <a:xfrm>
+            <a:off x="6537960" y="3099816"/>
+            <a:ext cx="4709160" cy="365760"/>
+          </a:xfrm>
+          <a:prstGeom prst="rect">
+            <a:avLst/>
+          </a:prstGeom>
+          <a:noFill/>
+          <a:ln/>
+        </p:spPr>
+        <p:txBody>
+          <a:bodyPr wrap="square" lIns="0" tIns="0" rIns="0" bIns="0" rtlCol="0" anchor="ctr"/>
+          <a:lstStyle/>
+          <a:p>
+            <a:pPr marL="0" indent="0">
+              <a:buNone/>
+            </a:pPr>
+            <a:r>
+              <a:rPr lang="en-US" sz="1350" dirty="0">
+                <a:solidFill>
+                  <a:srgbClr val="1F2937"/>
+                </a:solidFill>
+                <a:latin typeface="Calibri" pitchFamily="34" charset="0"/>
+                <a:ea typeface="Calibri" pitchFamily="34" charset="-122"/>
+                <a:cs typeface="Calibri" pitchFamily="34" charset="-120"/>
+              </a:rPr>
+              <a:t>• No auto-approve — every gate is a human decision</a:t>
+            </a:r>
+            <a:endParaRPr lang="en-US" sz="1350" dirty="0"/>
+          </a:p>
+        </p:txBody>
+      </p:sp>
+      <p:sp>
+        <p:nvSpPr>
+          <p:cNvPr id="20" name="Text 18"/>
+          <p:cNvSpPr/>
+          <p:nvPr/>
+        </p:nvSpPr>
+        <p:spPr>
+          <a:xfrm>
+            <a:off x="6537960" y="3502152"/>
+            <a:ext cx="4709160" cy="365760"/>
+          </a:xfrm>
+          <a:prstGeom prst="rect">
+            <a:avLst/>
+          </a:prstGeom>
+          <a:noFill/>
+          <a:ln/>
+        </p:spPr>
+        <p:txBody>
+          <a:bodyPr wrap="square" lIns="0" tIns="0" rIns="0" bIns="0" rtlCol="0" anchor="ctr"/>
+          <a:lstStyle/>
+          <a:p>
+            <a:pPr marL="0" indent="0">
+              <a:buNone/>
+            </a:pPr>
+            <a:r>
+              <a:rPr lang="en-US" sz="1350" dirty="0">
+                <a:solidFill>
+                  <a:srgbClr val="1F2937"/>
+                </a:solidFill>
+                <a:latin typeface="Calibri" pitchFamily="34" charset="0"/>
+                <a:ea typeface="Calibri" pitchFamily="34" charset="-122"/>
+                <a:cs typeface="Calibri" pitchFamily="34" charset="-120"/>
+              </a:rPr>
+              <a:t>• No marketing agent lanes — removed v2.6.0 (unmeasured)</a:t>
+            </a:r>
+            <a:endParaRPr lang="en-US" sz="1350" dirty="0"/>
+          </a:p>
+        </p:txBody>
+      </p:sp>
+      <p:sp>
+        <p:nvSpPr>
+          <p:cNvPr id="21" name="Text 19"/>
+          <p:cNvSpPr/>
+          <p:nvPr/>
+        </p:nvSpPr>
+        <p:spPr>
+          <a:xfrm>
+            <a:off x="6537960" y="3904488"/>
+            <a:ext cx="4709160" cy="365760"/>
+          </a:xfrm>
+          <a:prstGeom prst="rect">
+            <a:avLst/>
+          </a:prstGeom>
+          <a:noFill/>
+          <a:ln/>
+        </p:spPr>
+        <p:txBody>
+          <a:bodyPr wrap="square" lIns="0" tIns="0" rIns="0" bIns="0" rtlCol="0" anchor="ctr"/>
+          <a:lstStyle/>
+          <a:p>
+            <a:pPr marL="0" indent="0">
+              <a:buNone/>
+            </a:pPr>
+            <a:r>
+              <a:rPr lang="en-US" sz="1350" dirty="0">
+                <a:solidFill>
+                  <a:srgbClr val="1F2937"/>
+                </a:solidFill>
+                <a:latin typeface="Calibri" pitchFamily="34" charset="0"/>
+                <a:ea typeface="Calibri" pitchFamily="34" charset="-122"/>
+                <a:cs typeface="Calibri" pitchFamily="34" charset="-120"/>
+              </a:rPr>
+              <a:t>• No permissions grants — Bash(*) killed v1</a:t>
+            </a:r>
+            <a:endParaRPr lang="en-US" sz="1350" dirty="0"/>
+          </a:p>
+        </p:txBody>
+      </p:sp>
+      <p:sp>
+        <p:nvSpPr>
+          <p:cNvPr id="22" name="Text 20"/>
+          <p:cNvSpPr/>
+          <p:nvPr/>
+        </p:nvSpPr>
+        <p:spPr>
+          <a:xfrm>
+            <a:off x="6537960" y="4306824"/>
+            <a:ext cx="4709160" cy="365760"/>
+          </a:xfrm>
+          <a:prstGeom prst="rect">
+            <a:avLst/>
+          </a:prstGeom>
+          <a:noFill/>
+          <a:ln/>
+        </p:spPr>
+        <p:txBody>
+          <a:bodyPr wrap="square" lIns="0" tIns="0" rIns="0" bIns="0" rtlCol="0" anchor="ctr"/>
+          <a:lstStyle/>
+          <a:p>
+            <a:pPr marL="0" indent="0">
+              <a:buNone/>
+            </a:pPr>
+            <a:r>
+              <a:rPr lang="en-US" sz="1350" dirty="0">
+                <a:solidFill>
+                  <a:srgbClr val="1F2937"/>
+                </a:solidFill>
+                <a:latin typeface="Calibri" pitchFamily="34" charset="0"/>
+                <a:ea typeface="Calibri" pitchFamily="34" charset="-122"/>
+                <a:cs typeface="Calibri" pitchFamily="34" charset="-120"/>
+              </a:rPr>
+              <a:t>• No global memory — repo artifacts ARE the memory</a:t>
+            </a:r>
+            <a:endParaRPr lang="en-US" sz="1350" dirty="0"/>
+          </a:p>
+        </p:txBody>
+      </p:sp>
+      <p:sp>
+        <p:nvSpPr>
+          <p:cNvPr id="23" name="Text 21"/>
+          <p:cNvSpPr/>
+          <p:nvPr/>
+        </p:nvSpPr>
+        <p:spPr>
+          <a:xfrm>
+            <a:off x="6537960" y="5806440"/>
+            <a:ext cx="4709160" cy="457200"/>
+          </a:xfrm>
+          <a:prstGeom prst="rect">
+            <a:avLst/>
+          </a:prstGeom>
+          <a:noFill/>
+          <a:ln/>
+        </p:spPr>
+        <p:txBody>
+          <a:bodyPr wrap="square" rtlCol="0" anchor="ctr"/>
+          <a:lstStyle/>
+          <a:p>
+            <a:pPr marL="0" indent="0">
+              <a:buNone/>
+            </a:pPr>
+            <a:r>
+              <a:rPr lang="en-US" sz="1350" b="1" dirty="0">
+                <a:solidFill>
+                  <a:srgbClr val="1E2761"/>
+                </a:solidFill>
+                <a:latin typeface="Calibri" pitchFamily="34" charset="0"/>
+                <a:ea typeface="Calibri" pitchFamily="34" charset="-122"/>
+                <a:cs typeface="Calibri" pitchFamily="34" charset="-120"/>
+              </a:rPr>
+              <a:t>FOCUS LIST: trusted cost loop · CI plan-vs-PR enforcement · N≥3 headlines · devops staging smoke · second-model matrix.</a:t>
+            </a:r>
+            <a:endParaRPr lang="en-US" sz="1350" dirty="0"/>
+          </a:p>
+        </p:txBody>
+      </p:sp>
+    </p:spTree>
+  </p:cSld>
+  <p:clrMapOvr>
+    <a:masterClrMapping/>
+  </p:clrMapOvr>
+</p:sld>
+</file>
+
+<file path=ppt/slides/slide11.xml><?xml version="1.0" encoding="utf-8"?>
+<p:sld xmlns:a="http://schemas.openxmlformats.org/drawingml/2006/main" xmlns:r="http://schemas.openxmlformats.org/officeDocument/2006/relationships" xmlns:p="http://schemas.openxmlformats.org/presentationml/2006/main">
+  <p:cSld name="Slide 9">
+    <p:bg>
+      <p:bgPr>
+        <a:solidFill>
+          <a:srgbClr val="1E2761"/>
+        </a:solidFill>
+        <a:effectLst/>
+      </p:bgPr>
+    </p:bg>
+    <p:spTree>
+      <p:nvGrpSpPr>
+        <p:cNvPr id="1" name=""/>
+        <p:cNvGrpSpPr/>
+        <p:nvPr/>
+      </p:nvGrpSpPr>
+      <p:grpSpPr>
+        <a:xfrm>
+          <a:off x="0" y="0"/>
+          <a:ext cx="0" cy="0"/>
+          <a:chOff x="0" y="0"/>
+          <a:chExt cx="0" cy="0"/>
+        </a:xfrm>
+      </p:grpSpPr>
+      <p:sp>
+        <p:nvSpPr>
+          <p:cNvPr id="2" name="Shape 0"/>
+          <p:cNvSpPr/>
+          <p:nvPr/>
+        </p:nvSpPr>
+        <p:spPr>
+          <a:xfrm>
+            <a:off x="-2011680" y="4023360"/>
+            <a:ext cx="5120640" cy="5120640"/>
+          </a:xfrm>
+          <a:prstGeom prst="ellipse">
+            <a:avLst/>
+          </a:prstGeom>
+          <a:solidFill>
+            <a:srgbClr val="27346E"/>
+          </a:solidFill>
+          <a:ln w="12700">
+            <a:solidFill>
+              <a:srgbClr val="333333"/>
+            </a:solidFill>
+            <a:prstDash val="solid"/>
+          </a:ln>
+        </p:spPr>
+      </p:sp>
+      <p:sp>
+        <p:nvSpPr>
+          <p:cNvPr id="3" name="Text 1"/>
+          <p:cNvSpPr/>
+          <p:nvPr/>
+        </p:nvSpPr>
+        <p:spPr>
+          <a:xfrm>
+            <a:off x="731520" y="777240"/>
+            <a:ext cx="10698480" cy="365760"/>
+          </a:xfrm>
+          <a:prstGeom prst="rect">
+            <a:avLst/>
+          </a:prstGeom>
+          <a:noFill/>
+          <a:ln/>
+        </p:spPr>
+        <p:txBody>
+          <a:bodyPr wrap="square" rtlCol="0" anchor="ctr"/>
+          <a:lstStyle/>
+          <a:p>
+            <a:pPr marL="0" indent="0">
+              <a:buNone/>
+            </a:pPr>
+            <a:r>
+              <a:rPr lang="en-US" sz="1400" b="1" kern="0" spc="300" dirty="0">
+                <a:solidFill>
+                  <a:srgbClr val="F4B400"/>
+                </a:solidFill>
+                <a:latin typeface="Calibri" pitchFamily="34" charset="0"/>
+                <a:ea typeface="Calibri" pitchFamily="34" charset="-122"/>
+                <a:cs typeface="Calibri" pitchFamily="34" charset="-120"/>
+              </a:rPr>
+              <a:t>WHAT WE KNOW</a:t>
+            </a:r>
+            <a:endParaRPr lang="en-US" sz="1400" dirty="0"/>
+          </a:p>
+        </p:txBody>
+      </p:sp>
+      <p:sp>
+        <p:nvSpPr>
+          <p:cNvPr id="4" name="Text 2"/>
+          <p:cNvSpPr/>
+          <p:nvPr/>
+        </p:nvSpPr>
+        <p:spPr>
+          <a:xfrm>
+            <a:off x="731520" y="1188720"/>
+            <a:ext cx="10698480" cy="777240"/>
+          </a:xfrm>
+          <a:prstGeom prst="rect">
+            <a:avLst/>
+          </a:prstGeom>
+          <a:noFill/>
+          <a:ln/>
+        </p:spPr>
+        <p:txBody>
+          <a:bodyPr wrap="square" rtlCol="0" anchor="ctr"/>
+          <a:lstStyle/>
+          <a:p>
+            <a:pPr marL="0" indent="0">
+              <a:buNone/>
+            </a:pPr>
+            <a:r>
+              <a:rPr lang="en-US" sz="4000" b="1" dirty="0">
+                <a:solidFill>
+                  <a:srgbClr val="FFFFFF"/>
+                </a:solidFill>
+                <a:latin typeface="Cambria" pitchFamily="34" charset="0"/>
+                <a:ea typeface="Cambria" pitchFamily="34" charset="-122"/>
+                <a:cs typeface="Cambria" pitchFamily="34" charset="-120"/>
+              </a:rPr>
+              <a:t>Built from experience. Graded by evidence.</a:t>
+            </a:r>
+            <a:endParaRPr lang="en-US" sz="4000" dirty="0"/>
+          </a:p>
+        </p:txBody>
+      </p:sp>
+      <p:sp>
+        <p:nvSpPr>
+          <p:cNvPr id="5" name="Text 3"/>
+          <p:cNvSpPr/>
+          <p:nvPr/>
+        </p:nvSpPr>
+        <p:spPr>
+          <a:xfrm>
+            <a:off x="731520" y="2377440"/>
+            <a:ext cx="10698480" cy="2011680"/>
+          </a:xfrm>
+          <a:prstGeom prst="rect">
+            <a:avLst/>
+          </a:prstGeom>
+          <a:noFill/>
+          <a:ln/>
+        </p:spPr>
+        <p:txBody>
+          <a:bodyPr wrap="square" rtlCol="0" anchor="ctr"/>
+          <a:lstStyle/>
+          <a:p>
+            <a:pPr marL="342900" indent="-342900">
+              <a:spcAft>
+                <a:spcPts val="1000"/>
+              </a:spcAft>
+              <a:buSzPct val="100000"/>
+              <a:buChar char="•"/>
+            </a:pPr>
+            <a:r>
+              <a:rPr lang="en-US" sz="2000" dirty="0">
+                <a:solidFill>
+                  <a:srgbClr val="EAF0FB"/>
+                </a:solidFill>
+                <a:latin typeface="Calibri" pitchFamily="34" charset="0"/>
+                <a:ea typeface="Calibri" pitchFamily="34" charset="-122"/>
+                <a:cs typeface="Calibri" pitchFamily="34" charset="-120"/>
+              </a:rPr>
+              <a:t>The framework's value concentrates on hard engineering — measured, reproducible, labeled.</a:t>
+            </a:r>
+            <a:endParaRPr lang="en-US" sz="2000" dirty="0"/>
+          </a:p>
+          <a:p>
+            <a:pPr marL="342900" indent="-342900">
+              <a:spcAft>
+                <a:spcPts val="1000"/>
+              </a:spcAft>
+              <a:buSzPct val="100000"/>
+              <a:buChar char="•"/>
+            </a:pPr>
+            <a:r>
+              <a:rPr lang="en-US" sz="2000" dirty="0">
+                <a:solidFill>
+                  <a:srgbClr val="EAF0FB"/>
+                </a:solidFill>
+                <a:latin typeface="Calibri" pitchFamily="34" charset="0"/>
+                <a:ea typeface="Calibri" pitchFamily="34" charset="-122"/>
+                <a:cs typeface="Calibri" pitchFamily="34" charset="-120"/>
+              </a:rPr>
+              <a:t>Gaps are shown, not hidden (cost metering, advisory guardrails, N=1 cells).</a:t>
+            </a:r>
+            <a:endParaRPr lang="en-US" sz="2000" dirty="0"/>
+          </a:p>
+          <a:p>
+            <a:pPr marL="342900" indent="-342900">
+              <a:spcAft>
+                <a:spcPts val="1000"/>
+              </a:spcAft>
+              <a:buSzPct val="100000"/>
+              <a:buChar char="•"/>
+            </a:pPr>
+            <a:r>
+              <a:rPr lang="en-US" sz="2000" dirty="0">
+                <a:solidFill>
+                  <a:srgbClr val="EAF0FB"/>
+                </a:solidFill>
+                <a:latin typeface="Calibri" pitchFamily="34" charset="0"/>
+                <a:ea typeface="Calibri" pitchFamily="34" charset="-122"/>
+                <a:cs typeface="Calibri" pitchFamily="34" charset="-120"/>
+              </a:rPr>
+              <a:t>Fork first: experiments live on the fork; the official ex-company repo stays read-only.</a:t>
+            </a:r>
+            <a:endParaRPr lang="en-US" sz="2000" dirty="0"/>
+          </a:p>
+        </p:txBody>
+      </p:sp>
+      <p:sp>
+        <p:nvSpPr>
+          <p:cNvPr id="6" name="Text 4"/>
+          <p:cNvSpPr/>
+          <p:nvPr/>
+        </p:nvSpPr>
+        <p:spPr>
+          <a:xfrm>
+            <a:off x="731520" y="5029200"/>
+            <a:ext cx="10698480" cy="457200"/>
+          </a:xfrm>
+          <a:prstGeom prst="rect">
+            <a:avLst/>
+          </a:prstGeom>
+          <a:noFill/>
+          <a:ln/>
+        </p:spPr>
+        <p:txBody>
+          <a:bodyPr wrap="square" rtlCol="0" anchor="ctr"/>
+          <a:lstStyle/>
+          <a:p>
+            <a:pPr marL="0" indent="0">
+              <a:buNone/>
+            </a:pPr>
+            <a:r>
+              <a:rPr lang="en-US" sz="1800" b="1" dirty="0">
+                <a:solidFill>
+                  <a:srgbClr val="F4B400"/>
+                </a:solidFill>
+                <a:latin typeface="Calibri" pitchFamily="34" charset="0"/>
+                <a:ea typeface="Calibri" pitchFamily="34" charset="-122"/>
+                <a:cs typeface="Calibri" pitchFamily="34" charset="-120"/>
+              </a:rPr>
+              <a:t>Everything ships in the repo: github.com/trac41799/claude-code-agentic-sdlc (evidence/ · docs/demo/live-demo-guide.md · docs/benchmarks/BENCHMARK-SUMMARY.md)</a:t>
+            </a:r>
+            <a:endParaRPr lang="en-US" sz="1800" dirty="0"/>
+          </a:p>
+        </p:txBody>
+      </p:sp>
+      <p:sp>
+        <p:nvSpPr>
+          <p:cNvPr id="7" name="Text 5"/>
+          <p:cNvSpPr/>
+          <p:nvPr/>
+        </p:nvSpPr>
+        <p:spPr>
+          <a:xfrm>
+            <a:off x="731520" y="5760720"/>
+            <a:ext cx="10698480" cy="457200"/>
+          </a:xfrm>
+          <a:prstGeom prst="rect">
+            <a:avLst/>
+          </a:prstGeom>
+          <a:noFill/>
+          <a:ln/>
+        </p:spPr>
+        <p:txBody>
+          <a:bodyPr wrap="square" rtlCol="0" anchor="ctr"/>
+          <a:lstStyle/>
+          <a:p>
+            <a:pPr marL="0" indent="0">
+              <a:buNone/>
+            </a:pPr>
+            <a:r>
+              <a:rPr lang="en-US" sz="2200" b="1" i="1" dirty="0">
+                <a:solidFill>
+                  <a:srgbClr val="FFFFFF"/>
+                </a:solidFill>
+                <a:latin typeface="Cambria" pitchFamily="34" charset="0"/>
+                <a:ea typeface="Cambria" pitchFamily="34" charset="-122"/>
+                <a:cs typeface="Cambria" pitchFamily="34" charset="-120"/>
+              </a:rPr>
+              <a:t>Not a solved discipline — a repeatable, honest one.</a:t>
+            </a:r>
+            <a:endParaRPr lang="en-US" sz="2200" dirty="0"/>
           </a:p>
         </p:txBody>
       </p:sp>
@@ -2126,6 +3234,7 @@
         <a:solidFill>
           <a:srgbClr val="FFFFFF"/>
         </a:solidFill>
+        <a:effectLst/>
       </p:bgPr>
     </p:bg>
     <p:spTree>
@@ -2163,11 +3272,11 @@
           <a:bodyPr wrap="square" rtlCol="0" anchor="ctr"/>
           <a:lstStyle/>
           <a:p>
-            <a:pPr indent="0" marL="0">
-              <a:buNone/>
-            </a:pPr>
-            <a:r>
-              <a:rPr lang="en-US" sz="1300" b="1" spc="200" kern="0" dirty="0">
+            <a:pPr marL="0" indent="0">
+              <a:buNone/>
+            </a:pPr>
+            <a:r>
+              <a:rPr lang="en-US" sz="1300" b="1" kern="0" spc="200" dirty="0">
                 <a:solidFill>
                   <a:srgbClr val="B98A00"/>
                 </a:solidFill>
@@ -2202,7 +3311,7 @@
           <a:bodyPr wrap="square" rtlCol="0" anchor="ctr"/>
           <a:lstStyle/>
           <a:p>
-            <a:pPr indent="0" marL="0">
+            <a:pPr marL="0" indent="0">
               <a:buNone/>
             </a:pPr>
             <a:r>
@@ -2241,7 +3350,7 @@
           <a:bodyPr wrap="square" rtlCol="0" anchor="ctr"/>
           <a:lstStyle/>
           <a:p>
-            <a:pPr indent="0" marL="0">
+            <a:pPr marL="0" indent="0">
               <a:buNone/>
             </a:pPr>
             <a:r>
@@ -2307,7 +3416,7 @@
           <a:bodyPr wrap="square" rtlCol="0" anchor="ctr"/>
           <a:lstStyle/>
           <a:p>
-            <a:pPr indent="0" marL="0">
+            <a:pPr marL="0" indent="0">
               <a:buNone/>
             </a:pPr>
             <a:r>
@@ -2346,7 +3455,7 @@
           <a:bodyPr wrap="square" rtlCol="0" anchor="ctr"/>
           <a:lstStyle/>
           <a:p>
-            <a:pPr indent="0" marL="0">
+            <a:pPr marL="0" indent="0">
               <a:buNone/>
             </a:pPr>
             <a:r>
@@ -2412,7 +3521,7 @@
           <a:bodyPr wrap="square" rtlCol="0" anchor="ctr"/>
           <a:lstStyle/>
           <a:p>
-            <a:pPr indent="0" marL="0">
+            <a:pPr marL="0" indent="0">
               <a:buNone/>
             </a:pPr>
             <a:r>
@@ -2451,7 +3560,7 @@
           <a:bodyPr wrap="square" rtlCol="0" anchor="ctr"/>
           <a:lstStyle/>
           <a:p>
-            <a:pPr indent="0" marL="0">
+            <a:pPr marL="0" indent="0">
               <a:buNone/>
             </a:pPr>
             <a:r>
@@ -2517,7 +3626,7 @@
           <a:bodyPr wrap="square" rtlCol="0" anchor="ctr"/>
           <a:lstStyle/>
           <a:p>
-            <a:pPr indent="0" marL="0">
+            <a:pPr marL="0" indent="0">
               <a:buNone/>
             </a:pPr>
             <a:r>
@@ -2556,7 +3665,7 @@
           <a:bodyPr wrap="square" rtlCol="0" anchor="ctr"/>
           <a:lstStyle/>
           <a:p>
-            <a:pPr indent="0" marL="0">
+            <a:pPr marL="0" indent="0">
               <a:buNone/>
             </a:pPr>
             <a:r>
@@ -2622,7 +3731,7 @@
           <a:bodyPr wrap="square" lIns="0" tIns="0" rIns="0" bIns="0" rtlCol="0" anchor="ctr"/>
           <a:lstStyle/>
           <a:p>
-            <a:pPr algn="ctr" indent="0" marL="0">
+            <a:pPr marL="0" indent="0" algn="ctr">
               <a:buNone/>
             </a:pPr>
             <a:r>
@@ -2661,7 +3770,7 @@
           <a:bodyPr wrap="square" lIns="0" tIns="0" rIns="0" bIns="0" rtlCol="0" anchor="ctr"/>
           <a:lstStyle/>
           <a:p>
-            <a:pPr algn="ctr" indent="0" marL="0">
+            <a:pPr marL="0" indent="0" algn="ctr">
               <a:buNone/>
             </a:pPr>
             <a:r>
@@ -2727,7 +3836,7 @@
           <a:bodyPr wrap="square" lIns="0" tIns="0" rIns="0" bIns="0" rtlCol="0" anchor="ctr"/>
           <a:lstStyle/>
           <a:p>
-            <a:pPr algn="ctr" indent="0" marL="0">
+            <a:pPr marL="0" indent="0" algn="ctr">
               <a:buNone/>
             </a:pPr>
             <a:r>
@@ -2766,7 +3875,7 @@
           <a:bodyPr wrap="square" lIns="0" tIns="0" rIns="0" bIns="0" rtlCol="0" anchor="ctr"/>
           <a:lstStyle/>
           <a:p>
-            <a:pPr algn="ctr" indent="0" marL="0">
+            <a:pPr marL="0" indent="0" algn="ctr">
               <a:buNone/>
             </a:pPr>
             <a:r>
@@ -2832,7 +3941,7 @@
           <a:bodyPr wrap="square" lIns="0" tIns="0" rIns="0" bIns="0" rtlCol="0" anchor="ctr"/>
           <a:lstStyle/>
           <a:p>
-            <a:pPr algn="ctr" indent="0" marL="0">
+            <a:pPr marL="0" indent="0" algn="ctr">
               <a:buNone/>
             </a:pPr>
             <a:r>
@@ -2871,7 +3980,7 @@
           <a:bodyPr wrap="square" lIns="0" tIns="0" rIns="0" bIns="0" rtlCol="0" anchor="ctr"/>
           <a:lstStyle/>
           <a:p>
-            <a:pPr algn="ctr" indent="0" marL="0">
+            <a:pPr marL="0" indent="0" algn="ctr">
               <a:buNone/>
             </a:pPr>
             <a:r>
@@ -2937,7 +4046,7 @@
           <a:bodyPr wrap="square" lIns="0" tIns="0" rIns="0" bIns="0" rtlCol="0" anchor="ctr"/>
           <a:lstStyle/>
           <a:p>
-            <a:pPr algn="ctr" indent="0" marL="0">
+            <a:pPr marL="0" indent="0" algn="ctr">
               <a:buNone/>
             </a:pPr>
             <a:r>
@@ -2976,7 +4085,7 @@
           <a:bodyPr wrap="square" lIns="0" tIns="0" rIns="0" bIns="0" rtlCol="0" anchor="ctr"/>
           <a:lstStyle/>
           <a:p>
-            <a:pPr algn="ctr" indent="0" marL="0">
+            <a:pPr marL="0" indent="0" algn="ctr">
               <a:buNone/>
             </a:pPr>
             <a:r>
@@ -3042,7 +4151,7 @@
           <a:bodyPr wrap="square" lIns="0" tIns="0" rIns="0" bIns="0" rtlCol="0" anchor="ctr"/>
           <a:lstStyle/>
           <a:p>
-            <a:pPr algn="ctr" indent="0" marL="0">
+            <a:pPr marL="0" indent="0" algn="ctr">
               <a:buNone/>
             </a:pPr>
             <a:r>
@@ -3081,7 +4190,7 @@
           <a:bodyPr wrap="square" lIns="0" tIns="0" rIns="0" bIns="0" rtlCol="0" anchor="ctr"/>
           <a:lstStyle/>
           <a:p>
-            <a:pPr algn="ctr" indent="0" marL="0">
+            <a:pPr marL="0" indent="0" algn="ctr">
               <a:buNone/>
             </a:pPr>
             <a:r>
@@ -3147,7 +4256,7 @@
           <a:bodyPr wrap="square" lIns="0" tIns="0" rIns="0" bIns="0" rtlCol="0" anchor="ctr"/>
           <a:lstStyle/>
           <a:p>
-            <a:pPr algn="ctr" indent="0" marL="0">
+            <a:pPr marL="0" indent="0" algn="ctr">
               <a:buNone/>
             </a:pPr>
             <a:r>
@@ -3186,7 +4295,7 @@
           <a:bodyPr wrap="square" rtlCol="0" anchor="ctr"/>
           <a:lstStyle/>
           <a:p>
-            <a:pPr indent="0" marL="0">
+            <a:pPr marL="0" indent="0">
               <a:buNone/>
             </a:pPr>
             <a:r>
@@ -3252,7 +4361,7 @@
           <a:bodyPr wrap="square" lIns="0" tIns="0" rIns="0" bIns="0" rtlCol="0" anchor="ctr"/>
           <a:lstStyle/>
           <a:p>
-            <a:pPr algn="ctr" indent="0" marL="0">
+            <a:pPr marL="0" indent="0" algn="ctr">
               <a:buNone/>
             </a:pPr>
             <a:r>
@@ -3286,6 +4395,7 @@
         <a:solidFill>
           <a:srgbClr val="FFFFFF"/>
         </a:solidFill>
+        <a:effectLst/>
       </p:bgPr>
     </p:bg>
     <p:spTree>
@@ -3323,11 +4433,11 @@
           <a:bodyPr wrap="square" rtlCol="0" anchor="ctr"/>
           <a:lstStyle/>
           <a:p>
-            <a:pPr indent="0" marL="0">
-              <a:buNone/>
-            </a:pPr>
-            <a:r>
-              <a:rPr lang="en-US" sz="1300" b="1" spc="200" kern="0" dirty="0">
+            <a:pPr marL="0" indent="0">
+              <a:buNone/>
+            </a:pPr>
+            <a:r>
+              <a:rPr lang="en-US" sz="1300" b="1" kern="0" spc="200" dirty="0">
                 <a:solidFill>
                   <a:srgbClr val="B98A00"/>
                 </a:solidFill>
@@ -3362,7 +4472,7 @@
           <a:bodyPr wrap="square" rtlCol="0" anchor="ctr"/>
           <a:lstStyle/>
           <a:p>
-            <a:pPr indent="0" marL="0">
+            <a:pPr marL="0" indent="0">
               <a:buNone/>
             </a:pPr>
             <a:r>
@@ -3401,7 +4511,7 @@
           <a:bodyPr wrap="square" rtlCol="0" anchor="ctr"/>
           <a:lstStyle/>
           <a:p>
-            <a:pPr indent="0" marL="0">
+            <a:pPr marL="0" indent="0">
               <a:buNone/>
             </a:pPr>
             <a:r>
@@ -3467,7 +4577,7 @@
           <a:bodyPr wrap="square" rtlCol="0" anchor="ctr"/>
           <a:lstStyle/>
           <a:p>
-            <a:pPr indent="0" marL="0">
+            <a:pPr marL="0" indent="0">
               <a:buNone/>
             </a:pPr>
             <a:r>
@@ -3506,7 +4616,7 @@
           <a:bodyPr wrap="square" lIns="0" tIns="0" rIns="0" bIns="0" rtlCol="0" anchor="ctr"/>
           <a:lstStyle/>
           <a:p>
-            <a:pPr indent="0" marL="0">
+            <a:pPr marL="0" indent="0">
               <a:buNone/>
             </a:pPr>
             <a:r>
@@ -3545,7 +4655,7 @@
           <a:bodyPr wrap="square" lIns="0" tIns="0" rIns="0" bIns="0" rtlCol="0" anchor="ctr"/>
           <a:lstStyle/>
           <a:p>
-            <a:pPr indent="0" marL="0">
+            <a:pPr marL="0" indent="0">
               <a:buNone/>
             </a:pPr>
             <a:r>
@@ -3584,7 +4694,7 @@
           <a:bodyPr wrap="square" lIns="0" tIns="0" rIns="0" bIns="0" rtlCol="0" anchor="ctr"/>
           <a:lstStyle/>
           <a:p>
-            <a:pPr indent="0" marL="0">
+            <a:pPr marL="0" indent="0">
               <a:buNone/>
             </a:pPr>
             <a:r>
@@ -3623,7 +4733,7 @@
           <a:bodyPr wrap="square" lIns="0" tIns="0" rIns="0" bIns="0" rtlCol="0" anchor="ctr"/>
           <a:lstStyle/>
           <a:p>
-            <a:pPr indent="0" marL="0">
+            <a:pPr marL="0" indent="0">
               <a:buNone/>
             </a:pPr>
             <a:r>
@@ -3662,7 +4772,7 @@
           <a:bodyPr wrap="square" lIns="0" tIns="0" rIns="0" bIns="0" rtlCol="0" anchor="ctr"/>
           <a:lstStyle/>
           <a:p>
-            <a:pPr indent="0" marL="0">
+            <a:pPr marL="0" indent="0">
               <a:buNone/>
             </a:pPr>
             <a:r>
@@ -3728,7 +4838,7 @@
           <a:bodyPr wrap="square" rtlCol="0" anchor="ctr"/>
           <a:lstStyle/>
           <a:p>
-            <a:pPr indent="0" marL="0">
+            <a:pPr marL="0" indent="0">
               <a:buNone/>
             </a:pPr>
             <a:r>
@@ -3767,7 +4877,7 @@
           <a:bodyPr wrap="square" lIns="0" tIns="0" rIns="0" bIns="0" rtlCol="0" anchor="ctr"/>
           <a:lstStyle/>
           <a:p>
-            <a:pPr indent="0" marL="0">
+            <a:pPr marL="0" indent="0">
               <a:buNone/>
             </a:pPr>
             <a:r>
@@ -3806,7 +4916,7 @@
           <a:bodyPr wrap="square" lIns="0" tIns="0" rIns="0" bIns="0" rtlCol="0" anchor="ctr"/>
           <a:lstStyle/>
           <a:p>
-            <a:pPr indent="0" marL="0">
+            <a:pPr marL="0" indent="0">
               <a:buNone/>
             </a:pPr>
             <a:r>
@@ -3845,7 +4955,7 @@
           <a:bodyPr wrap="square" lIns="0" tIns="0" rIns="0" bIns="0" rtlCol="0" anchor="ctr"/>
           <a:lstStyle/>
           <a:p>
-            <a:pPr indent="0" marL="0">
+            <a:pPr marL="0" indent="0">
               <a:buNone/>
             </a:pPr>
             <a:r>
@@ -3884,7 +4994,7 @@
           <a:bodyPr wrap="square" lIns="0" tIns="0" rIns="0" bIns="0" rtlCol="0" anchor="ctr"/>
           <a:lstStyle/>
           <a:p>
-            <a:pPr indent="0" marL="0">
+            <a:pPr marL="0" indent="0">
               <a:buNone/>
             </a:pPr>
             <a:r>
@@ -3923,7 +5033,7 @@
           <a:bodyPr wrap="square" lIns="0" tIns="0" rIns="0" bIns="0" rtlCol="0" anchor="ctr"/>
           <a:lstStyle/>
           <a:p>
-            <a:pPr indent="0" marL="0">
+            <a:pPr marL="0" indent="0">
               <a:buNone/>
             </a:pPr>
             <a:r>
@@ -3962,7 +5072,7 @@
           <a:bodyPr wrap="square" lIns="0" tIns="0" rIns="0" bIns="0" rtlCol="0" anchor="ctr"/>
           <a:lstStyle/>
           <a:p>
-            <a:pPr indent="0" marL="0">
+            <a:pPr marL="0" indent="0">
               <a:buNone/>
             </a:pPr>
             <a:r>
@@ -4001,7 +5111,7 @@
           <a:bodyPr wrap="square" lIns="0" tIns="0" rIns="0" bIns="0" rtlCol="0" anchor="ctr"/>
           <a:lstStyle/>
           <a:p>
-            <a:pPr indent="0" marL="0">
+            <a:pPr marL="0" indent="0">
               <a:buNone/>
             </a:pPr>
             <a:r>
@@ -4040,7 +5150,7 @@
           <a:bodyPr wrap="square" lIns="0" tIns="0" rIns="0" bIns="0" rtlCol="0" anchor="ctr"/>
           <a:lstStyle/>
           <a:p>
-            <a:pPr indent="0" marL="0">
+            <a:pPr marL="0" indent="0">
               <a:buNone/>
             </a:pPr>
             <a:r>
@@ -4079,7 +5189,7 @@
           <a:bodyPr wrap="square" lIns="0" tIns="0" rIns="0" bIns="0" rtlCol="0" anchor="ctr"/>
           <a:lstStyle/>
           <a:p>
-            <a:pPr indent="0" marL="0">
+            <a:pPr marL="0" indent="0">
               <a:buNone/>
             </a:pPr>
             <a:r>
@@ -4118,7 +5228,7 @@
           <a:bodyPr wrap="square" lIns="0" tIns="0" rIns="0" bIns="0" rtlCol="0" anchor="ctr"/>
           <a:lstStyle/>
           <a:p>
-            <a:pPr indent="0" marL="0">
+            <a:pPr marL="0" indent="0">
               <a:buNone/>
             </a:pPr>
             <a:r>
@@ -4184,7 +5294,7 @@
           <a:bodyPr wrap="square" rtlCol="0" anchor="ctr"/>
           <a:lstStyle/>
           <a:p>
-            <a:pPr indent="0" marL="0">
+            <a:pPr marL="0" indent="0">
               <a:buNone/>
             </a:pPr>
             <a:r>
@@ -4223,7 +5333,7 @@
           <a:bodyPr wrap="square" lIns="0" tIns="0" rIns="0" bIns="0" rtlCol="0" anchor="ctr"/>
           <a:lstStyle/>
           <a:p>
-            <a:pPr indent="0" marL="0">
+            <a:pPr marL="0" indent="0">
               <a:buNone/>
             </a:pPr>
             <a:r>
@@ -4262,7 +5372,7 @@
           <a:bodyPr wrap="square" lIns="0" tIns="0" rIns="0" bIns="0" rtlCol="0" anchor="ctr"/>
           <a:lstStyle/>
           <a:p>
-            <a:pPr indent="0" marL="0">
+            <a:pPr marL="0" indent="0">
               <a:buNone/>
             </a:pPr>
             <a:r>
@@ -4301,7 +5411,7 @@
           <a:bodyPr wrap="square" lIns="0" tIns="0" rIns="0" bIns="0" rtlCol="0" anchor="ctr"/>
           <a:lstStyle/>
           <a:p>
-            <a:pPr indent="0" marL="0">
+            <a:pPr marL="0" indent="0">
               <a:buNone/>
             </a:pPr>
             <a:r>
@@ -4340,7 +5450,7 @@
           <a:bodyPr wrap="square" lIns="0" tIns="0" rIns="0" bIns="0" rtlCol="0" anchor="ctr"/>
           <a:lstStyle/>
           <a:p>
-            <a:pPr indent="0" marL="0">
+            <a:pPr marL="0" indent="0">
               <a:buNone/>
             </a:pPr>
             <a:r>
@@ -4379,7 +5489,7 @@
           <a:bodyPr wrap="square" lIns="0" tIns="0" rIns="0" bIns="0" rtlCol="0" anchor="ctr"/>
           <a:lstStyle/>
           <a:p>
-            <a:pPr indent="0" marL="0">
+            <a:pPr marL="0" indent="0">
               <a:buNone/>
             </a:pPr>
             <a:r>
@@ -4418,7 +5528,7 @@
           <a:bodyPr wrap="square" lIns="0" tIns="0" rIns="0" bIns="0" rtlCol="0" anchor="ctr"/>
           <a:lstStyle/>
           <a:p>
-            <a:pPr indent="0" marL="0">
+            <a:pPr marL="0" indent="0">
               <a:buNone/>
             </a:pPr>
             <a:r>
@@ -4457,7 +5567,7 @@
           <a:bodyPr wrap="square" lIns="0" tIns="0" rIns="0" bIns="0" rtlCol="0" anchor="ctr"/>
           <a:lstStyle/>
           <a:p>
-            <a:pPr indent="0" marL="0">
+            <a:pPr marL="0" indent="0">
               <a:buNone/>
             </a:pPr>
             <a:r>
@@ -4496,7 +5606,7 @@
           <a:bodyPr wrap="square" lIns="0" tIns="0" rIns="0" bIns="0" rtlCol="0" anchor="ctr"/>
           <a:lstStyle/>
           <a:p>
-            <a:pPr indent="0" marL="0">
+            <a:pPr marL="0" indent="0">
               <a:buNone/>
             </a:pPr>
             <a:r>
@@ -4535,7 +5645,7 @@
           <a:bodyPr wrap="square" lIns="0" tIns="0" rIns="0" bIns="0" rtlCol="0" anchor="ctr"/>
           <a:lstStyle/>
           <a:p>
-            <a:pPr indent="0" marL="0">
+            <a:pPr marL="0" indent="0">
               <a:buNone/>
             </a:pPr>
             <a:r>
@@ -4574,7 +5684,7 @@
           <a:bodyPr wrap="square" lIns="0" tIns="0" rIns="0" bIns="0" rtlCol="0" anchor="ctr"/>
           <a:lstStyle/>
           <a:p>
-            <a:pPr indent="0" marL="0">
+            <a:pPr marL="0" indent="0">
               <a:buNone/>
             </a:pPr>
             <a:r>
@@ -4608,6 +5718,7 @@
         <a:solidFill>
           <a:srgbClr val="FFFFFF"/>
         </a:solidFill>
+        <a:effectLst/>
       </p:bgPr>
     </p:bg>
     <p:spTree>
@@ -4645,11 +5756,11 @@
           <a:bodyPr wrap="square" rtlCol="0" anchor="ctr"/>
           <a:lstStyle/>
           <a:p>
-            <a:pPr indent="0" marL="0">
-              <a:buNone/>
-            </a:pPr>
-            <a:r>
-              <a:rPr lang="en-US" sz="1300" b="1" spc="200" kern="0" dirty="0">
+            <a:pPr marL="0" indent="0">
+              <a:buNone/>
+            </a:pPr>
+            <a:r>
+              <a:rPr lang="en-US" sz="1300" b="1" kern="0" spc="200" dirty="0">
                 <a:solidFill>
                   <a:srgbClr val="B98A00"/>
                 </a:solidFill>
@@ -4684,7 +5795,7 @@
           <a:bodyPr wrap="square" rtlCol="0" anchor="ctr"/>
           <a:lstStyle/>
           <a:p>
-            <a:pPr indent="0" marL="0">
+            <a:pPr marL="0" indent="0">
               <a:buNone/>
             </a:pPr>
             <a:r>
@@ -4723,7 +5834,7 @@
           <a:bodyPr wrap="square" rtlCol="0" anchor="ctr"/>
           <a:lstStyle/>
           <a:p>
-            <a:pPr indent="0" marL="0">
+            <a:pPr marL="0" indent="0">
               <a:buNone/>
             </a:pPr>
             <a:r>
@@ -4743,14 +5854,14 @@
       </p:sp>
       <p:pic>
         <p:nvPicPr>
-          <p:cNvPr id="5" name="Image 0" descr="D:\TRANSFER DATA\Coding\claude-code-agentic-sdlc\docs\slides/sdlc-cycle.png">    </p:cNvPr>
+          <p:cNvPr id="5" name="Image 0" descr="D:\TRANSFER DATA\Coding\claude-code-agentic-sdlc\docs\slides/sdlc-cycle.png"/>
           <p:cNvPicPr>
             <a:picLocks noChangeAspect="1"/>
           </p:cNvPicPr>
           <p:nvPr/>
         </p:nvPicPr>
         <p:blipFill>
-          <a:blip r:embed="rId1"/>
+          <a:blip r:embed="rId3"/>
           <a:stretch>
             <a:fillRect/>
           </a:stretch>
@@ -4786,7 +5897,7 @@
           <a:bodyPr wrap="square" rtlCol="0" anchor="ctr"/>
           <a:lstStyle/>
           <a:p>
-            <a:pPr indent="0" marL="0">
+            <a:pPr marL="0" indent="0">
               <a:buNone/>
             </a:pPr>
             <a:r>
@@ -4820,6 +5931,7 @@
         <a:solidFill>
           <a:srgbClr val="FFFFFF"/>
         </a:solidFill>
+        <a:effectLst/>
       </p:bgPr>
     </p:bg>
     <p:spTree>
@@ -4857,11 +5969,11 @@
           <a:bodyPr wrap="square" rtlCol="0" anchor="ctr"/>
           <a:lstStyle/>
           <a:p>
-            <a:pPr indent="0" marL="0">
-              <a:buNone/>
-            </a:pPr>
-            <a:r>
-              <a:rPr lang="en-US" sz="1300" b="1" spc="200" kern="0" dirty="0">
+            <a:pPr marL="0" indent="0">
+              <a:buNone/>
+            </a:pPr>
+            <a:r>
+              <a:rPr lang="en-US" sz="1300" b="1" kern="0" spc="200" dirty="0">
                 <a:solidFill>
                   <a:srgbClr val="B98A00"/>
                 </a:solidFill>
@@ -4896,7 +6008,7 @@
           <a:bodyPr wrap="square" rtlCol="0" anchor="ctr"/>
           <a:lstStyle/>
           <a:p>
-            <a:pPr indent="0" marL="0">
+            <a:pPr marL="0" indent="0">
               <a:buNone/>
             </a:pPr>
             <a:r>
@@ -4935,7 +6047,7 @@
           <a:bodyPr wrap="square" rtlCol="0" anchor="ctr"/>
           <a:lstStyle/>
           <a:p>
-            <a:pPr indent="0" marL="0">
+            <a:pPr marL="0" indent="0">
               <a:buNone/>
             </a:pPr>
             <a:r>
@@ -4955,14 +6067,14 @@
       </p:sp>
       <p:pic>
         <p:nvPicPr>
-          <p:cNvPr id="5" name="Image 0" descr="D:\TRANSFER DATA\Coding\claude-code-agentic-sdlc\docs\slides/workflow-diagram.png">    </p:cNvPr>
+          <p:cNvPr id="5" name="Image 0" descr="D:\TRANSFER DATA\Coding\claude-code-agentic-sdlc\docs\slides/workflow-diagram.png"/>
           <p:cNvPicPr>
             <a:picLocks noChangeAspect="1"/>
           </p:cNvPicPr>
           <p:nvPr/>
         </p:nvPicPr>
         <p:blipFill>
-          <a:blip r:embed="rId1"/>
+          <a:blip r:embed="rId3"/>
           <a:stretch>
             <a:fillRect/>
           </a:stretch>
@@ -4998,7 +6110,7 @@
           <a:bodyPr wrap="square" rtlCol="0" anchor="ctr"/>
           <a:lstStyle/>
           <a:p>
-            <a:pPr indent="0" marL="0">
+            <a:pPr marL="0" indent="0">
               <a:buNone/>
             </a:pPr>
             <a:r>
@@ -5032,6 +6144,7 @@
         <a:solidFill>
           <a:srgbClr val="FFFFFF"/>
         </a:solidFill>
+        <a:effectLst/>
       </p:bgPr>
     </p:bg>
     <p:spTree>
@@ -5069,11 +6182,11 @@
           <a:bodyPr wrap="square" rtlCol="0" anchor="ctr"/>
           <a:lstStyle/>
           <a:p>
-            <a:pPr indent="0" marL="0">
-              <a:buNone/>
-            </a:pPr>
-            <a:r>
-              <a:rPr lang="en-US" sz="1300" b="1" spc="200" kern="0" dirty="0">
+            <a:pPr marL="0" indent="0">
+              <a:buNone/>
+            </a:pPr>
+            <a:r>
+              <a:rPr lang="en-US" sz="1300" b="1" kern="0" spc="200" dirty="0">
                 <a:solidFill>
                   <a:srgbClr val="B98A00"/>
                 </a:solidFill>
@@ -5108,7 +6221,7 @@
           <a:bodyPr wrap="square" rtlCol="0" anchor="ctr"/>
           <a:lstStyle/>
           <a:p>
-            <a:pPr indent="0" marL="0">
+            <a:pPr marL="0" indent="0">
               <a:buNone/>
             </a:pPr>
             <a:r>
@@ -5147,7 +6260,7 @@
           <a:bodyPr wrap="square" rtlCol="0" anchor="ctr"/>
           <a:lstStyle/>
           <a:p>
-            <a:pPr indent="0" marL="0">
+            <a:pPr marL="0" indent="0">
               <a:buNone/>
             </a:pPr>
             <a:r>
@@ -5186,7 +6299,7 @@
           <a:bodyPr wrap="square" rtlCol="0" anchor="ctr"/>
           <a:lstStyle/>
           <a:p>
-            <a:pPr indent="0" marL="0">
+            <a:pPr marL="0" indent="0">
               <a:buNone/>
             </a:pPr>
             <a:r>
@@ -5225,7 +6338,7 @@
           <a:bodyPr wrap="square" rtlCol="0" anchor="ctr"/>
           <a:lstStyle/>
           <a:p>
-            <a:pPr indent="0" marL="0">
+            <a:pPr marL="0" indent="0">
               <a:buNone/>
             </a:pPr>
             <a:r>
@@ -5245,14 +6358,14 @@
       </p:sp>
       <p:pic>
         <p:nvPicPr>
-          <p:cNvPr id="7" name="Image 0" descr="D:\TRANSFER DATA\Coding\claude-code-agentic-sdlc\docs\slides/evidence-be-b.png">    </p:cNvPr>
+          <p:cNvPr id="7" name="Image 0" descr="D:\TRANSFER DATA\Coding\claude-code-agentic-sdlc\docs\slides/evidence-be-b.png"/>
           <p:cNvPicPr>
             <a:picLocks noChangeAspect="1"/>
           </p:cNvPicPr>
           <p:nvPr/>
         </p:nvPicPr>
         <p:blipFill>
-          <a:blip r:embed="rId1"/>
+          <a:blip r:embed="rId3"/>
           <a:stretch>
             <a:fillRect/>
           </a:stretch>
@@ -5269,14 +6382,14 @@
       </p:pic>
       <p:pic>
         <p:nvPicPr>
-          <p:cNvPr id="8" name="Image 1" descr="D:\TRANSFER DATA\Coding\claude-code-agentic-sdlc\docs\slides/evidence-be-a.png">    </p:cNvPr>
+          <p:cNvPr id="8" name="Image 1" descr="D:\TRANSFER DATA\Coding\claude-code-agentic-sdlc\docs\slides/evidence-be-a.png"/>
           <p:cNvPicPr>
             <a:picLocks noChangeAspect="1"/>
           </p:cNvPicPr>
           <p:nvPr/>
         </p:nvPicPr>
         <p:blipFill>
-          <a:blip r:embed="rId2"/>
+          <a:blip r:embed="rId4"/>
           <a:stretch>
             <a:fillRect/>
           </a:stretch>
@@ -5312,7 +6425,7 @@
           <a:bodyPr wrap="square" rtlCol="0" anchor="ctr"/>
           <a:lstStyle/>
           <a:p>
-            <a:pPr indent="0" marL="0">
+            <a:pPr marL="0" indent="0">
               <a:buNone/>
             </a:pPr>
             <a:r>
@@ -5351,7 +6464,7 @@
           <a:bodyPr wrap="square" rtlCol="0" anchor="ctr"/>
           <a:lstStyle/>
           <a:p>
-            <a:pPr indent="0" marL="0">
+            <a:pPr marL="0" indent="0">
               <a:buNone/>
             </a:pPr>
             <a:r>
@@ -5379,12 +6492,1783 @@
 
 <file path=ppt/slides/slide7.xml><?xml version="1.0" encoding="utf-8"?>
 <p:sld xmlns:a="http://schemas.openxmlformats.org/drawingml/2006/main" xmlns:r="http://schemas.openxmlformats.org/officeDocument/2006/relationships" xmlns:p="http://schemas.openxmlformats.org/presentationml/2006/main">
+  <p:cSld>
+    <p:spTree>
+      <p:nvGrpSpPr>
+        <p:cNvPr id="1" name=""/>
+        <p:cNvGrpSpPr/>
+        <p:nvPr/>
+      </p:nvGrpSpPr>
+      <p:grpSpPr>
+        <a:xfrm>
+          <a:off x="0" y="0"/>
+          <a:ext cx="0" cy="0"/>
+          <a:chOff x="0" y="0"/>
+          <a:chExt cx="0" cy="0"/>
+        </a:xfrm>
+      </p:grpSpPr>
+      <p:sp>
+        <p:nvSpPr>
+          <p:cNvPr id="2" name="Text 0"/>
+          <p:cNvSpPr/>
+          <p:nvPr/>
+        </p:nvSpPr>
+        <p:spPr>
+          <a:xfrm>
+            <a:off x="502920" y="256032"/>
+            <a:ext cx="10972800" cy="292608"/>
+          </a:xfrm>
+          <a:prstGeom prst="rect">
+            <a:avLst/>
+          </a:prstGeom>
+          <a:noFill/>
+          <a:ln/>
+        </p:spPr>
+        <p:txBody>
+          <a:bodyPr wrap="square" rtlCol="0" anchor="ctr"/>
+          <a:lstStyle/>
+          <a:p>
+            <a:pPr marL="0" indent="0">
+              <a:buNone/>
+            </a:pPr>
+            <a:r>
+              <a:rPr lang="en-US" sz="1300" b="1" kern="0" spc="200" dirty="0">
+                <a:solidFill>
+                  <a:srgbClr val="B98A00"/>
+                </a:solidFill>
+                <a:latin typeface="Calibri" pitchFamily="34" charset="0"/>
+                <a:ea typeface="Calibri" pitchFamily="34" charset="-122"/>
+                <a:cs typeface="Calibri" pitchFamily="34" charset="-120"/>
+              </a:rPr>
+              <a:t>METHODOLOGY FIRST</a:t>
+            </a:r>
+            <a:endParaRPr lang="en-US" sz="1300" dirty="0"/>
+          </a:p>
+        </p:txBody>
+      </p:sp>
+      <p:sp>
+        <p:nvSpPr>
+          <p:cNvPr id="3" name="Text 1"/>
+          <p:cNvSpPr/>
+          <p:nvPr/>
+        </p:nvSpPr>
+        <p:spPr>
+          <a:xfrm>
+            <a:off x="502920" y="548640"/>
+            <a:ext cx="11155680" cy="822960"/>
+          </a:xfrm>
+          <a:prstGeom prst="rect">
+            <a:avLst/>
+          </a:prstGeom>
+          <a:noFill/>
+          <a:ln/>
+        </p:spPr>
+        <p:txBody>
+          <a:bodyPr wrap="square" rtlCol="0" anchor="ctr"/>
+          <a:lstStyle/>
+          <a:p>
+            <a:pPr marL="0" indent="0">
+              <a:buNone/>
+            </a:pPr>
+            <a:r>
+              <a:rPr lang="en-US" sz="4400" b="1" dirty="0">
+                <a:solidFill>
+                  <a:srgbClr val="1E2761"/>
+                </a:solidFill>
+                <a:latin typeface="Cambria" pitchFamily="34" charset="0"/>
+                <a:ea typeface="Cambria" pitchFamily="34" charset="-122"/>
+                <a:cs typeface="Cambria" pitchFamily="34" charset="-120"/>
+              </a:rPr>
+              <a:t>How we benchmark</a:t>
+            </a:r>
+            <a:endParaRPr lang="en-US" sz="4400" dirty="0"/>
+          </a:p>
+        </p:txBody>
+      </p:sp>
+      <p:sp>
+        <p:nvSpPr>
+          <p:cNvPr id="4" name="Text 2"/>
+          <p:cNvSpPr/>
+          <p:nvPr/>
+        </p:nvSpPr>
+        <p:spPr>
+          <a:xfrm>
+            <a:off x="502920" y="1371600"/>
+            <a:ext cx="11155680" cy="457200"/>
+          </a:xfrm>
+          <a:prstGeom prst="rect">
+            <a:avLst/>
+          </a:prstGeom>
+          <a:noFill/>
+          <a:ln/>
+        </p:spPr>
+        <p:txBody>
+          <a:bodyPr wrap="square" rtlCol="0" anchor="ctr"/>
+          <a:lstStyle/>
+          <a:p>
+            <a:pPr marL="0" indent="0">
+              <a:buNone/>
+            </a:pPr>
+            <a:r>
+              <a:rPr lang="en-US" sz="2000" dirty="0">
+                <a:solidFill>
+                  <a:srgbClr val="6B7280"/>
+                </a:solidFill>
+                <a:latin typeface="Calibri" pitchFamily="34" charset="0"/>
+                <a:ea typeface="Calibri" pitchFamily="34" charset="-122"/>
+                <a:cs typeface="Calibri" pitchFamily="34" charset="-120"/>
+              </a:rPr>
+              <a:t>Context before numbers — same model, frozen tasks, metered, non-merge.</a:t>
+            </a:r>
+            <a:endParaRPr lang="en-US" sz="2000" dirty="0"/>
+          </a:p>
+        </p:txBody>
+      </p:sp>
+      <p:sp>
+        <p:nvSpPr>
+          <p:cNvPr id="5" name="Shape 3"/>
+          <p:cNvSpPr/>
+          <p:nvPr/>
+        </p:nvSpPr>
+        <p:spPr>
+          <a:xfrm>
+            <a:off x="685800" y="2148840"/>
+            <a:ext cx="10835640" cy="658368"/>
+          </a:xfrm>
+          <a:prstGeom prst="roundRect">
+            <a:avLst>
+              <a:gd name="adj" fmla="val 13889"/>
+            </a:avLst>
+          </a:prstGeom>
+          <a:solidFill>
+            <a:srgbClr val="F8FAFC"/>
+          </a:solidFill>
+          <a:ln w="15875">
+            <a:solidFill>
+              <a:srgbClr val="D1D5DB"/>
+            </a:solidFill>
+            <a:prstDash val="solid"/>
+          </a:ln>
+        </p:spPr>
+      </p:sp>
+      <p:sp>
+        <p:nvSpPr>
+          <p:cNvPr id="6" name="Text 4"/>
+          <p:cNvSpPr/>
+          <p:nvPr/>
+        </p:nvSpPr>
+        <p:spPr>
+          <a:xfrm>
+            <a:off x="914400" y="2258568"/>
+            <a:ext cx="1737360" cy="457200"/>
+          </a:xfrm>
+          <a:prstGeom prst="rect">
+            <a:avLst/>
+          </a:prstGeom>
+          <a:noFill/>
+          <a:ln/>
+        </p:spPr>
+        <p:txBody>
+          <a:bodyPr wrap="square" rtlCol="0" anchor="ctr"/>
+          <a:lstStyle/>
+          <a:p>
+            <a:pPr marL="0" indent="0">
+              <a:buNone/>
+            </a:pPr>
+            <a:r>
+              <a:rPr lang="en-US" sz="1400" b="1" dirty="0">
+                <a:solidFill>
+                  <a:srgbClr val="1E2761"/>
+                </a:solidFill>
+                <a:latin typeface="Calibri" pitchFamily="34" charset="0"/>
+                <a:ea typeface="Calibri" pitchFamily="34" charset="-122"/>
+                <a:cs typeface="Calibri" pitchFamily="34" charset="-120"/>
+              </a:rPr>
+              <a:t>Arms</a:t>
+            </a:r>
+            <a:endParaRPr lang="en-US" sz="1400" dirty="0"/>
+          </a:p>
+        </p:txBody>
+      </p:sp>
+      <p:sp>
+        <p:nvSpPr>
+          <p:cNvPr id="7" name="Text 5"/>
+          <p:cNvSpPr/>
+          <p:nvPr/>
+        </p:nvSpPr>
+        <p:spPr>
+          <a:xfrm>
+            <a:off x="2788920" y="2258568"/>
+            <a:ext cx="8595360" cy="457200"/>
+          </a:xfrm>
+          <a:prstGeom prst="rect">
+            <a:avLst/>
+          </a:prstGeom>
+          <a:noFill/>
+          <a:ln/>
+        </p:spPr>
+        <p:txBody>
+          <a:bodyPr wrap="square" rtlCol="0" anchor="ctr"/>
+          <a:lstStyle/>
+          <a:p>
+            <a:pPr marL="0" indent="0">
+              <a:buNone/>
+            </a:pPr>
+            <a:r>
+              <a:rPr lang="en-US" sz="1600" dirty="0">
+                <a:solidFill>
+                  <a:srgbClr val="1F2937"/>
+                </a:solidFill>
+                <a:latin typeface="Calibri" pitchFamily="34" charset="0"/>
+                <a:ea typeface="Calibri" pitchFamily="34" charset="-122"/>
+                <a:cs typeface="Calibri" pitchFamily="34" charset="-120"/>
+              </a:rPr>
+              <a:t>B bare · A′ framework passive · A framework activated (routing + lanes)</a:t>
+            </a:r>
+            <a:endParaRPr lang="en-US" sz="1600" dirty="0"/>
+          </a:p>
+        </p:txBody>
+      </p:sp>
+      <p:sp>
+        <p:nvSpPr>
+          <p:cNvPr id="8" name="Shape 6"/>
+          <p:cNvSpPr/>
+          <p:nvPr/>
+        </p:nvSpPr>
+        <p:spPr>
+          <a:xfrm>
+            <a:off x="685800" y="2916936"/>
+            <a:ext cx="10835640" cy="658368"/>
+          </a:xfrm>
+          <a:prstGeom prst="roundRect">
+            <a:avLst>
+              <a:gd name="adj" fmla="val 13889"/>
+            </a:avLst>
+          </a:prstGeom>
+          <a:solidFill>
+            <a:srgbClr val="F8FAFC"/>
+          </a:solidFill>
+          <a:ln w="15875">
+            <a:solidFill>
+              <a:srgbClr val="D1D5DB"/>
+            </a:solidFill>
+            <a:prstDash val="solid"/>
+          </a:ln>
+        </p:spPr>
+      </p:sp>
+      <p:sp>
+        <p:nvSpPr>
+          <p:cNvPr id="9" name="Text 7"/>
+          <p:cNvSpPr/>
+          <p:nvPr/>
+        </p:nvSpPr>
+        <p:spPr>
+          <a:xfrm>
+            <a:off x="914400" y="3026664"/>
+            <a:ext cx="1737360" cy="457200"/>
+          </a:xfrm>
+          <a:prstGeom prst="rect">
+            <a:avLst/>
+          </a:prstGeom>
+          <a:noFill/>
+          <a:ln/>
+        </p:spPr>
+        <p:txBody>
+          <a:bodyPr wrap="square" rtlCol="0" anchor="ctr"/>
+          <a:lstStyle/>
+          <a:p>
+            <a:pPr marL="0" indent="0">
+              <a:buNone/>
+            </a:pPr>
+            <a:r>
+              <a:rPr lang="en-US" sz="1400" b="1" dirty="0">
+                <a:solidFill>
+                  <a:srgbClr val="1E2761"/>
+                </a:solidFill>
+                <a:latin typeface="Calibri" pitchFamily="34" charset="0"/>
+                <a:ea typeface="Calibri" pitchFamily="34" charset="-122"/>
+                <a:cs typeface="Calibri" pitchFamily="34" charset="-120"/>
+              </a:rPr>
+              <a:t>Fairness</a:t>
+            </a:r>
+            <a:endParaRPr lang="en-US" sz="1400" dirty="0"/>
+          </a:p>
+        </p:txBody>
+      </p:sp>
+      <p:sp>
+        <p:nvSpPr>
+          <p:cNvPr id="10" name="Text 8"/>
+          <p:cNvSpPr/>
+          <p:nvPr/>
+        </p:nvSpPr>
+        <p:spPr>
+          <a:xfrm>
+            <a:off x="2788920" y="3026664"/>
+            <a:ext cx="8595360" cy="457200"/>
+          </a:xfrm>
+          <a:prstGeom prst="rect">
+            <a:avLst/>
+          </a:prstGeom>
+          <a:noFill/>
+          <a:ln/>
+        </p:spPr>
+        <p:txBody>
+          <a:bodyPr wrap="square" rtlCol="0" anchor="ctr"/>
+          <a:lstStyle/>
+          <a:p>
+            <a:pPr marL="0" indent="0">
+              <a:buNone/>
+            </a:pPr>
+            <a:r>
+              <a:rPr lang="en-US" sz="1600" dirty="0">
+                <a:solidFill>
+                  <a:srgbClr val="1F2937"/>
+                </a:solidFill>
+                <a:latin typeface="Calibri" pitchFamily="34" charset="0"/>
+                <a:ea typeface="Calibri" pitchFamily="34" charset="-122"/>
+                <a:cs typeface="Calibri" pitchFamily="34" charset="-120"/>
+              </a:rPr>
+              <a:t>Same commit · same model pin · identical frozen task text · same tooling flags</a:t>
+            </a:r>
+            <a:endParaRPr lang="en-US" sz="1600" dirty="0"/>
+          </a:p>
+        </p:txBody>
+      </p:sp>
+      <p:sp>
+        <p:nvSpPr>
+          <p:cNvPr id="11" name="Shape 9"/>
+          <p:cNvSpPr/>
+          <p:nvPr/>
+        </p:nvSpPr>
+        <p:spPr>
+          <a:xfrm>
+            <a:off x="685800" y="3685032"/>
+            <a:ext cx="10835640" cy="658368"/>
+          </a:xfrm>
+          <a:prstGeom prst="roundRect">
+            <a:avLst>
+              <a:gd name="adj" fmla="val 13889"/>
+            </a:avLst>
+          </a:prstGeom>
+          <a:solidFill>
+            <a:srgbClr val="F8FAFC"/>
+          </a:solidFill>
+          <a:ln w="15875">
+            <a:solidFill>
+              <a:srgbClr val="D1D5DB"/>
+            </a:solidFill>
+            <a:prstDash val="solid"/>
+          </a:ln>
+        </p:spPr>
+      </p:sp>
+      <p:sp>
+        <p:nvSpPr>
+          <p:cNvPr id="12" name="Text 10"/>
+          <p:cNvSpPr/>
+          <p:nvPr/>
+        </p:nvSpPr>
+        <p:spPr>
+          <a:xfrm>
+            <a:off x="914400" y="3794760"/>
+            <a:ext cx="1737360" cy="457200"/>
+          </a:xfrm>
+          <a:prstGeom prst="rect">
+            <a:avLst/>
+          </a:prstGeom>
+          <a:noFill/>
+          <a:ln/>
+        </p:spPr>
+        <p:txBody>
+          <a:bodyPr wrap="square" rtlCol="0" anchor="ctr"/>
+          <a:lstStyle/>
+          <a:p>
+            <a:pPr marL="0" indent="0">
+              <a:buNone/>
+            </a:pPr>
+            <a:r>
+              <a:rPr lang="en-US" sz="1400" b="1" dirty="0">
+                <a:solidFill>
+                  <a:srgbClr val="1E2761"/>
+                </a:solidFill>
+                <a:latin typeface="Calibri" pitchFamily="34" charset="0"/>
+                <a:ea typeface="Calibri" pitchFamily="34" charset="-122"/>
+                <a:cs typeface="Calibri" pitchFamily="34" charset="-120"/>
+              </a:rPr>
+              <a:t>Metering</a:t>
+            </a:r>
+            <a:endParaRPr lang="en-US" sz="1400" dirty="0"/>
+          </a:p>
+        </p:txBody>
+      </p:sp>
+      <p:sp>
+        <p:nvSpPr>
+          <p:cNvPr id="13" name="Text 11"/>
+          <p:cNvSpPr/>
+          <p:nvPr/>
+        </p:nvSpPr>
+        <p:spPr>
+          <a:xfrm>
+            <a:off x="2788920" y="3794760"/>
+            <a:ext cx="8595360" cy="457200"/>
+          </a:xfrm>
+          <a:prstGeom prst="rect">
+            <a:avLst/>
+          </a:prstGeom>
+          <a:noFill/>
+          <a:ln/>
+        </p:spPr>
+        <p:txBody>
+          <a:bodyPr wrap="square" rtlCol="0" anchor="ctr"/>
+          <a:lstStyle/>
+          <a:p>
+            <a:pPr marL="0" indent="0">
+              <a:buNone/>
+            </a:pPr>
+            <a:r>
+              <a:rPr lang="en-US" sz="1600" dirty="0">
+                <a:solidFill>
+                  <a:srgbClr val="1F2937"/>
+                </a:solidFill>
+                <a:latin typeface="Calibri" pitchFamily="34" charset="0"/>
+                <a:ea typeface="Calibri" pitchFamily="34" charset="-122"/>
+                <a:cs typeface="Calibri" pitchFamily="34" charset="-120"/>
+              </a:rPr>
+              <a:t>Session JSON: turns, tokens in/out, cost · wall clock · outcome gates (pytest / node --test)</a:t>
+            </a:r>
+            <a:endParaRPr lang="en-US" sz="1600" dirty="0"/>
+          </a:p>
+        </p:txBody>
+      </p:sp>
+      <p:sp>
+        <p:nvSpPr>
+          <p:cNvPr id="14" name="Shape 12"/>
+          <p:cNvSpPr/>
+          <p:nvPr/>
+        </p:nvSpPr>
+        <p:spPr>
+          <a:xfrm>
+            <a:off x="685800" y="4453128"/>
+            <a:ext cx="10835640" cy="658368"/>
+          </a:xfrm>
+          <a:prstGeom prst="roundRect">
+            <a:avLst>
+              <a:gd name="adj" fmla="val 13889"/>
+            </a:avLst>
+          </a:prstGeom>
+          <a:solidFill>
+            <a:srgbClr val="F8FAFC"/>
+          </a:solidFill>
+          <a:ln w="15875">
+            <a:solidFill>
+              <a:srgbClr val="D1D5DB"/>
+            </a:solidFill>
+            <a:prstDash val="solid"/>
+          </a:ln>
+        </p:spPr>
+      </p:sp>
+      <p:sp>
+        <p:nvSpPr>
+          <p:cNvPr id="15" name="Text 13"/>
+          <p:cNvSpPr/>
+          <p:nvPr/>
+        </p:nvSpPr>
+        <p:spPr>
+          <a:xfrm>
+            <a:off x="914400" y="4562856"/>
+            <a:ext cx="1737360" cy="457200"/>
+          </a:xfrm>
+          <a:prstGeom prst="rect">
+            <a:avLst/>
+          </a:prstGeom>
+          <a:noFill/>
+          <a:ln/>
+        </p:spPr>
+        <p:txBody>
+          <a:bodyPr wrap="square" rtlCol="0" anchor="ctr"/>
+          <a:lstStyle/>
+          <a:p>
+            <a:pPr marL="0" indent="0">
+              <a:buNone/>
+            </a:pPr>
+            <a:r>
+              <a:rPr lang="en-US" sz="1400" b="1" dirty="0">
+                <a:solidFill>
+                  <a:srgbClr val="1E2761"/>
+                </a:solidFill>
+                <a:latin typeface="Calibri" pitchFamily="34" charset="0"/>
+                <a:ea typeface="Calibri" pitchFamily="34" charset="-122"/>
+                <a:cs typeface="Calibri" pitchFamily="34" charset="-120"/>
+              </a:rPr>
+              <a:t>Safety</a:t>
+            </a:r>
+            <a:endParaRPr lang="en-US" sz="1400" dirty="0"/>
+          </a:p>
+        </p:txBody>
+      </p:sp>
+      <p:sp>
+        <p:nvSpPr>
+          <p:cNvPr id="16" name="Text 14"/>
+          <p:cNvSpPr/>
+          <p:nvPr/>
+        </p:nvSpPr>
+        <p:spPr>
+          <a:xfrm>
+            <a:off x="2788920" y="4562856"/>
+            <a:ext cx="8595360" cy="457200"/>
+          </a:xfrm>
+          <a:prstGeom prst="rect">
+            <a:avLst/>
+          </a:prstGeom>
+          <a:noFill/>
+          <a:ln/>
+        </p:spPr>
+        <p:txBody>
+          <a:bodyPr wrap="square" rtlCol="0" anchor="ctr"/>
+          <a:lstStyle/>
+          <a:p>
+            <a:pPr marL="0" indent="0">
+              <a:buNone/>
+            </a:pPr>
+            <a:r>
+              <a:rPr lang="en-US" sz="1600" dirty="0">
+                <a:solidFill>
+                  <a:srgbClr val="1F2937"/>
+                </a:solidFill>
+                <a:latin typeface="Calibri" pitchFamily="34" charset="0"/>
+                <a:ea typeface="Calibri" pitchFamily="34" charset="-122"/>
+                <a:cs typeface="Calibri" pitchFamily="34" charset="-120"/>
+              </a:rPr>
+              <a:t>Offline acceptance (no live DB, no deploys) · exp branches, never merged to main</a:t>
+            </a:r>
+            <a:endParaRPr lang="en-US" sz="1600" dirty="0"/>
+          </a:p>
+        </p:txBody>
+      </p:sp>
+      <p:sp>
+        <p:nvSpPr>
+          <p:cNvPr id="17" name="Shape 15"/>
+          <p:cNvSpPr/>
+          <p:nvPr/>
+        </p:nvSpPr>
+        <p:spPr>
+          <a:xfrm>
+            <a:off x="685800" y="5221224"/>
+            <a:ext cx="10835640" cy="658368"/>
+          </a:xfrm>
+          <a:prstGeom prst="roundRect">
+            <a:avLst>
+              <a:gd name="adj" fmla="val 13889"/>
+            </a:avLst>
+          </a:prstGeom>
+          <a:solidFill>
+            <a:srgbClr val="F8FAFC"/>
+          </a:solidFill>
+          <a:ln w="15875">
+            <a:solidFill>
+              <a:srgbClr val="D1D5DB"/>
+            </a:solidFill>
+            <a:prstDash val="solid"/>
+          </a:ln>
+        </p:spPr>
+      </p:sp>
+      <p:sp>
+        <p:nvSpPr>
+          <p:cNvPr id="18" name="Text 16"/>
+          <p:cNvSpPr/>
+          <p:nvPr/>
+        </p:nvSpPr>
+        <p:spPr>
+          <a:xfrm>
+            <a:off x="914400" y="5330952"/>
+            <a:ext cx="1737360" cy="457200"/>
+          </a:xfrm>
+          <a:prstGeom prst="rect">
+            <a:avLst/>
+          </a:prstGeom>
+          <a:noFill/>
+          <a:ln/>
+        </p:spPr>
+        <p:txBody>
+          <a:bodyPr wrap="square" rtlCol="0" anchor="ctr"/>
+          <a:lstStyle/>
+          <a:p>
+            <a:pPr marL="0" indent="0">
+              <a:buNone/>
+            </a:pPr>
+            <a:r>
+              <a:rPr lang="en-US" sz="1400" b="1" dirty="0">
+                <a:solidFill>
+                  <a:srgbClr val="1E2761"/>
+                </a:solidFill>
+                <a:latin typeface="Calibri" pitchFamily="34" charset="0"/>
+                <a:ea typeface="Calibri" pitchFamily="34" charset="-122"/>
+                <a:cs typeface="Calibri" pitchFamily="34" charset="-120"/>
+              </a:rPr>
+              <a:t>Scoring</a:t>
+            </a:r>
+            <a:endParaRPr lang="en-US" sz="1400" dirty="0"/>
+          </a:p>
+        </p:txBody>
+      </p:sp>
+      <p:sp>
+        <p:nvSpPr>
+          <p:cNvPr id="19" name="Text 17"/>
+          <p:cNvSpPr/>
+          <p:nvPr/>
+        </p:nvSpPr>
+        <p:spPr>
+          <a:xfrm>
+            <a:off x="2788920" y="5330952"/>
+            <a:ext cx="8595360" cy="457200"/>
+          </a:xfrm>
+          <a:prstGeom prst="rect">
+            <a:avLst/>
+          </a:prstGeom>
+          <a:noFill/>
+          <a:ln/>
+        </p:spPr>
+        <p:txBody>
+          <a:bodyPr wrap="square" rtlCol="0" anchor="ctr"/>
+          <a:lstStyle/>
+          <a:p>
+            <a:pPr marL="0" indent="0">
+              <a:buNone/>
+            </a:pPr>
+            <a:r>
+              <a:rPr lang="en-US" sz="1600" dirty="0">
+                <a:solidFill>
+                  <a:srgbClr val="1F2937"/>
+                </a:solidFill>
+                <a:latin typeface="Calibri" pitchFamily="34" charset="0"/>
+                <a:ea typeface="Calibri" pitchFamily="34" charset="-122"/>
+                <a:cs typeface="Calibri" pitchFamily="34" charset="-120"/>
+              </a:rPr>
+              <a:t>Acceptance + hidden rubric checks (crash-safety, idempotency, concurrency) + traceability (spec→plan→tasks artifacts)</a:t>
+            </a:r>
+            <a:endParaRPr lang="en-US" sz="1600" dirty="0"/>
+          </a:p>
+        </p:txBody>
+      </p:sp>
+      <p:sp>
+        <p:nvSpPr>
+          <p:cNvPr id="20" name="Text 18"/>
+          <p:cNvSpPr/>
+          <p:nvPr/>
+        </p:nvSpPr>
+        <p:spPr>
+          <a:xfrm>
+            <a:off x="685800" y="6035040"/>
+            <a:ext cx="10835640" cy="457200"/>
+          </a:xfrm>
+          <a:prstGeom prst="rect">
+            <a:avLst/>
+          </a:prstGeom>
+          <a:noFill/>
+          <a:ln/>
+        </p:spPr>
+        <p:txBody>
+          <a:bodyPr wrap="square" rtlCol="0" anchor="ctr"/>
+          <a:lstStyle/>
+          <a:p>
+            <a:pPr marL="0" indent="0">
+              <a:buNone/>
+            </a:pPr>
+            <a:r>
+              <a:rPr lang="en-US" sz="1400" i="1" dirty="0">
+                <a:solidFill>
+                  <a:srgbClr val="6B7280"/>
+                </a:solidFill>
+                <a:latin typeface="Calibri" pitchFamily="34" charset="0"/>
+                <a:ea typeface="Calibri" pitchFamily="34" charset="-122"/>
+                <a:cs typeface="Calibri" pitchFamily="34" charset="-120"/>
+              </a:rPr>
+              <a:t>Everything on this deck's results slide came from the bench kit in the repo — rerun any cell with one command (docs/benchmarks/BENCHMARK-SUMMARY.md).</a:t>
+            </a:r>
+            <a:endParaRPr lang="en-US" sz="1400" dirty="0"/>
+          </a:p>
+        </p:txBody>
+      </p:sp>
+    </p:spTree>
+  </p:cSld>
+  <p:clrMapOvr>
+    <a:masterClrMapping/>
+  </p:clrMapOvr>
+</p:sld>
+</file>
+
+<file path=ppt/slides/slide8.xml><?xml version="1.0" encoding="utf-8"?>
+<p:sld xmlns:a="http://schemas.openxmlformats.org/drawingml/2006/main" xmlns:r="http://schemas.openxmlformats.org/officeDocument/2006/relationships" xmlns:p="http://schemas.openxmlformats.org/presentationml/2006/main">
+  <p:cSld>
+    <p:spTree>
+      <p:nvGrpSpPr>
+        <p:cNvPr id="1" name=""/>
+        <p:cNvGrpSpPr/>
+        <p:nvPr/>
+      </p:nvGrpSpPr>
+      <p:grpSpPr>
+        <a:xfrm>
+          <a:off x="0" y="0"/>
+          <a:ext cx="0" cy="0"/>
+          <a:chOff x="0" y="0"/>
+          <a:chExt cx="0" cy="0"/>
+        </a:xfrm>
+      </p:grpSpPr>
+      <p:sp>
+        <p:nvSpPr>
+          <p:cNvPr id="2" name="Text 0"/>
+          <p:cNvSpPr/>
+          <p:nvPr/>
+        </p:nvSpPr>
+        <p:spPr>
+          <a:xfrm>
+            <a:off x="502920" y="256032"/>
+            <a:ext cx="10972800" cy="292608"/>
+          </a:xfrm>
+          <a:prstGeom prst="rect">
+            <a:avLst/>
+          </a:prstGeom>
+          <a:noFill/>
+          <a:ln/>
+        </p:spPr>
+        <p:txBody>
+          <a:bodyPr wrap="square" rtlCol="0" anchor="ctr"/>
+          <a:lstStyle/>
+          <a:p>
+            <a:pPr marL="0" indent="0">
+              <a:buNone/>
+            </a:pPr>
+            <a:r>
+              <a:rPr lang="en-US" sz="1300" b="1" kern="0" spc="200" dirty="0">
+                <a:solidFill>
+                  <a:srgbClr val="B98A00"/>
+                </a:solidFill>
+                <a:latin typeface="Calibri" pitchFamily="34" charset="0"/>
+                <a:ea typeface="Calibri" pitchFamily="34" charset="-122"/>
+                <a:cs typeface="Calibri" pitchFamily="34" charset="-120"/>
+              </a:rPr>
+              <a:t>BENCHMARK · RAW EVIDENCE</a:t>
+            </a:r>
+            <a:endParaRPr lang="en-US" sz="1300" dirty="0"/>
+          </a:p>
+        </p:txBody>
+      </p:sp>
+      <p:sp>
+        <p:nvSpPr>
+          <p:cNvPr id="3" name="Text 1"/>
+          <p:cNvSpPr/>
+          <p:nvPr/>
+        </p:nvSpPr>
+        <p:spPr>
+          <a:xfrm>
+            <a:off x="502920" y="548640"/>
+            <a:ext cx="11155680" cy="822960"/>
+          </a:xfrm>
+          <a:prstGeom prst="rect">
+            <a:avLst/>
+          </a:prstGeom>
+          <a:noFill/>
+          <a:ln/>
+        </p:spPr>
+        <p:txBody>
+          <a:bodyPr wrap="square" rtlCol="0" anchor="ctr"/>
+          <a:lstStyle/>
+          <a:p>
+            <a:pPr marL="0" indent="0">
+              <a:buNone/>
+            </a:pPr>
+            <a:r>
+              <a:rPr lang="en-US" sz="4400" b="1" dirty="0">
+                <a:solidFill>
+                  <a:srgbClr val="1E2761"/>
+                </a:solidFill>
+                <a:latin typeface="Cambria" pitchFamily="34" charset="0"/>
+                <a:ea typeface="Cambria" pitchFamily="34" charset="-122"/>
+                <a:cs typeface="Cambria" pitchFamily="34" charset="-120"/>
+              </a:rPr>
+              <a:t>Terminal output, verbatim</a:t>
+            </a:r>
+            <a:endParaRPr lang="en-US" sz="4400" dirty="0"/>
+          </a:p>
+        </p:txBody>
+      </p:sp>
+      <p:sp>
+        <p:nvSpPr>
+          <p:cNvPr id="4" name="Text 2"/>
+          <p:cNvSpPr/>
+          <p:nvPr/>
+        </p:nvSpPr>
+        <p:spPr>
+          <a:xfrm>
+            <a:off x="502920" y="1371600"/>
+            <a:ext cx="11155680" cy="457200"/>
+          </a:xfrm>
+          <a:prstGeom prst="rect">
+            <a:avLst/>
+          </a:prstGeom>
+          <a:noFill/>
+          <a:ln/>
+        </p:spPr>
+        <p:txBody>
+          <a:bodyPr wrap="square" rtlCol="0" anchor="ctr"/>
+          <a:lstStyle/>
+          <a:p>
+            <a:pPr marL="0" indent="0">
+              <a:buNone/>
+            </a:pPr>
+            <a:r>
+              <a:rPr lang="en-US" sz="2000" dirty="0">
+                <a:solidFill>
+                  <a:srgbClr val="6B7280"/>
+                </a:solidFill>
+                <a:latin typeface="Calibri" pitchFamily="34" charset="0"/>
+                <a:ea typeface="Calibri" pitchFamily="34" charset="-122"/>
+                <a:cs typeface="Calibri" pitchFamily="34" charset="-120"/>
+              </a:rPr>
+              <a:t>Real bench-kit output — GREENFIELD-3 (rate-limited SSE proxy), same model, same brief.</a:t>
+            </a:r>
+            <a:endParaRPr lang="en-US" sz="2000" dirty="0"/>
+          </a:p>
+        </p:txBody>
+      </p:sp>
+      <p:sp>
+        <p:nvSpPr>
+          <p:cNvPr id="5" name="Shape 3"/>
+          <p:cNvSpPr/>
+          <p:nvPr/>
+        </p:nvSpPr>
+        <p:spPr>
+          <a:xfrm>
+            <a:off x="685800" y="2103120"/>
+            <a:ext cx="5349240" cy="3200400"/>
+          </a:xfrm>
+          <a:prstGeom prst="rect">
+            <a:avLst/>
+          </a:prstGeom>
+          <a:solidFill>
+            <a:srgbClr val="111827"/>
+          </a:solidFill>
+          <a:ln w="12700">
+            <a:solidFill>
+              <a:srgbClr val="333333"/>
+            </a:solidFill>
+            <a:prstDash val="solid"/>
+          </a:ln>
+        </p:spPr>
+      </p:sp>
+      <p:sp>
+        <p:nvSpPr>
+          <p:cNvPr id="6" name="Text 4"/>
+          <p:cNvSpPr/>
+          <p:nvPr/>
+        </p:nvSpPr>
+        <p:spPr>
+          <a:xfrm>
+            <a:off x="868680" y="2194560"/>
+            <a:ext cx="1828800" cy="256032"/>
+          </a:xfrm>
+          <a:prstGeom prst="rect">
+            <a:avLst/>
+          </a:prstGeom>
+          <a:noFill/>
+          <a:ln/>
+        </p:spPr>
+        <p:txBody>
+          <a:bodyPr wrap="square" lIns="0" tIns="0" rIns="0" bIns="0" rtlCol="0" anchor="ctr"/>
+          <a:lstStyle/>
+          <a:p>
+            <a:pPr marL="0" indent="0">
+              <a:buNone/>
+            </a:pPr>
+            <a:r>
+              <a:rPr lang="en-US" sz="1300" b="1" dirty="0">
+                <a:solidFill>
+                  <a:srgbClr val="F4B400"/>
+                </a:solidFill>
+                <a:latin typeface="Calibri" pitchFamily="34" charset="0"/>
+                <a:ea typeface="Calibri" pitchFamily="34" charset="-122"/>
+                <a:cs typeface="Calibri" pitchFamily="34" charset="-120"/>
+              </a:rPr>
+              <a:t>METRICS</a:t>
+            </a:r>
+            <a:endParaRPr lang="en-US" sz="1300" dirty="0"/>
+          </a:p>
+        </p:txBody>
+      </p:sp>
+      <p:sp>
+        <p:nvSpPr>
+          <p:cNvPr id="7" name="Text 5"/>
+          <p:cNvSpPr/>
+          <p:nvPr/>
+        </p:nvSpPr>
+        <p:spPr>
+          <a:xfrm>
+            <a:off x="868680" y="2450592"/>
+            <a:ext cx="5074920" cy="256032"/>
+          </a:xfrm>
+          <a:prstGeom prst="rect">
+            <a:avLst/>
+          </a:prstGeom>
+          <a:noFill/>
+          <a:ln/>
+        </p:spPr>
+        <p:txBody>
+          <a:bodyPr wrap="square" lIns="0" tIns="0" rIns="0" bIns="0" rtlCol="0" anchor="ctr"/>
+          <a:lstStyle/>
+          <a:p>
+            <a:pPr marL="0" indent="0">
+              <a:buNone/>
+            </a:pPr>
+            <a:r>
+              <a:rPr lang="en-US" sz="1400" b="1" dirty="0">
+                <a:solidFill>
+                  <a:srgbClr val="F4B400"/>
+                </a:solidFill>
+                <a:latin typeface="Courier New" pitchFamily="34" charset="0"/>
+                <a:ea typeface="Courier New" pitchFamily="34" charset="-122"/>
+                <a:cs typeface="Courier New" pitchFamily="34" charset="-120"/>
+              </a:rPr>
+              <a:t>metric          A activated       B bare</a:t>
+            </a:r>
+            <a:endParaRPr lang="en-US" sz="1400" dirty="0"/>
+          </a:p>
+        </p:txBody>
+      </p:sp>
+      <p:sp>
+        <p:nvSpPr>
+          <p:cNvPr id="8" name="Text 6"/>
+          <p:cNvSpPr/>
+          <p:nvPr/>
+        </p:nvSpPr>
+        <p:spPr>
+          <a:xfrm>
+            <a:off x="868680" y="2720340"/>
+            <a:ext cx="5074920" cy="256032"/>
+          </a:xfrm>
+          <a:prstGeom prst="rect">
+            <a:avLst/>
+          </a:prstGeom>
+          <a:noFill/>
+          <a:ln/>
+        </p:spPr>
+        <p:txBody>
+          <a:bodyPr wrap="square" lIns="0" tIns="0" rIns="0" bIns="0" rtlCol="0" anchor="ctr"/>
+          <a:lstStyle/>
+          <a:p>
+            <a:pPr marL="0" indent="0">
+              <a:buNone/>
+            </a:pPr>
+            <a:r>
+              <a:rPr lang="en-US" sz="1400" dirty="0">
+                <a:solidFill>
+                  <a:srgbClr val="F3F4F6"/>
+                </a:solidFill>
+                <a:latin typeface="Courier New" pitchFamily="34" charset="0"/>
+                <a:ea typeface="Courier New" pitchFamily="34" charset="-122"/>
+                <a:cs typeface="Courier New" pitchFamily="34" charset="-120"/>
+              </a:rPr>
+              <a:t>wall (min)            6.5          27.4</a:t>
+            </a:r>
+            <a:endParaRPr lang="en-US" sz="1400" dirty="0"/>
+          </a:p>
+        </p:txBody>
+      </p:sp>
+      <p:sp>
+        <p:nvSpPr>
+          <p:cNvPr id="9" name="Text 7"/>
+          <p:cNvSpPr/>
+          <p:nvPr/>
+        </p:nvSpPr>
+        <p:spPr>
+          <a:xfrm>
+            <a:off x="868680" y="2990088"/>
+            <a:ext cx="5074920" cy="256032"/>
+          </a:xfrm>
+          <a:prstGeom prst="rect">
+            <a:avLst/>
+          </a:prstGeom>
+          <a:noFill/>
+          <a:ln/>
+        </p:spPr>
+        <p:txBody>
+          <a:bodyPr wrap="square" lIns="0" tIns="0" rIns="0" bIns="0" rtlCol="0" anchor="ctr"/>
+          <a:lstStyle/>
+          <a:p>
+            <a:pPr marL="0" indent="0">
+              <a:buNone/>
+            </a:pPr>
+            <a:r>
+              <a:rPr lang="en-US" sz="1400" dirty="0">
+                <a:solidFill>
+                  <a:srgbClr val="F3F4F6"/>
+                </a:solidFill>
+                <a:latin typeface="Courier New" pitchFamily="34" charset="0"/>
+                <a:ea typeface="Courier New" pitchFamily="34" charset="-122"/>
+                <a:cs typeface="Courier New" pitchFamily="34" charset="-120"/>
+              </a:rPr>
+              <a:t>turns                  56            61</a:t>
+            </a:r>
+            <a:endParaRPr lang="en-US" sz="1400" dirty="0"/>
+          </a:p>
+        </p:txBody>
+      </p:sp>
+      <p:sp>
+        <p:nvSpPr>
+          <p:cNvPr id="10" name="Text 8"/>
+          <p:cNvSpPr/>
+          <p:nvPr/>
+        </p:nvSpPr>
+        <p:spPr>
+          <a:xfrm>
+            <a:off x="868680" y="3259836"/>
+            <a:ext cx="5074920" cy="256032"/>
+          </a:xfrm>
+          <a:prstGeom prst="rect">
+            <a:avLst/>
+          </a:prstGeom>
+          <a:noFill/>
+          <a:ln/>
+        </p:spPr>
+        <p:txBody>
+          <a:bodyPr wrap="square" lIns="0" tIns="0" rIns="0" bIns="0" rtlCol="0" anchor="ctr"/>
+          <a:lstStyle/>
+          <a:p>
+            <a:pPr marL="0" indent="0">
+              <a:buNone/>
+            </a:pPr>
+            <a:r>
+              <a:rPr lang="en-US" sz="1400" dirty="0">
+                <a:solidFill>
+                  <a:srgbClr val="F3F4F6"/>
+                </a:solidFill>
+                <a:latin typeface="Courier New" pitchFamily="34" charset="0"/>
+                <a:ea typeface="Courier New" pitchFamily="34" charset="-122"/>
+                <a:cs typeface="Courier New" pitchFamily="34" charset="-120"/>
+              </a:rPr>
+              <a:t>cost                 1.08          2.84</a:t>
+            </a:r>
+            <a:endParaRPr lang="en-US" sz="1400" dirty="0"/>
+          </a:p>
+        </p:txBody>
+      </p:sp>
+      <p:sp>
+        <p:nvSpPr>
+          <p:cNvPr id="11" name="Text 9"/>
+          <p:cNvSpPr/>
+          <p:nvPr/>
+        </p:nvSpPr>
+        <p:spPr>
+          <a:xfrm>
+            <a:off x="868680" y="3529584"/>
+            <a:ext cx="5074920" cy="256032"/>
+          </a:xfrm>
+          <a:prstGeom prst="rect">
+            <a:avLst/>
+          </a:prstGeom>
+          <a:noFill/>
+          <a:ln/>
+        </p:spPr>
+        <p:txBody>
+          <a:bodyPr wrap="square" lIns="0" tIns="0" rIns="0" bIns="0" rtlCol="0" anchor="ctr"/>
+          <a:lstStyle/>
+          <a:p>
+            <a:pPr marL="0" indent="0">
+              <a:buNone/>
+            </a:pPr>
+            <a:r>
+              <a:rPr lang="en-US" sz="1400" dirty="0">
+                <a:solidFill>
+                  <a:srgbClr val="F3F4F6"/>
+                </a:solidFill>
+                <a:latin typeface="Courier New" pitchFamily="34" charset="0"/>
+                <a:ea typeface="Courier New" pitchFamily="34" charset="-122"/>
+                <a:cs typeface="Courier New" pitchFamily="34" charset="-120"/>
+              </a:rPr>
+              <a:t>in tokens           50991         85443</a:t>
+            </a:r>
+            <a:endParaRPr lang="en-US" sz="1400" dirty="0"/>
+          </a:p>
+        </p:txBody>
+      </p:sp>
+      <p:sp>
+        <p:nvSpPr>
+          <p:cNvPr id="12" name="Text 10"/>
+          <p:cNvSpPr/>
+          <p:nvPr/>
+        </p:nvSpPr>
+        <p:spPr>
+          <a:xfrm>
+            <a:off x="868680" y="3799332"/>
+            <a:ext cx="5074920" cy="256032"/>
+          </a:xfrm>
+          <a:prstGeom prst="rect">
+            <a:avLst/>
+          </a:prstGeom>
+          <a:noFill/>
+          <a:ln/>
+        </p:spPr>
+        <p:txBody>
+          <a:bodyPr wrap="square" lIns="0" tIns="0" rIns="0" bIns="0" rtlCol="0" anchor="ctr"/>
+          <a:lstStyle/>
+          <a:p>
+            <a:pPr marL="0" indent="0">
+              <a:buNone/>
+            </a:pPr>
+            <a:r>
+              <a:rPr lang="en-US" sz="1400" dirty="0">
+                <a:solidFill>
+                  <a:srgbClr val="F3F4F6"/>
+                </a:solidFill>
+                <a:latin typeface="Courier New" pitchFamily="34" charset="0"/>
+                <a:ea typeface="Courier New" pitchFamily="34" charset="-122"/>
+                <a:cs typeface="Courier New" pitchFamily="34" charset="-120"/>
+              </a:rPr>
+              <a:t>out tokens          42779        144366</a:t>
+            </a:r>
+            <a:endParaRPr lang="en-US" sz="1400" dirty="0"/>
+          </a:p>
+        </p:txBody>
+      </p:sp>
+      <p:sp>
+        <p:nvSpPr>
+          <p:cNvPr id="13" name="Text 11"/>
+          <p:cNvSpPr/>
+          <p:nvPr/>
+        </p:nvSpPr>
+        <p:spPr>
+          <a:xfrm>
+            <a:off x="868680" y="4069080"/>
+            <a:ext cx="5074920" cy="256032"/>
+          </a:xfrm>
+          <a:prstGeom prst="rect">
+            <a:avLst/>
+          </a:prstGeom>
+          <a:noFill/>
+          <a:ln/>
+        </p:spPr>
+        <p:txBody>
+          <a:bodyPr wrap="square" lIns="0" tIns="0" rIns="0" bIns="0" rtlCol="0" anchor="ctr"/>
+          <a:lstStyle/>
+          <a:p>
+            <a:pPr marL="0" indent="0">
+              <a:buNone/>
+            </a:pPr>
+            <a:r>
+              <a:rPr lang="en-US" sz="1400" b="1" dirty="0">
+                <a:solidFill>
+                  <a:srgbClr val="F4B400"/>
+                </a:solidFill>
+                <a:latin typeface="Courier New" pitchFamily="34" charset="0"/>
+                <a:ea typeface="Courier New" pitchFamily="34" charset="-122"/>
+                <a:cs typeface="Courier New" pitchFamily="34" charset="-120"/>
+              </a:rPr>
+              <a:t>TEST GATE · pytest tests/ -q</a:t>
+            </a:r>
+            <a:endParaRPr lang="en-US" sz="1400" dirty="0"/>
+          </a:p>
+        </p:txBody>
+      </p:sp>
+      <p:sp>
+        <p:nvSpPr>
+          <p:cNvPr id="14" name="Text 12"/>
+          <p:cNvSpPr/>
+          <p:nvPr/>
+        </p:nvSpPr>
+        <p:spPr>
+          <a:xfrm>
+            <a:off x="868680" y="4338828"/>
+            <a:ext cx="5074920" cy="256032"/>
+          </a:xfrm>
+          <a:prstGeom prst="rect">
+            <a:avLst/>
+          </a:prstGeom>
+          <a:noFill/>
+          <a:ln/>
+        </p:spPr>
+        <p:txBody>
+          <a:bodyPr wrap="square" lIns="0" tIns="0" rIns="0" bIns="0" rtlCol="0" anchor="ctr"/>
+          <a:lstStyle/>
+          <a:p>
+            <a:pPr marL="0" indent="0">
+              <a:buNone/>
+            </a:pPr>
+            <a:r>
+              <a:rPr lang="en-US" sz="1400" dirty="0">
+                <a:solidFill>
+                  <a:srgbClr val="6EE7B7"/>
+                </a:solidFill>
+                <a:latin typeface="Courier New" pitchFamily="34" charset="0"/>
+                <a:ea typeface="Courier New" pitchFamily="34" charset="-122"/>
+                <a:cs typeface="Courier New" pitchFamily="34" charset="-120"/>
+              </a:rPr>
+              <a:t>A 24 passed [COMPLETED] · 56 turns</a:t>
+            </a:r>
+            <a:endParaRPr lang="en-US" sz="1400" dirty="0"/>
+          </a:p>
+        </p:txBody>
+      </p:sp>
+      <p:sp>
+        <p:nvSpPr>
+          <p:cNvPr id="15" name="Text 13"/>
+          <p:cNvSpPr/>
+          <p:nvPr/>
+        </p:nvSpPr>
+        <p:spPr>
+          <a:xfrm>
+            <a:off x="868680" y="4608576"/>
+            <a:ext cx="5074920" cy="256032"/>
+          </a:xfrm>
+          <a:prstGeom prst="rect">
+            <a:avLst/>
+          </a:prstGeom>
+          <a:noFill/>
+          <a:ln/>
+        </p:spPr>
+        <p:txBody>
+          <a:bodyPr wrap="square" lIns="0" tIns="0" rIns="0" bIns="0" rtlCol="0" anchor="ctr"/>
+          <a:lstStyle/>
+          <a:p>
+            <a:pPr marL="0" indent="0">
+              <a:buNone/>
+            </a:pPr>
+            <a:r>
+              <a:rPr lang="en-US" sz="1400" dirty="0">
+                <a:solidFill>
+                  <a:srgbClr val="FCA5A5"/>
+                </a:solidFill>
+                <a:latin typeface="Courier New" pitchFamily="34" charset="0"/>
+                <a:ea typeface="Courier New" pitchFamily="34" charset="-122"/>
+                <a:cs typeface="Courier New" pitchFamily="34" charset="-120"/>
+              </a:rPr>
+              <a:t>B 22 passed [HALTED] · 61 turns</a:t>
+            </a:r>
+            <a:endParaRPr lang="en-US" sz="1400" dirty="0"/>
+          </a:p>
+        </p:txBody>
+      </p:sp>
+      <p:sp>
+        <p:nvSpPr>
+          <p:cNvPr id="16" name="Text 14"/>
+          <p:cNvSpPr/>
+          <p:nvPr/>
+        </p:nvSpPr>
+        <p:spPr>
+          <a:xfrm>
+            <a:off x="868680" y="4878324"/>
+            <a:ext cx="5074920" cy="256032"/>
+          </a:xfrm>
+          <a:prstGeom prst="rect">
+            <a:avLst/>
+          </a:prstGeom>
+          <a:noFill/>
+          <a:ln/>
+        </p:spPr>
+        <p:txBody>
+          <a:bodyPr wrap="square" lIns="0" tIns="0" rIns="0" bIns="0" rtlCol="0" anchor="ctr"/>
+          <a:lstStyle/>
+          <a:p>
+            <a:pPr marL="0" indent="0">
+              <a:buNone/>
+            </a:pPr>
+            <a:r>
+              <a:rPr lang="en-US" sz="1400" dirty="0">
+                <a:solidFill>
+                  <a:srgbClr val="F3F4F6"/>
+                </a:solidFill>
+                <a:latin typeface="Courier New" pitchFamily="34" charset="0"/>
+                <a:ea typeface="Courier New" pitchFamily="34" charset="-122"/>
+                <a:cs typeface="Courier New" pitchFamily="34" charset="-120"/>
+              </a:rPr>
+              <a:t>  terminal: max_turns (mid-tool-use)</a:t>
+            </a:r>
+            <a:endParaRPr lang="en-US" sz="1400" dirty="0"/>
+          </a:p>
+        </p:txBody>
+      </p:sp>
+      <p:sp>
+        <p:nvSpPr>
+          <p:cNvPr id="17" name="Text 15"/>
+          <p:cNvSpPr/>
+          <p:nvPr/>
+        </p:nvSpPr>
+        <p:spPr>
+          <a:xfrm>
+            <a:off x="868680" y="5440680"/>
+            <a:ext cx="5074920" cy="274320"/>
+          </a:xfrm>
+          <a:prstGeom prst="rect">
+            <a:avLst/>
+          </a:prstGeom>
+          <a:noFill/>
+          <a:ln/>
+        </p:spPr>
+        <p:txBody>
+          <a:bodyPr wrap="square" rtlCol="0" anchor="ctr"/>
+          <a:lstStyle/>
+          <a:p>
+            <a:pPr marL="0" indent="0">
+              <a:buNone/>
+            </a:pPr>
+            <a:r>
+              <a:rPr lang="en-US" sz="1300" dirty="0">
+                <a:solidFill>
+                  <a:srgbClr val="1F2937"/>
+                </a:solidFill>
+                <a:latin typeface="Calibri" pitchFamily="34" charset="0"/>
+                <a:ea typeface="Calibri" pitchFamily="34" charset="-122"/>
+                <a:cs typeface="Calibri" pitchFamily="34" charset="-120"/>
+              </a:rPr>
+              <a:t>Interpretation: A finished at 56 turns; B was stopped mid-tool-use at 61 — more spent, less delivered.</a:t>
+            </a:r>
+            <a:endParaRPr lang="en-US" sz="1300" dirty="0"/>
+          </a:p>
+        </p:txBody>
+      </p:sp>
+      <p:sp>
+        <p:nvSpPr>
+          <p:cNvPr id="18" name="Text 16"/>
+          <p:cNvSpPr/>
+          <p:nvPr/>
+        </p:nvSpPr>
+        <p:spPr>
+          <a:xfrm>
+            <a:off x="6400800" y="2148840"/>
+            <a:ext cx="5120640" cy="329184"/>
+          </a:xfrm>
+          <a:prstGeom prst="rect">
+            <a:avLst/>
+          </a:prstGeom>
+          <a:noFill/>
+          <a:ln/>
+        </p:spPr>
+        <p:txBody>
+          <a:bodyPr wrap="square" rtlCol="0" anchor="ctr"/>
+          <a:lstStyle/>
+          <a:p>
+            <a:pPr marL="0" indent="0">
+              <a:buNone/>
+            </a:pPr>
+            <a:r>
+              <a:rPr lang="en-US" sz="1600" b="1" dirty="0">
+                <a:solidFill>
+                  <a:srgbClr val="B91C1C"/>
+                </a:solidFill>
+                <a:latin typeface="Calibri" pitchFamily="34" charset="0"/>
+                <a:ea typeface="Calibri" pitchFamily="34" charset="-122"/>
+                <a:cs typeface="Calibri" pitchFamily="34" charset="-120"/>
+              </a:rPr>
+              <a:t>B BARE — 27.4 min · $2.84 · 22 tests</a:t>
+            </a:r>
+            <a:endParaRPr lang="en-US" sz="1600" dirty="0"/>
+          </a:p>
+        </p:txBody>
+      </p:sp>
+      <p:sp>
+        <p:nvSpPr>
+          <p:cNvPr id="19" name="Text 17"/>
+          <p:cNvSpPr/>
+          <p:nvPr/>
+        </p:nvSpPr>
+        <p:spPr>
+          <a:xfrm>
+            <a:off x="6400800" y="2606040"/>
+            <a:ext cx="5120640" cy="274320"/>
+          </a:xfrm>
+          <a:prstGeom prst="rect">
+            <a:avLst/>
+          </a:prstGeom>
+          <a:noFill/>
+          <a:ln/>
+        </p:spPr>
+        <p:txBody>
+          <a:bodyPr wrap="square" lIns="0" tIns="0" rIns="0" bIns="0" rtlCol="0" anchor="ctr"/>
+          <a:lstStyle/>
+          <a:p>
+            <a:pPr marL="0" indent="0">
+              <a:buNone/>
+            </a:pPr>
+            <a:r>
+              <a:rPr lang="en-US" sz="1400" dirty="0">
+                <a:solidFill>
+                  <a:srgbClr val="1F2937"/>
+                </a:solidFill>
+                <a:latin typeface="Courier New" pitchFamily="34" charset="0"/>
+                <a:ea typeface="Courier New" pitchFamily="34" charset="-122"/>
+                <a:cs typeface="Courier New" pitchFamily="34" charset="-120"/>
+              </a:rPr>
+              <a:t>  app/  tests/  — no spec/plan/tasks</a:t>
+            </a:r>
+            <a:endParaRPr lang="en-US" sz="1400" dirty="0"/>
+          </a:p>
+        </p:txBody>
+      </p:sp>
+      <p:sp>
+        <p:nvSpPr>
+          <p:cNvPr id="20" name="Text 18"/>
+          <p:cNvSpPr/>
+          <p:nvPr/>
+        </p:nvSpPr>
+        <p:spPr>
+          <a:xfrm>
+            <a:off x="6400800" y="2880360"/>
+            <a:ext cx="5120640" cy="274320"/>
+          </a:xfrm>
+          <a:prstGeom prst="rect">
+            <a:avLst/>
+          </a:prstGeom>
+          <a:noFill/>
+          <a:ln/>
+        </p:spPr>
+        <p:txBody>
+          <a:bodyPr wrap="square" lIns="0" tIns="0" rIns="0" bIns="0" rtlCol="0" anchor="ctr"/>
+          <a:lstStyle/>
+          <a:p>
+            <a:pPr marL="0" indent="0">
+              <a:buNone/>
+            </a:pPr>
+            <a:r>
+              <a:rPr lang="en-US" sz="1250" dirty="0">
+                <a:solidFill>
+                  <a:srgbClr val="1F2937"/>
+                </a:solidFill>
+                <a:latin typeface="Courier New" pitchFamily="34" charset="0"/>
+                <a:ea typeface="Courier New" pitchFamily="34" charset="-122"/>
+                <a:cs typeface="Courier New" pitchFamily="34" charset="-120"/>
+              </a:rPr>
+              <a:t>  session halted before completion</a:t>
+            </a:r>
+            <a:endParaRPr lang="en-US" sz="1250" dirty="0"/>
+          </a:p>
+        </p:txBody>
+      </p:sp>
+      <p:sp>
+        <p:nvSpPr>
+          <p:cNvPr id="21" name="Text 19"/>
+          <p:cNvSpPr/>
+          <p:nvPr/>
+        </p:nvSpPr>
+        <p:spPr>
+          <a:xfrm>
+            <a:off x="6400800" y="3154680"/>
+            <a:ext cx="5120640" cy="274320"/>
+          </a:xfrm>
+          <a:prstGeom prst="rect">
+            <a:avLst/>
+          </a:prstGeom>
+          <a:noFill/>
+          <a:ln/>
+        </p:spPr>
+        <p:txBody>
+          <a:bodyPr wrap="square" lIns="0" tIns="0" rIns="0" bIns="0" rtlCol="0" anchor="ctr"/>
+          <a:lstStyle/>
+          <a:p>
+            <a:pPr marL="0" indent="0">
+              <a:buNone/>
+            </a:pPr>
+            <a:r>
+              <a:rPr lang="en-US" sz="1600" b="1" dirty="0">
+                <a:solidFill>
+                  <a:srgbClr val="1B5E20"/>
+                </a:solidFill>
+                <a:latin typeface="Courier New" pitchFamily="34" charset="0"/>
+                <a:ea typeface="Courier New" pitchFamily="34" charset="-122"/>
+                <a:cs typeface="Courier New" pitchFamily="34" charset="-120"/>
+              </a:rPr>
+              <a:t>A ACTIVATED — 6.5m · $1.08 · 24 tests</a:t>
+            </a:r>
+            <a:endParaRPr lang="en-US" sz="1600" dirty="0"/>
+          </a:p>
+        </p:txBody>
+      </p:sp>
+      <p:sp>
+        <p:nvSpPr>
+          <p:cNvPr id="22" name="Text 20"/>
+          <p:cNvSpPr/>
+          <p:nvPr/>
+        </p:nvSpPr>
+        <p:spPr>
+          <a:xfrm>
+            <a:off x="6400800" y="3502152"/>
+            <a:ext cx="5120640" cy="274320"/>
+          </a:xfrm>
+          <a:prstGeom prst="rect">
+            <a:avLst/>
+          </a:prstGeom>
+          <a:noFill/>
+          <a:ln/>
+        </p:spPr>
+        <p:txBody>
+          <a:bodyPr wrap="square" lIns="0" tIns="0" rIns="0" bIns="0" rtlCol="0" anchor="ctr"/>
+          <a:lstStyle/>
+          <a:p>
+            <a:pPr marL="0" indent="0">
+              <a:buNone/>
+            </a:pPr>
+            <a:r>
+              <a:rPr lang="en-US" sz="1400" dirty="0">
+                <a:solidFill>
+                  <a:srgbClr val="1F2937"/>
+                </a:solidFill>
+                <a:latin typeface="Courier New" pitchFamily="34" charset="0"/>
+                <a:ea typeface="Courier New" pitchFamily="34" charset="-122"/>
+                <a:cs typeface="Courier New" pitchFamily="34" charset="-120"/>
+              </a:rPr>
+              <a:t>  app/  tests/  docs/qa/</a:t>
+            </a:r>
+            <a:endParaRPr lang="en-US" sz="1400" dirty="0"/>
+          </a:p>
+        </p:txBody>
+      </p:sp>
+      <p:sp>
+        <p:nvSpPr>
+          <p:cNvPr id="23" name="Text 21"/>
+          <p:cNvSpPr/>
+          <p:nvPr/>
+        </p:nvSpPr>
+        <p:spPr>
+          <a:xfrm>
+            <a:off x="6400800" y="3776472"/>
+            <a:ext cx="5120640" cy="274320"/>
+          </a:xfrm>
+          <a:prstGeom prst="rect">
+            <a:avLst/>
+          </a:prstGeom>
+          <a:noFill/>
+          <a:ln/>
+        </p:spPr>
+        <p:txBody>
+          <a:bodyPr wrap="square" lIns="0" tIns="0" rIns="0" bIns="0" rtlCol="0" anchor="ctr"/>
+          <a:lstStyle/>
+          <a:p>
+            <a:pPr marL="0" indent="0">
+              <a:buNone/>
+            </a:pPr>
+            <a:r>
+              <a:rPr lang="en-US" sz="1400" dirty="0">
+                <a:solidFill>
+                  <a:srgbClr val="1F2937"/>
+                </a:solidFill>
+                <a:latin typeface="Courier New" pitchFamily="34" charset="0"/>
+                <a:ea typeface="Courier New" pitchFamily="34" charset="-122"/>
+                <a:cs typeface="Courier New" pitchFamily="34" charset="-120"/>
+              </a:rPr>
+              <a:t>  docs/product/product.md</a:t>
+            </a:r>
+            <a:endParaRPr lang="en-US" sz="1400" dirty="0"/>
+          </a:p>
+        </p:txBody>
+      </p:sp>
+      <p:sp>
+        <p:nvSpPr>
+          <p:cNvPr id="24" name="Text 22"/>
+          <p:cNvSpPr/>
+          <p:nvPr/>
+        </p:nvSpPr>
+        <p:spPr>
+          <a:xfrm>
+            <a:off x="6400800" y="4050792"/>
+            <a:ext cx="5120640" cy="274320"/>
+          </a:xfrm>
+          <a:prstGeom prst="rect">
+            <a:avLst/>
+          </a:prstGeom>
+          <a:noFill/>
+          <a:ln/>
+        </p:spPr>
+        <p:txBody>
+          <a:bodyPr wrap="square" lIns="0" tIns="0" rIns="0" bIns="0" rtlCol="0" anchor="ctr"/>
+          <a:lstStyle/>
+          <a:p>
+            <a:pPr marL="0" indent="0">
+              <a:buNone/>
+            </a:pPr>
+            <a:r>
+              <a:rPr lang="en-US" sz="1400" dirty="0">
+                <a:solidFill>
+                  <a:srgbClr val="1F2937"/>
+                </a:solidFill>
+                <a:latin typeface="Courier New" pitchFamily="34" charset="0"/>
+                <a:ea typeface="Courier New" pitchFamily="34" charset="-122"/>
+                <a:cs typeface="Courier New" pitchFamily="34" charset="-120"/>
+              </a:rPr>
+              <a:t>  .specify/features/rate-limited-sse-proxy/</a:t>
+            </a:r>
+            <a:endParaRPr lang="en-US" sz="1400" dirty="0"/>
+          </a:p>
+        </p:txBody>
+      </p:sp>
+      <p:sp>
+        <p:nvSpPr>
+          <p:cNvPr id="25" name="Text 23"/>
+          <p:cNvSpPr/>
+          <p:nvPr/>
+        </p:nvSpPr>
+        <p:spPr>
+          <a:xfrm>
+            <a:off x="6400800" y="4325112"/>
+            <a:ext cx="5120640" cy="274320"/>
+          </a:xfrm>
+          <a:prstGeom prst="rect">
+            <a:avLst/>
+          </a:prstGeom>
+          <a:noFill/>
+          <a:ln/>
+        </p:spPr>
+        <p:txBody>
+          <a:bodyPr wrap="square" lIns="0" tIns="0" rIns="0" bIns="0" rtlCol="0" anchor="ctr"/>
+          <a:lstStyle/>
+          <a:p>
+            <a:pPr marL="0" indent="0">
+              <a:buNone/>
+            </a:pPr>
+            <a:r>
+              <a:rPr lang="en-US" sz="1350" dirty="0">
+                <a:solidFill>
+                  <a:srgbClr val="1F2937"/>
+                </a:solidFill>
+                <a:latin typeface="Courier New" pitchFamily="34" charset="0"/>
+                <a:ea typeface="Courier New" pitchFamily="34" charset="-122"/>
+                <a:cs typeface="Courier New" pitchFamily="34" charset="-120"/>
+              </a:rPr>
+              <a:t>    spec.md · impl-plan.md · tasks.md</a:t>
+            </a:r>
+            <a:endParaRPr lang="en-US" sz="1350" dirty="0"/>
+          </a:p>
+        </p:txBody>
+      </p:sp>
+      <p:sp>
+        <p:nvSpPr>
+          <p:cNvPr id="26" name="Text 24"/>
+          <p:cNvSpPr/>
+          <p:nvPr/>
+        </p:nvSpPr>
+        <p:spPr>
+          <a:xfrm>
+            <a:off x="6400800" y="4599432"/>
+            <a:ext cx="5120640" cy="274320"/>
+          </a:xfrm>
+          <a:prstGeom prst="rect">
+            <a:avLst/>
+          </a:prstGeom>
+          <a:noFill/>
+          <a:ln/>
+        </p:spPr>
+        <p:txBody>
+          <a:bodyPr wrap="square" lIns="0" tIns="0" rIns="0" bIns="0" rtlCol="0" anchor="ctr"/>
+          <a:lstStyle/>
+          <a:p>
+            <a:pPr marL="0" indent="0">
+              <a:buNone/>
+            </a:pPr>
+            <a:r>
+              <a:rPr lang="en-US" sz="1250" dirty="0">
+                <a:solidFill>
+                  <a:srgbClr val="1F2937"/>
+                </a:solidFill>
+                <a:latin typeface="Courier New" pitchFamily="34" charset="0"/>
+                <a:ea typeface="Courier New" pitchFamily="34" charset="-122"/>
+                <a:cs typeface="Courier New" pitchFamily="34" charset="-120"/>
+              </a:rPr>
+              <a:t>  QA lane verified the work</a:t>
+            </a:r>
+            <a:endParaRPr lang="en-US" sz="1250" dirty="0"/>
+          </a:p>
+        </p:txBody>
+      </p:sp>
+      <p:sp>
+        <p:nvSpPr>
+          <p:cNvPr id="27" name="Text 25"/>
+          <p:cNvSpPr/>
+          <p:nvPr/>
+        </p:nvSpPr>
+        <p:spPr>
+          <a:xfrm>
+            <a:off x="685800" y="5806440"/>
+            <a:ext cx="10835640" cy="365760"/>
+          </a:xfrm>
+          <a:prstGeom prst="rect">
+            <a:avLst/>
+          </a:prstGeom>
+          <a:noFill/>
+          <a:ln/>
+        </p:spPr>
+        <p:txBody>
+          <a:bodyPr wrap="square" rtlCol="0" anchor="ctr"/>
+          <a:lstStyle/>
+          <a:p>
+            <a:pPr marL="0" indent="0">
+              <a:buNone/>
+            </a:pPr>
+            <a:r>
+              <a:rPr lang="en-US" sz="1900" b="1" dirty="0">
+                <a:solidFill>
+                  <a:srgbClr val="1E2761"/>
+                </a:solidFill>
+                <a:latin typeface="Calibri" pitchFamily="34" charset="0"/>
+                <a:ea typeface="Calibri" pitchFamily="34" charset="-122"/>
+                <a:cs typeface="Calibri" pitchFamily="34" charset="-120"/>
+              </a:rPr>
+              <a:t>The framework arm finished 4.2× faster — and left a traceability trail.</a:t>
+            </a:r>
+            <a:endParaRPr lang="en-US" sz="1900" dirty="0"/>
+          </a:p>
+        </p:txBody>
+      </p:sp>
+      <p:sp>
+        <p:nvSpPr>
+          <p:cNvPr id="28" name="Text 26"/>
+          <p:cNvSpPr/>
+          <p:nvPr/>
+        </p:nvSpPr>
+        <p:spPr>
+          <a:xfrm>
+            <a:off x="685800" y="6217920"/>
+            <a:ext cx="10835640" cy="320040"/>
+          </a:xfrm>
+          <a:prstGeom prst="rect">
+            <a:avLst/>
+          </a:prstGeom>
+          <a:noFill/>
+          <a:ln/>
+        </p:spPr>
+        <p:txBody>
+          <a:bodyPr wrap="square" rtlCol="0" anchor="ctr"/>
+          <a:lstStyle/>
+          <a:p>
+            <a:pPr marL="0" indent="0">
+              <a:buNone/>
+            </a:pPr>
+            <a:r>
+              <a:rPr lang="en-US" sz="1400" dirty="0">
+                <a:solidFill>
+                  <a:srgbClr val="4B5563"/>
+                </a:solidFill>
+                <a:latin typeface="Calibri" pitchFamily="34" charset="0"/>
+                <a:ea typeface="Calibri" pitchFamily="34" charset="-122"/>
+                <a:cs typeface="Calibri" pitchFamily="34" charset="-120"/>
+              </a:rPr>
+              <a:t>Offline gates only — the devops lanes (CI · Vercel ops · rollback) fire on live projects, not in a lab bench.</a:t>
+            </a:r>
+            <a:endParaRPr lang="en-US" sz="1400" dirty="0"/>
+          </a:p>
+        </p:txBody>
+      </p:sp>
+    </p:spTree>
+  </p:cSld>
+  <p:clrMapOvr>
+    <a:masterClrMapping/>
+  </p:clrMapOvr>
+</p:sld>
+</file>
+
+<file path=ppt/slides/slide9.xml><?xml version="1.0" encoding="utf-8"?>
+<p:sld xmlns:a="http://schemas.openxmlformats.org/drawingml/2006/main" xmlns:r="http://schemas.openxmlformats.org/officeDocument/2006/relationships" xmlns:p="http://schemas.openxmlformats.org/presentationml/2006/main">
   <p:cSld name="Slide 7">
     <p:bg>
       <p:bgPr>
         <a:solidFill>
           <a:srgbClr val="FFFFFF"/>
         </a:solidFill>
+        <a:effectLst/>
       </p:bgPr>
     </p:bg>
     <p:spTree>
@@ -5422,11 +8306,11 @@
           <a:bodyPr wrap="square" rtlCol="0" anchor="ctr"/>
           <a:lstStyle/>
           <a:p>
-            <a:pPr indent="0" marL="0">
-              <a:buNone/>
-            </a:pPr>
-            <a:r>
-              <a:rPr lang="en-US" sz="1300" b="1" spc="200" kern="0" dirty="0">
+            <a:pPr marL="0" indent="0">
+              <a:buNone/>
+            </a:pPr>
+            <a:r>
+              <a:rPr lang="en-US" sz="1300" b="1" kern="0" spc="200" dirty="0">
                 <a:solidFill>
                   <a:srgbClr val="B98A00"/>
                 </a:solidFill>
@@ -5461,7 +8345,7 @@
           <a:bodyPr wrap="square" rtlCol="0" anchor="ctr"/>
           <a:lstStyle/>
           <a:p>
-            <a:pPr indent="0" marL="0">
+            <a:pPr marL="0" indent="0">
               <a:buNone/>
             </a:pPr>
             <a:r>
@@ -5500,7 +8384,7 @@
           <a:bodyPr wrap="square" rtlCol="0" anchor="ctr"/>
           <a:lstStyle/>
           <a:p>
-            <a:pPr indent="0" marL="0">
+            <a:pPr marL="0" indent="0">
               <a:buNone/>
             </a:pPr>
             <a:r>
@@ -5539,7 +8423,7 @@
           <a:bodyPr wrap="square" rtlCol="0" anchor="ctr"/>
           <a:lstStyle/>
           <a:p>
-            <a:pPr indent="0" marL="0">
+            <a:pPr marL="0" indent="0">
               <a:buNone/>
             </a:pPr>
             <a:r>
@@ -5578,7 +8462,7 @@
           <a:bodyPr wrap="square" rtlCol="0" anchor="ctr"/>
           <a:lstStyle/>
           <a:p>
-            <a:pPr algn="ctr" indent="0" marL="0">
+            <a:pPr marL="0" indent="0" algn="ctr">
               <a:buNone/>
             </a:pPr>
             <a:r>
@@ -5617,7 +8501,7 @@
           <a:bodyPr wrap="square" rtlCol="0" anchor="ctr"/>
           <a:lstStyle/>
           <a:p>
-            <a:pPr algn="ctr" indent="0" marL="0">
+            <a:pPr marL="0" indent="0" algn="ctr">
               <a:buNone/>
             </a:pPr>
             <a:r>
@@ -5656,7 +8540,7 @@
           <a:bodyPr wrap="square" rtlCol="0" anchor="ctr"/>
           <a:lstStyle/>
           <a:p>
-            <a:pPr algn="ctr" indent="0" marL="0">
+            <a:pPr marL="0" indent="0" algn="ctr">
               <a:buNone/>
             </a:pPr>
             <a:r>
@@ -5722,7 +8606,7 @@
           <a:bodyPr wrap="square" rtlCol="0" anchor="ctr"/>
           <a:lstStyle/>
           <a:p>
-            <a:pPr indent="0" marL="0">
+            <a:pPr marL="0" indent="0">
               <a:buNone/>
             </a:pPr>
             <a:r>
@@ -5761,7 +8645,7 @@
           <a:bodyPr wrap="square" rtlCol="0" anchor="ctr"/>
           <a:lstStyle/>
           <a:p>
-            <a:pPr algn="ctr" indent="0" marL="0">
+            <a:pPr marL="0" indent="0" algn="ctr">
               <a:buNone/>
             </a:pPr>
             <a:r>
@@ -5800,7 +8684,7 @@
           <a:bodyPr wrap="square" rtlCol="0" anchor="ctr"/>
           <a:lstStyle/>
           <a:p>
-            <a:pPr algn="ctr" indent="0" marL="0">
+            <a:pPr marL="0" indent="0" algn="ctr">
               <a:buNone/>
             </a:pPr>
             <a:r>
@@ -5839,7 +8723,7 @@
           <a:bodyPr wrap="square" rtlCol="0" anchor="ctr"/>
           <a:lstStyle/>
           <a:p>
-            <a:pPr algn="ctr" indent="0" marL="0">
+            <a:pPr marL="0" indent="0" algn="ctr">
               <a:buNone/>
             </a:pPr>
             <a:r>
@@ -5905,7 +8789,7 @@
           <a:bodyPr wrap="square" rtlCol="0" anchor="ctr"/>
           <a:lstStyle/>
           <a:p>
-            <a:pPr indent="0" marL="0">
+            <a:pPr marL="0" indent="0">
               <a:buNone/>
             </a:pPr>
             <a:r>
@@ -5944,7 +8828,7 @@
           <a:bodyPr wrap="square" rtlCol="0" anchor="ctr"/>
           <a:lstStyle/>
           <a:p>
-            <a:pPr algn="ctr" indent="0" marL="0">
+            <a:pPr marL="0" indent="0" algn="ctr">
               <a:buNone/>
             </a:pPr>
             <a:r>
@@ -5983,7 +8867,7 @@
           <a:bodyPr wrap="square" rtlCol="0" anchor="ctr"/>
           <a:lstStyle/>
           <a:p>
-            <a:pPr algn="ctr" indent="0" marL="0">
+            <a:pPr marL="0" indent="0" algn="ctr">
               <a:buNone/>
             </a:pPr>
             <a:r>
@@ -6022,7 +8906,7 @@
           <a:bodyPr wrap="square" rtlCol="0" anchor="ctr"/>
           <a:lstStyle/>
           <a:p>
-            <a:pPr algn="ctr" indent="0" marL="0">
+            <a:pPr marL="0" indent="0" algn="ctr">
               <a:buNone/>
             </a:pPr>
             <a:r>
@@ -6088,7 +8972,7 @@
           <a:bodyPr wrap="square" rtlCol="0" anchor="ctr"/>
           <a:lstStyle/>
           <a:p>
-            <a:pPr indent="0" marL="0">
+            <a:pPr marL="0" indent="0">
               <a:buNone/>
             </a:pPr>
             <a:r>
@@ -6127,7 +9011,7 @@
           <a:bodyPr wrap="square" rtlCol="0" anchor="ctr"/>
           <a:lstStyle/>
           <a:p>
-            <a:pPr algn="ctr" indent="0" marL="0">
+            <a:pPr marL="0" indent="0" algn="ctr">
               <a:buNone/>
             </a:pPr>
             <a:r>
@@ -6166,7 +9050,7 @@
           <a:bodyPr wrap="square" rtlCol="0" anchor="ctr"/>
           <a:lstStyle/>
           <a:p>
-            <a:pPr algn="ctr" indent="0" marL="0">
+            <a:pPr marL="0" indent="0" algn="ctr">
               <a:buNone/>
             </a:pPr>
             <a:r>
@@ -6205,7 +9089,7 @@
           <a:bodyPr wrap="square" rtlCol="0" anchor="ctr"/>
           <a:lstStyle/>
           <a:p>
-            <a:pPr algn="ctr" indent="0" marL="0">
+            <a:pPr marL="0" indent="0" algn="ctr">
               <a:buNone/>
             </a:pPr>
             <a:r>
@@ -6271,7 +9155,7 @@
           <a:bodyPr wrap="square" rtlCol="0" anchor="ctr"/>
           <a:lstStyle/>
           <a:p>
-            <a:pPr indent="0" marL="0">
+            <a:pPr marL="0" indent="0">
               <a:buNone/>
             </a:pPr>
             <a:r>
@@ -6310,7 +9194,7 @@
           <a:bodyPr wrap="square" rtlCol="0" anchor="ctr"/>
           <a:lstStyle/>
           <a:p>
-            <a:pPr algn="ctr" indent="0" marL="0">
+            <a:pPr marL="0" indent="0" algn="ctr">
               <a:buNone/>
             </a:pPr>
             <a:r>
@@ -6349,7 +9233,7 @@
           <a:bodyPr wrap="square" rtlCol="0" anchor="ctr"/>
           <a:lstStyle/>
           <a:p>
-            <a:pPr algn="ctr" indent="0" marL="0">
+            <a:pPr marL="0" indent="0" algn="ctr">
               <a:buNone/>
             </a:pPr>
             <a:r>
@@ -6388,7 +9272,7 @@
           <a:bodyPr wrap="square" rtlCol="0" anchor="ctr"/>
           <a:lstStyle/>
           <a:p>
-            <a:pPr algn="ctr" indent="0" marL="0">
+            <a:pPr marL="0" indent="0" algn="ctr">
               <a:buNone/>
             </a:pPr>
             <a:r>
@@ -6454,7 +9338,7 @@
           <a:bodyPr wrap="square" rtlCol="0" anchor="ctr"/>
           <a:lstStyle/>
           <a:p>
-            <a:pPr indent="0" marL="0">
+            <a:pPr marL="0" indent="0">
               <a:buNone/>
             </a:pPr>
             <a:r>
@@ -6493,7 +9377,7 @@
           <a:bodyPr wrap="square" rtlCol="0" anchor="ctr"/>
           <a:lstStyle/>
           <a:p>
-            <a:pPr indent="0" marL="0">
+            <a:pPr marL="0" indent="0">
               <a:buNone/>
             </a:pPr>
             <a:r>
@@ -6508,1158 +9392,6 @@
               <a:t>Honest poles: passive ≈ bare (placebo) · N=1 per cell · cost basis provider-unknown (GAP-ANALYSIS.md) · devops lanes unmeasured offline.</a:t>
             </a:r>
             <a:endParaRPr lang="en-US" sz="1350" dirty="0"/>
-          </a:p>
-        </p:txBody>
-      </p:sp>
-    </p:spTree>
-  </p:cSld>
-  <p:clrMapOvr>
-    <a:masterClrMapping/>
-  </p:clrMapOvr>
-</p:sld>
-</file>
-
-<file path=ppt/slides/slide8.xml><?xml version="1.0" encoding="utf-8"?>
-<p:sld xmlns:a="http://schemas.openxmlformats.org/drawingml/2006/main" xmlns:r="http://schemas.openxmlformats.org/officeDocument/2006/relationships" xmlns:p="http://schemas.openxmlformats.org/presentationml/2006/main">
-  <p:cSld name="Slide 8">
-    <p:bg>
-      <p:bgPr>
-        <a:solidFill>
-          <a:srgbClr val="FFFFFF"/>
-        </a:solidFill>
-      </p:bgPr>
-    </p:bg>
-    <p:spTree>
-      <p:nvGrpSpPr>
-        <p:cNvPr id="1" name=""/>
-        <p:cNvGrpSpPr/>
-        <p:nvPr/>
-      </p:nvGrpSpPr>
-      <p:grpSpPr>
-        <a:xfrm>
-          <a:off x="0" y="0"/>
-          <a:ext cx="0" cy="0"/>
-          <a:chOff x="0" y="0"/>
-          <a:chExt cx="0" cy="0"/>
-        </a:xfrm>
-      </p:grpSpPr>
-      <p:sp>
-        <p:nvSpPr>
-          <p:cNvPr id="2" name="Text 0"/>
-          <p:cNvSpPr/>
-          <p:nvPr/>
-        </p:nvSpPr>
-        <p:spPr>
-          <a:xfrm>
-            <a:off x="502920" y="256032"/>
-            <a:ext cx="10972800" cy="292608"/>
-          </a:xfrm>
-          <a:prstGeom prst="rect">
-            <a:avLst/>
-          </a:prstGeom>
-          <a:noFill/>
-          <a:ln/>
-        </p:spPr>
-        <p:txBody>
-          <a:bodyPr wrap="square" rtlCol="0" anchor="ctr"/>
-          <a:lstStyle/>
-          <a:p>
-            <a:pPr indent="0" marL="0">
-              <a:buNone/>
-            </a:pPr>
-            <a:r>
-              <a:rPr lang="en-US" sz="1300" b="1" spc="200" kern="0" dirty="0">
-                <a:solidFill>
-                  <a:srgbClr val="B98A00"/>
-                </a:solidFill>
-                <a:latin typeface="Calibri" pitchFamily="34" charset="0"/>
-                <a:ea typeface="Calibri" pitchFamily="34" charset="-122"/>
-                <a:cs typeface="Calibri" pitchFamily="34" charset="-120"/>
-              </a:rPr>
-              <a:t>HONEST YARDSTICKS</a:t>
-            </a:r>
-            <a:endParaRPr lang="en-US" sz="1300" dirty="0"/>
-          </a:p>
-        </p:txBody>
-      </p:sp>
-      <p:sp>
-        <p:nvSpPr>
-          <p:cNvPr id="3" name="Text 1"/>
-          <p:cNvSpPr/>
-          <p:nvPr/>
-        </p:nvSpPr>
-        <p:spPr>
-          <a:xfrm>
-            <a:off x="502920" y="548640"/>
-            <a:ext cx="11155680" cy="777240"/>
-          </a:xfrm>
-          <a:prstGeom prst="rect">
-            <a:avLst/>
-          </a:prstGeom>
-          <a:noFill/>
-          <a:ln/>
-        </p:spPr>
-        <p:txBody>
-          <a:bodyPr wrap="square" rtlCol="0" anchor="ctr"/>
-          <a:lstStyle/>
-          <a:p>
-            <a:pPr indent="0" marL="0">
-              <a:buNone/>
-            </a:pPr>
-            <a:r>
-              <a:rPr lang="en-US" sz="4000" b="1" dirty="0">
-                <a:solidFill>
-                  <a:srgbClr val="1E2761"/>
-                </a:solidFill>
-                <a:latin typeface="Cambria" pitchFamily="34" charset="0"/>
-                <a:ea typeface="Cambria" pitchFamily="34" charset="-122"/>
-                <a:cs typeface="Cambria" pitchFamily="34" charset="-120"/>
-              </a:rPr>
-              <a:t>Strengths · weaknesses · deliberate cuts</a:t>
-            </a:r>
-            <a:endParaRPr lang="en-US" sz="4000" dirty="0"/>
-          </a:p>
-        </p:txBody>
-      </p:sp>
-      <p:sp>
-        <p:nvSpPr>
-          <p:cNvPr id="4" name="Text 2"/>
-          <p:cNvSpPr/>
-          <p:nvPr/>
-        </p:nvSpPr>
-        <p:spPr>
-          <a:xfrm>
-            <a:off x="502920" y="1325880"/>
-            <a:ext cx="11155680" cy="457200"/>
-          </a:xfrm>
-          <a:prstGeom prst="rect">
-            <a:avLst/>
-          </a:prstGeom>
-          <a:noFill/>
-          <a:ln/>
-        </p:spPr>
-        <p:txBody>
-          <a:bodyPr wrap="square" rtlCol="0" anchor="ctr"/>
-          <a:lstStyle/>
-          <a:p>
-            <a:pPr indent="0" marL="0">
-              <a:buNone/>
-            </a:pPr>
-            <a:r>
-              <a:rPr lang="en-US" sz="1800" dirty="0">
-                <a:solidFill>
-                  <a:srgbClr val="6B7280"/>
-                </a:solidFill>
-                <a:latin typeface="Calibri" pitchFamily="34" charset="0"/>
-                <a:ea typeface="Calibri" pitchFamily="34" charset="-122"/>
-                <a:cs typeface="Calibri" pitchFamily="34" charset="-120"/>
-              </a:rPr>
-              <a:t>Measured first — then what we left out by design.</a:t>
-            </a:r>
-            <a:endParaRPr lang="en-US" sz="1800" dirty="0"/>
-          </a:p>
-        </p:txBody>
-      </p:sp>
-      <p:sp>
-        <p:nvSpPr>
-          <p:cNvPr id="5" name="Shape 3"/>
-          <p:cNvSpPr/>
-          <p:nvPr/>
-        </p:nvSpPr>
-        <p:spPr>
-          <a:xfrm>
-            <a:off x="685800" y="2103120"/>
-            <a:ext cx="5349240" cy="2286000"/>
-          </a:xfrm>
-          <a:prstGeom prst="roundRect">
-            <a:avLst>
-              <a:gd name="adj" fmla="val 4000"/>
-            </a:avLst>
-          </a:prstGeom>
-          <a:solidFill>
-            <a:srgbClr val="EAF5EC"/>
-          </a:solidFill>
-          <a:ln w="15875">
-            <a:solidFill>
-              <a:srgbClr val="2E7D32"/>
-            </a:solidFill>
-            <a:prstDash val="solid"/>
-          </a:ln>
-        </p:spPr>
-      </p:sp>
-      <p:sp>
-        <p:nvSpPr>
-          <p:cNvPr id="6" name="Text 4"/>
-          <p:cNvSpPr/>
-          <p:nvPr/>
-        </p:nvSpPr>
-        <p:spPr>
-          <a:xfrm>
-            <a:off x="960120" y="2286000"/>
-            <a:ext cx="4800600" cy="320040"/>
-          </a:xfrm>
-          <a:prstGeom prst="rect">
-            <a:avLst/>
-          </a:prstGeom>
-          <a:noFill/>
-          <a:ln/>
-        </p:spPr>
-        <p:txBody>
-          <a:bodyPr wrap="square" rtlCol="0" anchor="ctr"/>
-          <a:lstStyle/>
-          <a:p>
-            <a:pPr indent="0" marL="0">
-              <a:buNone/>
-            </a:pPr>
-            <a:r>
-              <a:rPr lang="en-US" sz="1500" b="1" dirty="0">
-                <a:solidFill>
-                  <a:srgbClr val="1B5E20"/>
-                </a:solidFill>
-                <a:latin typeface="Calibri" pitchFamily="34" charset="0"/>
-                <a:ea typeface="Calibri" pitchFamily="34" charset="-122"/>
-                <a:cs typeface="Calibri" pitchFamily="34" charset="-120"/>
-              </a:rPr>
-              <a:t>STRENGTHS (VERIFIED)</a:t>
-            </a:r>
-            <a:endParaRPr lang="en-US" sz="1500" dirty="0"/>
-          </a:p>
-        </p:txBody>
-      </p:sp>
-      <p:sp>
-        <p:nvSpPr>
-          <p:cNvPr id="7" name="Text 5"/>
-          <p:cNvSpPr/>
-          <p:nvPr/>
-        </p:nvSpPr>
-        <p:spPr>
-          <a:xfrm>
-            <a:off x="960120" y="2697480"/>
-            <a:ext cx="4846320" cy="365760"/>
-          </a:xfrm>
-          <a:prstGeom prst="rect">
-            <a:avLst/>
-          </a:prstGeom>
-          <a:noFill/>
-          <a:ln/>
-        </p:spPr>
-        <p:txBody>
-          <a:bodyPr wrap="square" lIns="0" tIns="0" rIns="0" bIns="0" rtlCol="0" anchor="ctr"/>
-          <a:lstStyle/>
-          <a:p>
-            <a:pPr indent="0" marL="0">
-              <a:buNone/>
-            </a:pPr>
-            <a:r>
-              <a:rPr lang="en-US" sz="1350" dirty="0">
-                <a:solidFill>
-                  <a:srgbClr val="1F2937"/>
-                </a:solidFill>
-                <a:latin typeface="Calibri" pitchFamily="34" charset="0"/>
-                <a:ea typeface="Calibri" pitchFamily="34" charset="-122"/>
-                <a:cs typeface="Calibri" pitchFamily="34" charset="-120"/>
-              </a:rPr>
-              <a:t>• Value where difficulty lives — 4.2× faster on the hard case</a:t>
-            </a:r>
-            <a:endParaRPr lang="en-US" sz="1350" dirty="0"/>
-          </a:p>
-        </p:txBody>
-      </p:sp>
-      <p:sp>
-        <p:nvSpPr>
-          <p:cNvPr id="8" name="Text 6"/>
-          <p:cNvSpPr/>
-          <p:nvPr/>
-        </p:nvSpPr>
-        <p:spPr>
-          <a:xfrm>
-            <a:off x="960120" y="3099816"/>
-            <a:ext cx="4846320" cy="365760"/>
-          </a:xfrm>
-          <a:prstGeom prst="rect">
-            <a:avLst/>
-          </a:prstGeom>
-          <a:noFill/>
-          <a:ln/>
-        </p:spPr>
-        <p:txBody>
-          <a:bodyPr wrap="square" lIns="0" tIns="0" rIns="0" bIns="0" rtlCol="0" anchor="ctr"/>
-          <a:lstStyle/>
-          <a:p>
-            <a:pPr indent="0" marL="0">
-              <a:buNone/>
-            </a:pPr>
-            <a:r>
-              <a:rPr lang="en-US" sz="1350" dirty="0">
-                <a:solidFill>
-                  <a:srgbClr val="1F2937"/>
-                </a:solidFill>
-                <a:latin typeface="Calibri" pitchFamily="34" charset="0"/>
-                <a:ea typeface="Calibri" pitchFamily="34" charset="-122"/>
-                <a:cs typeface="Calibri" pitchFamily="34" charset="-120"/>
-              </a:rPr>
-              <a:t>• Traceability in 8/8 A-runs; zero in bare</a:t>
-            </a:r>
-            <a:endParaRPr lang="en-US" sz="1350" dirty="0"/>
-          </a:p>
-        </p:txBody>
-      </p:sp>
-      <p:sp>
-        <p:nvSpPr>
-          <p:cNvPr id="9" name="Text 7"/>
-          <p:cNvSpPr/>
-          <p:nvPr/>
-        </p:nvSpPr>
-        <p:spPr>
-          <a:xfrm>
-            <a:off x="960120" y="3502152"/>
-            <a:ext cx="4846320" cy="365760"/>
-          </a:xfrm>
-          <a:prstGeom prst="rect">
-            <a:avLst/>
-          </a:prstGeom>
-          <a:noFill/>
-          <a:ln/>
-        </p:spPr>
-        <p:txBody>
-          <a:bodyPr wrap="square" lIns="0" tIns="0" rIns="0" bIns="0" rtlCol="0" anchor="ctr"/>
-          <a:lstStyle/>
-          <a:p>
-            <a:pPr indent="0" marL="0">
-              <a:buNone/>
-            </a:pPr>
-            <a:r>
-              <a:rPr lang="en-US" sz="1350" dirty="0">
-                <a:solidFill>
-                  <a:srgbClr val="1F2937"/>
-                </a:solidFill>
-                <a:latin typeface="Calibri" pitchFamily="34" charset="0"/>
-                <a:ea typeface="Calibri" pitchFamily="34" charset="-122"/>
-                <a:cs typeface="Calibri" pitchFamily="34" charset="-120"/>
-              </a:rPr>
-              <a:t>• Clean install · marketplace updates · CLI-first stack</a:t>
-            </a:r>
-            <a:endParaRPr lang="en-US" sz="1350" dirty="0"/>
-          </a:p>
-        </p:txBody>
-      </p:sp>
-      <p:sp>
-        <p:nvSpPr>
-          <p:cNvPr id="10" name="Text 8"/>
-          <p:cNvSpPr/>
-          <p:nvPr/>
-        </p:nvSpPr>
-        <p:spPr>
-          <a:xfrm>
-            <a:off x="960120" y="3904488"/>
-            <a:ext cx="4846320" cy="365760"/>
-          </a:xfrm>
-          <a:prstGeom prst="rect">
-            <a:avLst/>
-          </a:prstGeom>
-          <a:noFill/>
-          <a:ln/>
-        </p:spPr>
-        <p:txBody>
-          <a:bodyPr wrap="square" lIns="0" tIns="0" rIns="0" bIns="0" rtlCol="0" anchor="ctr"/>
-          <a:lstStyle/>
-          <a:p>
-            <a:pPr indent="0" marL="0">
-              <a:buNone/>
-            </a:pPr>
-            <a:r>
-              <a:rPr lang="en-US" sz="1350" dirty="0">
-                <a:solidFill>
-                  <a:srgbClr val="1F2937"/>
-                </a:solidFill>
-                <a:latin typeface="Calibri" pitchFamily="34" charset="0"/>
-                <a:ea typeface="Calibri" pitchFamily="34" charset="-122"/>
-                <a:cs typeface="Calibri" pitchFamily="34" charset="-120"/>
-              </a:rPr>
-              <a:t>• Reproducible: evidence/ + validate.py (12/12)</a:t>
-            </a:r>
-            <a:endParaRPr lang="en-US" sz="1350" dirty="0"/>
-          </a:p>
-        </p:txBody>
-      </p:sp>
-      <p:sp>
-        <p:nvSpPr>
-          <p:cNvPr id="11" name="Shape 9"/>
-          <p:cNvSpPr/>
-          <p:nvPr/>
-        </p:nvSpPr>
-        <p:spPr>
-          <a:xfrm>
-            <a:off x="685800" y="4526280"/>
-            <a:ext cx="5349240" cy="1783080"/>
-          </a:xfrm>
-          <a:prstGeom prst="roundRect">
-            <a:avLst>
-              <a:gd name="adj" fmla="val 5128"/>
-            </a:avLst>
-          </a:prstGeom>
-          <a:solidFill>
-            <a:srgbClr val="FBF3E2"/>
-          </a:solidFill>
-          <a:ln w="15875">
-            <a:solidFill>
-              <a:srgbClr val="B98A00"/>
-            </a:solidFill>
-            <a:prstDash val="solid"/>
-          </a:ln>
-        </p:spPr>
-      </p:sp>
-      <p:sp>
-        <p:nvSpPr>
-          <p:cNvPr id="12" name="Text 10"/>
-          <p:cNvSpPr/>
-          <p:nvPr/>
-        </p:nvSpPr>
-        <p:spPr>
-          <a:xfrm>
-            <a:off x="960120" y="4709160"/>
-            <a:ext cx="4800600" cy="320040"/>
-          </a:xfrm>
-          <a:prstGeom prst="rect">
-            <a:avLst/>
-          </a:prstGeom>
-          <a:noFill/>
-          <a:ln/>
-        </p:spPr>
-        <p:txBody>
-          <a:bodyPr wrap="square" rtlCol="0" anchor="ctr"/>
-          <a:lstStyle/>
-          <a:p>
-            <a:pPr indent="0" marL="0">
-              <a:buNone/>
-            </a:pPr>
-            <a:r>
-              <a:rPr lang="en-US" sz="1500" b="1" dirty="0">
-                <a:solidFill>
-                  <a:srgbClr val="7A5C00"/>
-                </a:solidFill>
-                <a:latin typeface="Calibri" pitchFamily="34" charset="0"/>
-                <a:ea typeface="Calibri" pitchFamily="34" charset="-122"/>
-                <a:cs typeface="Calibri" pitchFamily="34" charset="-120"/>
-              </a:rPr>
-              <a:t>WEAKNESSES (VERIFIED)</a:t>
-            </a:r>
-            <a:endParaRPr lang="en-US" sz="1500" dirty="0"/>
-          </a:p>
-        </p:txBody>
-      </p:sp>
-      <p:sp>
-        <p:nvSpPr>
-          <p:cNvPr id="13" name="Text 11"/>
-          <p:cNvSpPr/>
-          <p:nvPr/>
-        </p:nvSpPr>
-        <p:spPr>
-          <a:xfrm>
-            <a:off x="960120" y="5120640"/>
-            <a:ext cx="4846320" cy="365760"/>
-          </a:xfrm>
-          <a:prstGeom prst="rect">
-            <a:avLst/>
-          </a:prstGeom>
-          <a:noFill/>
-          <a:ln/>
-        </p:spPr>
-        <p:txBody>
-          <a:bodyPr wrap="square" lIns="0" tIns="0" rIns="0" bIns="0" rtlCol="0" anchor="ctr"/>
-          <a:lstStyle/>
-          <a:p>
-            <a:pPr indent="0" marL="0">
-              <a:buNone/>
-            </a:pPr>
-            <a:r>
-              <a:rPr lang="en-US" sz="1350" dirty="0">
-                <a:solidFill>
-                  <a:srgbClr val="1F2937"/>
-                </a:solidFill>
-                <a:latin typeface="Calibri" pitchFamily="34" charset="0"/>
-                <a:ea typeface="Calibri" pitchFamily="34" charset="-122"/>
-                <a:cs typeface="Calibri" pitchFamily="34" charset="-120"/>
-              </a:rPr>
-              <a:t>• Cost loop missing — no trusted metering/budgets (GAP-ANALYSIS G1)</a:t>
-            </a:r>
-            <a:endParaRPr lang="en-US" sz="1350" dirty="0"/>
-          </a:p>
-        </p:txBody>
-      </p:sp>
-      <p:sp>
-        <p:nvSpPr>
-          <p:cNvPr id="14" name="Text 12"/>
-          <p:cNvSpPr/>
-          <p:nvPr/>
-        </p:nvSpPr>
-        <p:spPr>
-          <a:xfrm>
-            <a:off x="960120" y="5504688"/>
-            <a:ext cx="4846320" cy="365760"/>
-          </a:xfrm>
-          <a:prstGeom prst="rect">
-            <a:avLst/>
-          </a:prstGeom>
-          <a:noFill/>
-          <a:ln/>
-        </p:spPr>
-        <p:txBody>
-          <a:bodyPr wrap="square" lIns="0" tIns="0" rIns="0" bIns="0" rtlCol="0" anchor="ctr"/>
-          <a:lstStyle/>
-          <a:p>
-            <a:pPr indent="0" marL="0">
-              <a:buNone/>
-            </a:pPr>
-            <a:r>
-              <a:rPr lang="en-US" sz="1350" dirty="0">
-                <a:solidFill>
-                  <a:srgbClr val="1F2937"/>
-                </a:solidFill>
-                <a:latin typeface="Calibri" pitchFamily="34" charset="0"/>
-                <a:ea typeface="Calibri" pitchFamily="34" charset="-122"/>
-                <a:cs typeface="Calibri" pitchFamily="34" charset="-120"/>
-              </a:rPr>
-              <a:t>• Guardrails advisory, not mechanical (R4 inversion)</a:t>
-            </a:r>
-            <a:endParaRPr lang="en-US" sz="1350" dirty="0"/>
-          </a:p>
-        </p:txBody>
-      </p:sp>
-      <p:sp>
-        <p:nvSpPr>
-          <p:cNvPr id="15" name="Text 13"/>
-          <p:cNvSpPr/>
-          <p:nvPr/>
-        </p:nvSpPr>
-        <p:spPr>
-          <a:xfrm>
-            <a:off x="960120" y="5888736"/>
-            <a:ext cx="4846320" cy="365760"/>
-          </a:xfrm>
-          <a:prstGeom prst="rect">
-            <a:avLst/>
-          </a:prstGeom>
-          <a:noFill/>
-          <a:ln/>
-        </p:spPr>
-        <p:txBody>
-          <a:bodyPr wrap="square" lIns="0" tIns="0" rIns="0" bIns="0" rtlCol="0" anchor="ctr"/>
-          <a:lstStyle/>
-          <a:p>
-            <a:pPr indent="0" marL="0">
-              <a:buNone/>
-            </a:pPr>
-            <a:r>
-              <a:rPr lang="en-US" sz="1350" dirty="0">
-                <a:solidFill>
-                  <a:srgbClr val="1F2937"/>
-                </a:solidFill>
-                <a:latin typeface="Calibri" pitchFamily="34" charset="0"/>
-                <a:ea typeface="Calibri" pitchFamily="34" charset="-122"/>
-                <a:cs typeface="Calibri" pitchFamily="34" charset="-120"/>
-              </a:rPr>
-              <a:t>• N=1 per bench cell · devops lanes offline-unmeasurable</a:t>
-            </a:r>
-            <a:endParaRPr lang="en-US" sz="1350" dirty="0"/>
-          </a:p>
-        </p:txBody>
-      </p:sp>
-      <p:sp>
-        <p:nvSpPr>
-          <p:cNvPr id="16" name="Shape 14"/>
-          <p:cNvSpPr/>
-          <p:nvPr/>
-        </p:nvSpPr>
-        <p:spPr>
-          <a:xfrm>
-            <a:off x="6263640" y="2103120"/>
-            <a:ext cx="5257800" cy="4206240"/>
-          </a:xfrm>
-          <a:prstGeom prst="roundRect">
-            <a:avLst>
-              <a:gd name="adj" fmla="val 2174"/>
-            </a:avLst>
-          </a:prstGeom>
-          <a:solidFill>
-            <a:srgbClr val="EAF0FB"/>
-          </a:solidFill>
-          <a:ln w="15875">
-            <a:solidFill>
-              <a:srgbClr val="5A6B9E"/>
-            </a:solidFill>
-            <a:prstDash val="solid"/>
-          </a:ln>
-        </p:spPr>
-      </p:sp>
-      <p:sp>
-        <p:nvSpPr>
-          <p:cNvPr id="17" name="Text 15"/>
-          <p:cNvSpPr/>
-          <p:nvPr/>
-        </p:nvSpPr>
-        <p:spPr>
-          <a:xfrm>
-            <a:off x="6537960" y="2286000"/>
-            <a:ext cx="4709160" cy="320040"/>
-          </a:xfrm>
-          <a:prstGeom prst="rect">
-            <a:avLst/>
-          </a:prstGeom>
-          <a:noFill/>
-          <a:ln/>
-        </p:spPr>
-        <p:txBody>
-          <a:bodyPr wrap="square" rtlCol="0" anchor="ctr"/>
-          <a:lstStyle/>
-          <a:p>
-            <a:pPr indent="0" marL="0">
-              <a:buNone/>
-            </a:pPr>
-            <a:r>
-              <a:rPr lang="en-US" sz="1500" b="1" dirty="0">
-                <a:solidFill>
-                  <a:srgbClr val="1E2761"/>
-                </a:solidFill>
-                <a:latin typeface="Calibri" pitchFamily="34" charset="0"/>
-                <a:ea typeface="Calibri" pitchFamily="34" charset="-122"/>
-                <a:cs typeface="Calibri" pitchFamily="34" charset="-120"/>
-              </a:rPr>
-              <a:t>DELIBERATELY NOT INCLUDED</a:t>
-            </a:r>
-            <a:endParaRPr lang="en-US" sz="1500" dirty="0"/>
-          </a:p>
-        </p:txBody>
-      </p:sp>
-      <p:sp>
-        <p:nvSpPr>
-          <p:cNvPr id="18" name="Text 16"/>
-          <p:cNvSpPr/>
-          <p:nvPr/>
-        </p:nvSpPr>
-        <p:spPr>
-          <a:xfrm>
-            <a:off x="6537960" y="2697480"/>
-            <a:ext cx="4709160" cy="365760"/>
-          </a:xfrm>
-          <a:prstGeom prst="rect">
-            <a:avLst/>
-          </a:prstGeom>
-          <a:noFill/>
-          <a:ln/>
-        </p:spPr>
-        <p:txBody>
-          <a:bodyPr wrap="square" lIns="0" tIns="0" rIns="0" bIns="0" rtlCol="0" anchor="ctr"/>
-          <a:lstStyle/>
-          <a:p>
-            <a:pPr indent="0" marL="0">
-              <a:buNone/>
-            </a:pPr>
-            <a:r>
-              <a:rPr lang="en-US" sz="1350" dirty="0">
-                <a:solidFill>
-                  <a:srgbClr val="1F2937"/>
-                </a:solidFill>
-                <a:latin typeface="Calibri" pitchFamily="34" charset="0"/>
-                <a:ea typeface="Calibri" pitchFamily="34" charset="-122"/>
-                <a:cs typeface="Calibri" pitchFamily="34" charset="-120"/>
-              </a:rPr>
-              <a:t>• No hooks / auto-runtime / silent telemetry — v1 lesson</a:t>
-            </a:r>
-            <a:endParaRPr lang="en-US" sz="1350" dirty="0"/>
-          </a:p>
-        </p:txBody>
-      </p:sp>
-      <p:sp>
-        <p:nvSpPr>
-          <p:cNvPr id="19" name="Text 17"/>
-          <p:cNvSpPr/>
-          <p:nvPr/>
-        </p:nvSpPr>
-        <p:spPr>
-          <a:xfrm>
-            <a:off x="6537960" y="3099816"/>
-            <a:ext cx="4709160" cy="365760"/>
-          </a:xfrm>
-          <a:prstGeom prst="rect">
-            <a:avLst/>
-          </a:prstGeom>
-          <a:noFill/>
-          <a:ln/>
-        </p:spPr>
-        <p:txBody>
-          <a:bodyPr wrap="square" lIns="0" tIns="0" rIns="0" bIns="0" rtlCol="0" anchor="ctr"/>
-          <a:lstStyle/>
-          <a:p>
-            <a:pPr indent="0" marL="0">
-              <a:buNone/>
-            </a:pPr>
-            <a:r>
-              <a:rPr lang="en-US" sz="1350" dirty="0">
-                <a:solidFill>
-                  <a:srgbClr val="1F2937"/>
-                </a:solidFill>
-                <a:latin typeface="Calibri" pitchFamily="34" charset="0"/>
-                <a:ea typeface="Calibri" pitchFamily="34" charset="-122"/>
-                <a:cs typeface="Calibri" pitchFamily="34" charset="-120"/>
-              </a:rPr>
-              <a:t>• No auto-approve — every gate is a human decision</a:t>
-            </a:r>
-            <a:endParaRPr lang="en-US" sz="1350" dirty="0"/>
-          </a:p>
-        </p:txBody>
-      </p:sp>
-      <p:sp>
-        <p:nvSpPr>
-          <p:cNvPr id="20" name="Text 18"/>
-          <p:cNvSpPr/>
-          <p:nvPr/>
-        </p:nvSpPr>
-        <p:spPr>
-          <a:xfrm>
-            <a:off x="6537960" y="3502152"/>
-            <a:ext cx="4709160" cy="365760"/>
-          </a:xfrm>
-          <a:prstGeom prst="rect">
-            <a:avLst/>
-          </a:prstGeom>
-          <a:noFill/>
-          <a:ln/>
-        </p:spPr>
-        <p:txBody>
-          <a:bodyPr wrap="square" lIns="0" tIns="0" rIns="0" bIns="0" rtlCol="0" anchor="ctr"/>
-          <a:lstStyle/>
-          <a:p>
-            <a:pPr indent="0" marL="0">
-              <a:buNone/>
-            </a:pPr>
-            <a:r>
-              <a:rPr lang="en-US" sz="1350" dirty="0">
-                <a:solidFill>
-                  <a:srgbClr val="1F2937"/>
-                </a:solidFill>
-                <a:latin typeface="Calibri" pitchFamily="34" charset="0"/>
-                <a:ea typeface="Calibri" pitchFamily="34" charset="-122"/>
-                <a:cs typeface="Calibri" pitchFamily="34" charset="-120"/>
-              </a:rPr>
-              <a:t>• No marketing agent lanes — removed v2.6.0 (unmeasured)</a:t>
-            </a:r>
-            <a:endParaRPr lang="en-US" sz="1350" dirty="0"/>
-          </a:p>
-        </p:txBody>
-      </p:sp>
-      <p:sp>
-        <p:nvSpPr>
-          <p:cNvPr id="21" name="Text 19"/>
-          <p:cNvSpPr/>
-          <p:nvPr/>
-        </p:nvSpPr>
-        <p:spPr>
-          <a:xfrm>
-            <a:off x="6537960" y="3904488"/>
-            <a:ext cx="4709160" cy="365760"/>
-          </a:xfrm>
-          <a:prstGeom prst="rect">
-            <a:avLst/>
-          </a:prstGeom>
-          <a:noFill/>
-          <a:ln/>
-        </p:spPr>
-        <p:txBody>
-          <a:bodyPr wrap="square" lIns="0" tIns="0" rIns="0" bIns="0" rtlCol="0" anchor="ctr"/>
-          <a:lstStyle/>
-          <a:p>
-            <a:pPr indent="0" marL="0">
-              <a:buNone/>
-            </a:pPr>
-            <a:r>
-              <a:rPr lang="en-US" sz="1350" dirty="0">
-                <a:solidFill>
-                  <a:srgbClr val="1F2937"/>
-                </a:solidFill>
-                <a:latin typeface="Calibri" pitchFamily="34" charset="0"/>
-                <a:ea typeface="Calibri" pitchFamily="34" charset="-122"/>
-                <a:cs typeface="Calibri" pitchFamily="34" charset="-120"/>
-              </a:rPr>
-              <a:t>• No permissions grants — Bash(*) killed v1</a:t>
-            </a:r>
-            <a:endParaRPr lang="en-US" sz="1350" dirty="0"/>
-          </a:p>
-        </p:txBody>
-      </p:sp>
-      <p:sp>
-        <p:nvSpPr>
-          <p:cNvPr id="22" name="Text 20"/>
-          <p:cNvSpPr/>
-          <p:nvPr/>
-        </p:nvSpPr>
-        <p:spPr>
-          <a:xfrm>
-            <a:off x="6537960" y="4306824"/>
-            <a:ext cx="4709160" cy="365760"/>
-          </a:xfrm>
-          <a:prstGeom prst="rect">
-            <a:avLst/>
-          </a:prstGeom>
-          <a:noFill/>
-          <a:ln/>
-        </p:spPr>
-        <p:txBody>
-          <a:bodyPr wrap="square" lIns="0" tIns="0" rIns="0" bIns="0" rtlCol="0" anchor="ctr"/>
-          <a:lstStyle/>
-          <a:p>
-            <a:pPr indent="0" marL="0">
-              <a:buNone/>
-            </a:pPr>
-            <a:r>
-              <a:rPr lang="en-US" sz="1350" dirty="0">
-                <a:solidFill>
-                  <a:srgbClr val="1F2937"/>
-                </a:solidFill>
-                <a:latin typeface="Calibri" pitchFamily="34" charset="0"/>
-                <a:ea typeface="Calibri" pitchFamily="34" charset="-122"/>
-                <a:cs typeface="Calibri" pitchFamily="34" charset="-120"/>
-              </a:rPr>
-              <a:t>• No global memory — repo artifacts ARE the memory</a:t>
-            </a:r>
-            <a:endParaRPr lang="en-US" sz="1350" dirty="0"/>
-          </a:p>
-        </p:txBody>
-      </p:sp>
-      <p:sp>
-        <p:nvSpPr>
-          <p:cNvPr id="23" name="Text 21"/>
-          <p:cNvSpPr/>
-          <p:nvPr/>
-        </p:nvSpPr>
-        <p:spPr>
-          <a:xfrm>
-            <a:off x="6537960" y="5806440"/>
-            <a:ext cx="4709160" cy="457200"/>
-          </a:xfrm>
-          <a:prstGeom prst="rect">
-            <a:avLst/>
-          </a:prstGeom>
-          <a:noFill/>
-          <a:ln/>
-        </p:spPr>
-        <p:txBody>
-          <a:bodyPr wrap="square" rtlCol="0" anchor="ctr"/>
-          <a:lstStyle/>
-          <a:p>
-            <a:pPr indent="0" marL="0">
-              <a:buNone/>
-            </a:pPr>
-            <a:r>
-              <a:rPr lang="en-US" sz="1350" b="1" dirty="0">
-                <a:solidFill>
-                  <a:srgbClr val="1E2761"/>
-                </a:solidFill>
-                <a:latin typeface="Calibri" pitchFamily="34" charset="0"/>
-                <a:ea typeface="Calibri" pitchFamily="34" charset="-122"/>
-                <a:cs typeface="Calibri" pitchFamily="34" charset="-120"/>
-              </a:rPr>
-              <a:t>FOCUS LIST: trusted cost loop · CI plan-vs-PR enforcement · N≥3 headlines · devops staging smoke · second-model matrix.</a:t>
-            </a:r>
-            <a:endParaRPr lang="en-US" sz="1350" dirty="0"/>
-          </a:p>
-        </p:txBody>
-      </p:sp>
-    </p:spTree>
-  </p:cSld>
-  <p:clrMapOvr>
-    <a:masterClrMapping/>
-  </p:clrMapOvr>
-</p:sld>
-</file>
-
-<file path=ppt/slides/slide9.xml><?xml version="1.0" encoding="utf-8"?>
-<p:sld xmlns:a="http://schemas.openxmlformats.org/drawingml/2006/main" xmlns:r="http://schemas.openxmlformats.org/officeDocument/2006/relationships" xmlns:p="http://schemas.openxmlformats.org/presentationml/2006/main">
-  <p:cSld name="Slide 9">
-    <p:bg>
-      <p:bgPr>
-        <a:solidFill>
-          <a:srgbClr val="1E2761"/>
-        </a:solidFill>
-      </p:bgPr>
-    </p:bg>
-    <p:spTree>
-      <p:nvGrpSpPr>
-        <p:cNvPr id="1" name=""/>
-        <p:cNvGrpSpPr/>
-        <p:nvPr/>
-      </p:nvGrpSpPr>
-      <p:grpSpPr>
-        <a:xfrm>
-          <a:off x="0" y="0"/>
-          <a:ext cx="0" cy="0"/>
-          <a:chOff x="0" y="0"/>
-          <a:chExt cx="0" cy="0"/>
-        </a:xfrm>
-      </p:grpSpPr>
-      <p:sp>
-        <p:nvSpPr>
-          <p:cNvPr id="2" name="Shape 0"/>
-          <p:cNvSpPr/>
-          <p:nvPr/>
-        </p:nvSpPr>
-        <p:spPr>
-          <a:xfrm>
-            <a:off x="-2011680" y="4023360"/>
-            <a:ext cx="5120640" cy="5120640"/>
-          </a:xfrm>
-          <a:prstGeom prst="ellipse">
-            <a:avLst/>
-          </a:prstGeom>
-          <a:solidFill>
-            <a:srgbClr val="27346E"/>
-          </a:solidFill>
-          <a:ln w="12700">
-            <a:solidFill>
-              <a:srgbClr val="333333"/>
-            </a:solidFill>
-            <a:prstDash val="solid"/>
-          </a:ln>
-        </p:spPr>
-      </p:sp>
-      <p:sp>
-        <p:nvSpPr>
-          <p:cNvPr id="3" name="Text 1"/>
-          <p:cNvSpPr/>
-          <p:nvPr/>
-        </p:nvSpPr>
-        <p:spPr>
-          <a:xfrm>
-            <a:off x="731520" y="777240"/>
-            <a:ext cx="10698480" cy="365760"/>
-          </a:xfrm>
-          <a:prstGeom prst="rect">
-            <a:avLst/>
-          </a:prstGeom>
-          <a:noFill/>
-          <a:ln/>
-        </p:spPr>
-        <p:txBody>
-          <a:bodyPr wrap="square" rtlCol="0" anchor="ctr"/>
-          <a:lstStyle/>
-          <a:p>
-            <a:pPr indent="0" marL="0">
-              <a:buNone/>
-            </a:pPr>
-            <a:r>
-              <a:rPr lang="en-US" sz="1400" b="1" spc="300" kern="0" dirty="0">
-                <a:solidFill>
-                  <a:srgbClr val="F4B400"/>
-                </a:solidFill>
-                <a:latin typeface="Calibri" pitchFamily="34" charset="0"/>
-                <a:ea typeface="Calibri" pitchFamily="34" charset="-122"/>
-                <a:cs typeface="Calibri" pitchFamily="34" charset="-120"/>
-              </a:rPr>
-              <a:t>WHAT WE KNOW</a:t>
-            </a:r>
-            <a:endParaRPr lang="en-US" sz="1400" dirty="0"/>
-          </a:p>
-        </p:txBody>
-      </p:sp>
-      <p:sp>
-        <p:nvSpPr>
-          <p:cNvPr id="4" name="Text 2"/>
-          <p:cNvSpPr/>
-          <p:nvPr/>
-        </p:nvSpPr>
-        <p:spPr>
-          <a:xfrm>
-            <a:off x="731520" y="1188720"/>
-            <a:ext cx="10698480" cy="777240"/>
-          </a:xfrm>
-          <a:prstGeom prst="rect">
-            <a:avLst/>
-          </a:prstGeom>
-          <a:noFill/>
-          <a:ln/>
-        </p:spPr>
-        <p:txBody>
-          <a:bodyPr wrap="square" rtlCol="0" anchor="ctr"/>
-          <a:lstStyle/>
-          <a:p>
-            <a:pPr indent="0" marL="0">
-              <a:buNone/>
-            </a:pPr>
-            <a:r>
-              <a:rPr lang="en-US" sz="4000" b="1" dirty="0">
-                <a:solidFill>
-                  <a:srgbClr val="FFFFFF"/>
-                </a:solidFill>
-                <a:latin typeface="Cambria" pitchFamily="34" charset="0"/>
-                <a:ea typeface="Cambria" pitchFamily="34" charset="-122"/>
-                <a:cs typeface="Cambria" pitchFamily="34" charset="-120"/>
-              </a:rPr>
-              <a:t>Built from experience. Graded by evidence.</a:t>
-            </a:r>
-            <a:endParaRPr lang="en-US" sz="4000" dirty="0"/>
-          </a:p>
-        </p:txBody>
-      </p:sp>
-      <p:sp>
-        <p:nvSpPr>
-          <p:cNvPr id="5" name="Text 3"/>
-          <p:cNvSpPr/>
-          <p:nvPr/>
-        </p:nvSpPr>
-        <p:spPr>
-          <a:xfrm>
-            <a:off x="731520" y="2377440"/>
-            <a:ext cx="10698480" cy="2011680"/>
-          </a:xfrm>
-          <a:prstGeom prst="rect">
-            <a:avLst/>
-          </a:prstGeom>
-          <a:noFill/>
-          <a:ln/>
-        </p:spPr>
-        <p:txBody>
-          <a:bodyPr wrap="square" rtlCol="0" anchor="ctr"/>
-          <a:lstStyle/>
-          <a:p>
-            <a:pPr marL="342900" indent="-342900">
-              <a:spcAft>
-                <a:spcPts val="1000"/>
-              </a:spcAft>
-              <a:buSzPct val="100000"/>
-              <a:buChar char="•"/>
-            </a:pPr>
-            <a:r>
-              <a:rPr lang="en-US" sz="2000" dirty="0">
-                <a:solidFill>
-                  <a:srgbClr val="EAF0FB"/>
-                </a:solidFill>
-                <a:latin typeface="Calibri" pitchFamily="34" charset="0"/>
-                <a:ea typeface="Calibri" pitchFamily="34" charset="-122"/>
-                <a:cs typeface="Calibri" pitchFamily="34" charset="-120"/>
-              </a:rPr>
-              <a:t>The framework's value concentrates on hard engineering — measured, reproducible, labeled.</a:t>
-            </a:r>
-            <a:endParaRPr lang="en-US" sz="2000" dirty="0"/>
-          </a:p>
-          <a:p>
-            <a:pPr marL="342900" indent="-342900">
-              <a:spcAft>
-                <a:spcPts val="1000"/>
-              </a:spcAft>
-              <a:buSzPct val="100000"/>
-              <a:buChar char="•"/>
-            </a:pPr>
-            <a:r>
-              <a:rPr lang="en-US" sz="2000" dirty="0">
-                <a:solidFill>
-                  <a:srgbClr val="EAF0FB"/>
-                </a:solidFill>
-                <a:latin typeface="Calibri" pitchFamily="34" charset="0"/>
-                <a:ea typeface="Calibri" pitchFamily="34" charset="-122"/>
-                <a:cs typeface="Calibri" pitchFamily="34" charset="-120"/>
-              </a:rPr>
-              <a:t>Gaps are shown, not hidden (cost metering, advisory guardrails, N=1 cells).</a:t>
-            </a:r>
-            <a:endParaRPr lang="en-US" sz="2000" dirty="0"/>
-          </a:p>
-          <a:p>
-            <a:pPr marL="342900" indent="-342900">
-              <a:spcAft>
-                <a:spcPts val="1000"/>
-              </a:spcAft>
-              <a:buSzPct val="100000"/>
-              <a:buChar char="•"/>
-            </a:pPr>
-            <a:r>
-              <a:rPr lang="en-US" sz="2000" dirty="0">
-                <a:solidFill>
-                  <a:srgbClr val="EAF0FB"/>
-                </a:solidFill>
-                <a:latin typeface="Calibri" pitchFamily="34" charset="0"/>
-                <a:ea typeface="Calibri" pitchFamily="34" charset="-122"/>
-                <a:cs typeface="Calibri" pitchFamily="34" charset="-120"/>
-              </a:rPr>
-              <a:t>Fork first: experiments live on the fork; the official ex-company repo stays read-only.</a:t>
-            </a:r>
-            <a:endParaRPr lang="en-US" sz="2000" dirty="0"/>
-          </a:p>
-        </p:txBody>
-      </p:sp>
-      <p:sp>
-        <p:nvSpPr>
-          <p:cNvPr id="6" name="Text 4"/>
-          <p:cNvSpPr/>
-          <p:nvPr/>
-        </p:nvSpPr>
-        <p:spPr>
-          <a:xfrm>
-            <a:off x="731520" y="5029200"/>
-            <a:ext cx="10698480" cy="457200"/>
-          </a:xfrm>
-          <a:prstGeom prst="rect">
-            <a:avLst/>
-          </a:prstGeom>
-          <a:noFill/>
-          <a:ln/>
-        </p:spPr>
-        <p:txBody>
-          <a:bodyPr wrap="square" rtlCol="0" anchor="ctr"/>
-          <a:lstStyle/>
-          <a:p>
-            <a:pPr indent="0" marL="0">
-              <a:buNone/>
-            </a:pPr>
-            <a:r>
-              <a:rPr lang="en-US" sz="1800" b="1" dirty="0">
-                <a:solidFill>
-                  <a:srgbClr val="F4B400"/>
-                </a:solidFill>
-                <a:latin typeface="Calibri" pitchFamily="34" charset="0"/>
-                <a:ea typeface="Calibri" pitchFamily="34" charset="-122"/>
-                <a:cs typeface="Calibri" pitchFamily="34" charset="-120"/>
-              </a:rPr>
-              <a:t>Everything ships in the repo: github.com/trac41799/claude-code-agentic-sdlc (evidence/ · docs/demo/live-demo-guide.md · docs/benchmarks/BENCHMARK-SUMMARY.md)</a:t>
-            </a:r>
-            <a:endParaRPr lang="en-US" sz="1800" dirty="0"/>
-          </a:p>
-        </p:txBody>
-      </p:sp>
-      <p:sp>
-        <p:nvSpPr>
-          <p:cNvPr id="7" name="Text 5"/>
-          <p:cNvSpPr/>
-          <p:nvPr/>
-        </p:nvSpPr>
-        <p:spPr>
-          <a:xfrm>
-            <a:off x="731520" y="5760720"/>
-            <a:ext cx="10698480" cy="457200"/>
-          </a:xfrm>
-          <a:prstGeom prst="rect">
-            <a:avLst/>
-          </a:prstGeom>
-          <a:noFill/>
-          <a:ln/>
-        </p:spPr>
-        <p:txBody>
-          <a:bodyPr wrap="square" rtlCol="0" anchor="ctr"/>
-          <a:lstStyle/>
-          <a:p>
-            <a:pPr indent="0" marL="0">
-              <a:buNone/>
-            </a:pPr>
-            <a:r>
-              <a:rPr lang="en-US" sz="2200" b="1" i="1" dirty="0">
-                <a:solidFill>
-                  <a:srgbClr val="FFFFFF"/>
-                </a:solidFill>
-                <a:latin typeface="Cambria" pitchFamily="34" charset="0"/>
-                <a:ea typeface="Cambria" pitchFamily="34" charset="-122"/>
-                <a:cs typeface="Cambria" pitchFamily="34" charset="-120"/>
-              </a:rPr>
-              <a:t>Not a solved discipline — a repeatable, honest one.</a:t>
-            </a:r>
-            <a:endParaRPr lang="en-US" sz="2200" dirty="0"/>
           </a:p>
         </p:txBody>
       </p:sp>
@@ -7964,4 +9696,299 @@
     </a:ext>
   </a:extLst>
 </a:theme>
+</file>
+
+<file path=ppt/theme/theme2.xml><?xml version="1.0" encoding="utf-8"?>
+<a:theme xmlns:a="http://schemas.openxmlformats.org/drawingml/2006/main" name="Office Theme">
+  <a:themeElements>
+    <a:clrScheme name="Office">
+      <a:dk1>
+        <a:sysClr val="windowText" lastClr="000000"/>
+      </a:dk1>
+      <a:lt1>
+        <a:sysClr val="window" lastClr="FFFFFF"/>
+      </a:lt1>
+      <a:dk2>
+        <a:srgbClr val="44546A"/>
+      </a:dk2>
+      <a:lt2>
+        <a:srgbClr val="E7E6E6"/>
+      </a:lt2>
+      <a:accent1>
+        <a:srgbClr val="4472C4"/>
+      </a:accent1>
+      <a:accent2>
+        <a:srgbClr val="ED7D31"/>
+      </a:accent2>
+      <a:accent3>
+        <a:srgbClr val="A5A5A5"/>
+      </a:accent3>
+      <a:accent4>
+        <a:srgbClr val="FFC000"/>
+      </a:accent4>
+      <a:accent5>
+        <a:srgbClr val="5B9BD5"/>
+      </a:accent5>
+      <a:accent6>
+        <a:srgbClr val="70AD47"/>
+      </a:accent6>
+      <a:hlink>
+        <a:srgbClr val="0563C1"/>
+      </a:hlink>
+      <a:folHlink>
+        <a:srgbClr val="954F72"/>
+      </a:folHlink>
+    </a:clrScheme>
+    <a:fontScheme name="Office">
+      <a:majorFont>
+        <a:latin typeface="Calibri Light" panose="020F0302020204030204"/>
+        <a:ea typeface=""/>
+        <a:cs typeface=""/>
+        <a:font script="Jpan" typeface="游ゴシック Light"/>
+        <a:font script="Hang" typeface="맑은 고딕"/>
+        <a:font script="Hans" typeface="等线 Light"/>
+        <a:font script="Hant" typeface="新細明體"/>
+        <a:font script="Arab" typeface="Times New Roman"/>
+        <a:font script="Hebr" typeface="Times New Roman"/>
+        <a:font script="Thai" typeface="Angsana New"/>
+        <a:font script="Ethi" typeface="Nyala"/>
+        <a:font script="Beng" typeface="Vrinda"/>
+        <a:font script="Gujr" typeface="Shruti"/>
+        <a:font script="Khmr" typeface="MoolBoran"/>
+        <a:font script="Knda" typeface="Tunga"/>
+        <a:font script="Guru" typeface="Raavi"/>
+        <a:font script="Cans" typeface="Euphemia"/>
+        <a:font script="Cher" typeface="Plantagenet Cherokee"/>
+        <a:font script="Yiii" typeface="Microsoft Yi Baiti"/>
+        <a:font script="Tibt" typeface="Microsoft Himalaya"/>
+        <a:font script="Thaa" typeface="MV Boli"/>
+        <a:font script="Deva" typeface="Mangal"/>
+        <a:font script="Telu" typeface="Gautami"/>
+        <a:font script="Taml" typeface="Latha"/>
+        <a:font script="Syrc" typeface="Estrangelo Edessa"/>
+        <a:font script="Orya" typeface="Kalinga"/>
+        <a:font script="Mlym" typeface="Kartika"/>
+        <a:font script="Laoo" typeface="DokChampa"/>
+        <a:font script="Sinh" typeface="Iskoola Pota"/>
+        <a:font script="Mong" typeface="Mongolian Baiti"/>
+        <a:font script="Viet" typeface="Times New Roman"/>
+        <a:font script="Uigh" typeface="Microsoft Uighur"/>
+        <a:font script="Geor" typeface="Sylfaen"/>
+        <a:font script="Armn" typeface="Arial"/>
+        <a:font script="Bugi" typeface="Leelawadee UI"/>
+        <a:font script="Bopo" typeface="Microsoft JhengHei"/>
+        <a:font script="Java" typeface="Javanese Text"/>
+        <a:font script="Lisu" typeface="Segoe UI"/>
+        <a:font script="Mymr" typeface="Myanmar Text"/>
+        <a:font script="Nkoo" typeface="Ebrima"/>
+        <a:font script="Olck" typeface="Nirmala UI"/>
+        <a:font script="Osma" typeface="Ebrima"/>
+        <a:font script="Phag" typeface="Phagspa"/>
+        <a:font script="Syrn" typeface="Estrangelo Edessa"/>
+        <a:font script="Syrj" typeface="Estrangelo Edessa"/>
+        <a:font script="Syre" typeface="Estrangelo Edessa"/>
+        <a:font script="Sora" typeface="Nirmala UI"/>
+        <a:font script="Tale" typeface="Microsoft Tai Le"/>
+        <a:font script="Talu" typeface="Microsoft New Tai Lue"/>
+        <a:font script="Tfng" typeface="Ebrima"/>
+      </a:majorFont>
+      <a:minorFont>
+        <a:latin typeface="Calibri" panose="020F0502020204030204"/>
+        <a:ea typeface=""/>
+        <a:cs typeface=""/>
+        <a:font script="Jpan" typeface="游ゴシック"/>
+        <a:font script="Hang" typeface="맑은 고딕"/>
+        <a:font script="Hans" typeface="等线"/>
+        <a:font script="Hant" typeface="新細明體"/>
+        <a:font script="Arab" typeface="Arial"/>
+        <a:font script="Hebr" typeface="Arial"/>
+        <a:font script="Thai" typeface="Cordia New"/>
+        <a:font script="Ethi" typeface="Nyala"/>
+        <a:font script="Beng" typeface="Vrinda"/>
+        <a:font script="Gujr" typeface="Shruti"/>
+        <a:font script="Khmr" typeface="DaunPenh"/>
+        <a:font script="Knda" typeface="Tunga"/>
+        <a:font script="Guru" typeface="Raavi"/>
+        <a:font script="Cans" typeface="Euphemia"/>
+        <a:font script="Cher" typeface="Plantagenet Cherokee"/>
+        <a:font script="Yiii" typeface="Microsoft Yi Baiti"/>
+        <a:font script="Tibt" typeface="Microsoft Himalaya"/>
+        <a:font script="Thaa" typeface="MV Boli"/>
+        <a:font script="Deva" typeface="Mangal"/>
+        <a:font script="Telu" typeface="Gautami"/>
+        <a:font script="Taml" typeface="Latha"/>
+        <a:font script="Syrc" typeface="Estrangelo Edessa"/>
+        <a:font script="Orya" typeface="Kalinga"/>
+        <a:font script="Mlym" typeface="Kartika"/>
+        <a:font script="Laoo" typeface="DokChampa"/>
+        <a:font script="Sinh" typeface="Iskoola Pota"/>
+        <a:font script="Mong" typeface="Mongolian Baiti"/>
+        <a:font script="Viet" typeface="Arial"/>
+        <a:font script="Uigh" typeface="Microsoft Uighur"/>
+        <a:font script="Geor" typeface="Sylfaen"/>
+        <a:font script="Armn" typeface="Arial"/>
+        <a:font script="Bugi" typeface="Leelawadee UI"/>
+        <a:font script="Bopo" typeface="Microsoft JhengHei"/>
+        <a:font script="Java" typeface="Javanese Text"/>
+        <a:font script="Lisu" typeface="Segoe UI"/>
+        <a:font script="Mymr" typeface="Myanmar Text"/>
+        <a:font script="Nkoo" typeface="Ebrima"/>
+        <a:font script="Olck" typeface="Nirmala UI"/>
+        <a:font script="Osma" typeface="Ebrima"/>
+        <a:font script="Phag" typeface="Phagspa"/>
+        <a:font script="Syrn" typeface="Estrangelo Edessa"/>
+        <a:font script="Syrj" typeface="Estrangelo Edessa"/>
+        <a:font script="Syre" typeface="Estrangelo Edessa"/>
+        <a:font script="Sora" typeface="Nirmala UI"/>
+        <a:font script="Tale" typeface="Microsoft Tai Le"/>
+        <a:font script="Talu" typeface="Microsoft New Tai Lue"/>
+        <a:font script="Tfng" typeface="Ebrima"/>
+      </a:minorFont>
+    </a:fontScheme>
+    <a:fmtScheme name="Office">
+      <a:fillStyleLst>
+        <a:solidFill>
+          <a:schemeClr val="phClr"/>
+        </a:solidFill>
+        <a:gradFill rotWithShape="1">
+          <a:gsLst>
+            <a:gs pos="0">
+              <a:schemeClr val="phClr">
+                <a:lumMod val="110000"/>
+                <a:satMod val="105000"/>
+                <a:tint val="67000"/>
+              </a:schemeClr>
+            </a:gs>
+            <a:gs pos="50000">
+              <a:schemeClr val="phClr">
+                <a:lumMod val="105000"/>
+                <a:satMod val="103000"/>
+                <a:tint val="73000"/>
+              </a:schemeClr>
+            </a:gs>
+            <a:gs pos="100000">
+              <a:schemeClr val="phClr">
+                <a:lumMod val="105000"/>
+                <a:satMod val="109000"/>
+                <a:tint val="81000"/>
+              </a:schemeClr>
+            </a:gs>
+          </a:gsLst>
+          <a:lin ang="5400000" scaled="0"/>
+        </a:gradFill>
+        <a:gradFill rotWithShape="1">
+          <a:gsLst>
+            <a:gs pos="0">
+              <a:schemeClr val="phClr">
+                <a:satMod val="103000"/>
+                <a:lumMod val="102000"/>
+                <a:tint val="94000"/>
+              </a:schemeClr>
+            </a:gs>
+            <a:gs pos="50000">
+              <a:schemeClr val="phClr">
+                <a:satMod val="110000"/>
+                <a:lumMod val="100000"/>
+                <a:shade val="100000"/>
+              </a:schemeClr>
+            </a:gs>
+            <a:gs pos="100000">
+              <a:schemeClr val="phClr">
+                <a:lumMod val="99000"/>
+                <a:satMod val="120000"/>
+                <a:shade val="78000"/>
+              </a:schemeClr>
+            </a:gs>
+          </a:gsLst>
+          <a:lin ang="5400000" scaled="0"/>
+        </a:gradFill>
+      </a:fillStyleLst>
+      <a:lnStyleLst>
+        <a:ln w="6350" cap="flat" cmpd="sng" algn="ctr">
+          <a:solidFill>
+            <a:schemeClr val="phClr"/>
+          </a:solidFill>
+          <a:prstDash val="solid"/>
+          <a:miter lim="800000"/>
+        </a:ln>
+        <a:ln w="12700" cap="flat" cmpd="sng" algn="ctr">
+          <a:solidFill>
+            <a:schemeClr val="phClr"/>
+          </a:solidFill>
+          <a:prstDash val="solid"/>
+          <a:miter lim="800000"/>
+        </a:ln>
+        <a:ln w="19050" cap="flat" cmpd="sng" algn="ctr">
+          <a:solidFill>
+            <a:schemeClr val="phClr"/>
+          </a:solidFill>
+          <a:prstDash val="solid"/>
+          <a:miter lim="800000"/>
+        </a:ln>
+      </a:lnStyleLst>
+      <a:effectStyleLst>
+        <a:effectStyle>
+          <a:effectLst/>
+        </a:effectStyle>
+        <a:effectStyle>
+          <a:effectLst/>
+        </a:effectStyle>
+        <a:effectStyle>
+          <a:effectLst>
+            <a:outerShdw blurRad="57150" dist="19050" dir="5400000" algn="ctr" rotWithShape="0">
+              <a:srgbClr val="000000">
+                <a:alpha val="63000"/>
+              </a:srgbClr>
+            </a:outerShdw>
+          </a:effectLst>
+        </a:effectStyle>
+      </a:effectStyleLst>
+      <a:bgFillStyleLst>
+        <a:solidFill>
+          <a:schemeClr val="phClr"/>
+        </a:solidFill>
+        <a:solidFill>
+          <a:schemeClr val="phClr">
+            <a:tint val="95000"/>
+            <a:satMod val="170000"/>
+          </a:schemeClr>
+        </a:solidFill>
+        <a:gradFill rotWithShape="1">
+          <a:gsLst>
+            <a:gs pos="0">
+              <a:schemeClr val="phClr">
+                <a:tint val="93000"/>
+                <a:satMod val="150000"/>
+                <a:shade val="98000"/>
+                <a:lumMod val="102000"/>
+              </a:schemeClr>
+            </a:gs>
+            <a:gs pos="50000">
+              <a:schemeClr val="phClr">
+                <a:tint val="98000"/>
+                <a:satMod val="130000"/>
+                <a:shade val="90000"/>
+                <a:lumMod val="103000"/>
+              </a:schemeClr>
+            </a:gs>
+            <a:gs pos="100000">
+              <a:schemeClr val="phClr">
+                <a:shade val="63000"/>
+                <a:satMod val="120000"/>
+              </a:schemeClr>
+            </a:gs>
+          </a:gsLst>
+          <a:lin ang="5400000" scaled="0"/>
+        </a:gradFill>
+      </a:bgFillStyleLst>
+    </a:fmtScheme>
+  </a:themeElements>
+  <a:objectDefaults/>
+  <a:extraClrSchemeLst/>
+  <a:extLst>
+    <a:ext uri="{05A4C25C-085E-4340-85A3-A5531E510DB2}">
+      <thm15:themeFamily xmlns:thm15="http://schemas.microsoft.com/office/thememl/2012/main" name="Office Theme" id="{62F939B6-93AF-4DB8-9C6B-D6C7DFDC589F}" vid="{4A3C46E8-61CC-4603-A589-7422A47A8E4A}"/>
+    </a:ext>
+  </a:extLst>
+</a:theme>
 </file>
--- a/docs/slides/Agentic-SDLC-Tech-Audience-COMPACT.pptx
+++ b/docs/slides/Agentic-SDLC-Tech-Audience-COMPACT.pptx
@@ -14,9 +14,10 @@
     <p:sldId id="262" r:id="rId8"/>
     <p:sldId id="263" r:id="rId9"/>
     <p:sldId id="264" r:id="rId10"/>
+    <p:sldId id="265" r:id="rId11"/>
   </p:sldIdLst>
   <p:notesMasterIdLst>
-    <p:notesMasterId r:id="rId11"/>
+    <p:notesMasterId r:id="rId12"/>
   </p:notesMasterIdLst>
   <p:sldSz cx="12192000" cy="6858000"/>
   <p:notesSz cx="6858000" cy="12192000"/>
@@ -552,6 +553,94 @@
 </p:notes>
 </file>
 
+<file path=ppt/notesSlides/notesSlide10.xml><?xml version="1.0" encoding="utf-8"?>
+<p:notes xmlns:a="http://schemas.openxmlformats.org/drawingml/2006/main" xmlns:r="http://schemas.openxmlformats.org/officeDocument/2006/relationships" xmlns:p="http://schemas.openxmlformats.org/presentationml/2006/main">
+  <p:cSld>
+    <p:spTree>
+      <p:nvGrpSpPr>
+        <p:cNvPr id="1" name=""/>
+        <p:cNvGrpSpPr/>
+        <p:nvPr/>
+      </p:nvGrpSpPr>
+      <p:grpSpPr>
+        <a:xfrm>
+          <a:off x="0" y="0"/>
+          <a:ext cx="0" cy="0"/>
+          <a:chOff x="0" y="0"/>
+          <a:chExt cx="0" cy="0"/>
+        </a:xfrm>
+      </p:grpSpPr>
+      <p:sp>
+        <p:nvSpPr>
+          <p:cNvPr id="2" name="Slide Image Placeholder 1"/>
+          <p:cNvSpPr>
+            <a:spLocks noGrp="1" noRot="1" noChangeAspect="1"/>
+          </p:cNvSpPr>
+          <p:nvPr>
+            <p:ph type="sldImg"/>
+          </p:nvPr>
+        </p:nvSpPr>
+        <p:spPr/>
+      </p:sp>
+      <p:sp>
+        <p:nvSpPr>
+          <p:cNvPr id="3" name="Notes Placeholder 2"/>
+          <p:cNvSpPr>
+            <a:spLocks noGrp="1"/>
+          </p:cNvSpPr>
+          <p:nvPr>
+            <p:ph type="body" idx="1"/>
+          </p:nvPr>
+        </p:nvSpPr>
+        <p:spPr/>
+        <p:txBody>
+          <a:bodyPr/>
+          <a:lstStyle/>
+          <a:p>
+            <a:r>
+              <a:rPr lang="en-US" dirty="0"/>
+              <a:t>Close on honesty: we grade our own claims and show the gaps.</a:t>
+            </a:r>
+            <a:endParaRPr lang="en-US" dirty="0"/>
+          </a:p>
+        </p:txBody>
+      </p:sp>
+      <p:sp>
+        <p:nvSpPr>
+          <p:cNvPr id="4" name="Slide Number Placeholder 3"/>
+          <p:cNvSpPr>
+            <a:spLocks noGrp="1"/>
+          </p:cNvSpPr>
+          <p:nvPr>
+            <p:ph type="sldNum" sz="quarter" idx="10"/>
+          </p:nvPr>
+        </p:nvSpPr>
+        <p:spPr/>
+        <p:txBody>
+          <a:bodyPr/>
+          <a:lstStyle/>
+          <a:p>
+            <a:fld id="{F7021451-1387-4CA6-816F-3879F97B5CBC}" type="slidenum">
+              <a:rPr lang="en-US"/>
+              <a:t>10</a:t>
+            </a:fld>
+            <a:endParaRPr lang="en-US"/>
+          </a:p>
+        </p:txBody>
+      </p:sp>
+    </p:spTree>
+    <p:extLst>
+      <p:ext uri="{BB962C8B-B14F-4D97-AF65-F5344CB8AC3E}">
+        <p14:creationId xmlns:p14="http://schemas.microsoft.com/office/powerpoint/2010/main" val="1024086991"/>
+      </p:ext>
+    </p:extLst>
+  </p:cSld>
+  <p:clrMapOvr>
+    <a:masterClrMapping/>
+  </p:clrMapOvr>
+</p:notes>
+</file>
+
 <file path=ppt/notesSlides/notesSlide2.xml><?xml version="1.0" encoding="utf-8"?>
 <p:notes xmlns:a="http://schemas.openxmlformats.org/drawingml/2006/main" xmlns:r="http://schemas.openxmlformats.org/officeDocument/2006/relationships" xmlns:p="http://schemas.openxmlformats.org/presentationml/2006/main">
   <p:cSld>
@@ -1214,7 +1303,7 @@
           <a:p>
             <a:r>
               <a:rPr lang="en-US" dirty="0"/>
-              <a:t>Close on honesty: we grade our own claims and show the gaps.</a:t>
+              <a:t>One-to-one mapping of the post-meeting open points to committed moves (docs/demo/open-points.md). Row 6 (AGENTS) is the only one without a decided fix — candidate: per-agent model pin with wrong-pin rejection (GAP-ANALYSIS G1 fix path).</a:t>
             </a:r>
             <a:endParaRPr lang="en-US" dirty="0"/>
           </a:p>
@@ -2118,6 +2207,304 @@
 </p:sld>
 </file>
 
+<file path=ppt/slides/slide10.xml><?xml version="1.0" encoding="utf-8"?>
+<p:sld xmlns:a="http://schemas.openxmlformats.org/drawingml/2006/main" xmlns:r="http://schemas.openxmlformats.org/officeDocument/2006/relationships" xmlns:p="http://schemas.openxmlformats.org/presentationml/2006/main">
+  <p:cSld name="Slide 10">
+    <p:bg>
+      <p:bgPr>
+        <a:solidFill>
+          <a:srgbClr val="1E2761"/>
+        </a:solidFill>
+      </p:bgPr>
+    </p:bg>
+    <p:spTree>
+      <p:nvGrpSpPr>
+        <p:cNvPr id="1" name=""/>
+        <p:cNvGrpSpPr/>
+        <p:nvPr/>
+      </p:nvGrpSpPr>
+      <p:grpSpPr>
+        <a:xfrm>
+          <a:off x="0" y="0"/>
+          <a:ext cx="0" cy="0"/>
+          <a:chOff x="0" y="0"/>
+          <a:chExt cx="0" cy="0"/>
+        </a:xfrm>
+      </p:grpSpPr>
+      <p:sp>
+        <p:nvSpPr>
+          <p:cNvPr id="2" name="Shape 0"/>
+          <p:cNvSpPr/>
+          <p:nvPr/>
+        </p:nvSpPr>
+        <p:spPr>
+          <a:xfrm>
+            <a:off x="-2011680" y="4023360"/>
+            <a:ext cx="5120640" cy="5120640"/>
+          </a:xfrm>
+          <a:prstGeom prst="ellipse">
+            <a:avLst/>
+          </a:prstGeom>
+          <a:solidFill>
+            <a:srgbClr val="27346E"/>
+          </a:solidFill>
+          <a:ln w="12700">
+            <a:solidFill>
+              <a:srgbClr val="333333"/>
+            </a:solidFill>
+            <a:prstDash val="solid"/>
+          </a:ln>
+        </p:spPr>
+      </p:sp>
+      <p:sp>
+        <p:nvSpPr>
+          <p:cNvPr id="3" name="Text 1"/>
+          <p:cNvSpPr/>
+          <p:nvPr/>
+        </p:nvSpPr>
+        <p:spPr>
+          <a:xfrm>
+            <a:off x="731520" y="777240"/>
+            <a:ext cx="10698480" cy="365760"/>
+          </a:xfrm>
+          <a:prstGeom prst="rect">
+            <a:avLst/>
+          </a:prstGeom>
+          <a:noFill/>
+          <a:ln/>
+        </p:spPr>
+        <p:txBody>
+          <a:bodyPr wrap="square" rtlCol="0" anchor="ctr"/>
+          <a:lstStyle/>
+          <a:p>
+            <a:pPr indent="0" marL="0">
+              <a:buNone/>
+            </a:pPr>
+            <a:r>
+              <a:rPr lang="en-US" sz="1400" b="1" spc="300" kern="0" dirty="0">
+                <a:solidFill>
+                  <a:srgbClr val="F4B400"/>
+                </a:solidFill>
+                <a:latin typeface="Calibri" pitchFamily="34" charset="0"/>
+                <a:ea typeface="Calibri" pitchFamily="34" charset="-122"/>
+                <a:cs typeface="Calibri" pitchFamily="34" charset="-120"/>
+              </a:rPr>
+              <a:t>WHAT WE KNOW</a:t>
+            </a:r>
+            <a:endParaRPr lang="en-US" sz="1400" dirty="0"/>
+          </a:p>
+        </p:txBody>
+      </p:sp>
+      <p:sp>
+        <p:nvSpPr>
+          <p:cNvPr id="4" name="Text 2"/>
+          <p:cNvSpPr/>
+          <p:nvPr/>
+        </p:nvSpPr>
+        <p:spPr>
+          <a:xfrm>
+            <a:off x="731520" y="1188720"/>
+            <a:ext cx="10698480" cy="777240"/>
+          </a:xfrm>
+          <a:prstGeom prst="rect">
+            <a:avLst/>
+          </a:prstGeom>
+          <a:noFill/>
+          <a:ln/>
+        </p:spPr>
+        <p:txBody>
+          <a:bodyPr wrap="square" rtlCol="0" anchor="ctr"/>
+          <a:lstStyle/>
+          <a:p>
+            <a:pPr indent="0" marL="0">
+              <a:buNone/>
+            </a:pPr>
+            <a:r>
+              <a:rPr lang="en-US" sz="4000" b="1" dirty="0">
+                <a:solidFill>
+                  <a:srgbClr val="FFFFFF"/>
+                </a:solidFill>
+                <a:latin typeface="Cambria" pitchFamily="34" charset="0"/>
+                <a:ea typeface="Cambria" pitchFamily="34" charset="-122"/>
+                <a:cs typeface="Cambria" pitchFamily="34" charset="-120"/>
+              </a:rPr>
+              <a:t>Built from experience. Graded by evidence.</a:t>
+            </a:r>
+            <a:endParaRPr lang="en-US" sz="4000" dirty="0"/>
+          </a:p>
+        </p:txBody>
+      </p:sp>
+      <p:sp>
+        <p:nvSpPr>
+          <p:cNvPr id="5" name="Text 3"/>
+          <p:cNvSpPr/>
+          <p:nvPr/>
+        </p:nvSpPr>
+        <p:spPr>
+          <a:xfrm>
+            <a:off x="731520" y="2377440"/>
+            <a:ext cx="10698480" cy="2011680"/>
+          </a:xfrm>
+          <a:prstGeom prst="rect">
+            <a:avLst/>
+          </a:prstGeom>
+          <a:noFill/>
+          <a:ln/>
+        </p:spPr>
+        <p:txBody>
+          <a:bodyPr wrap="square" rtlCol="0" anchor="ctr"/>
+          <a:lstStyle/>
+          <a:p>
+            <a:pPr marL="342900" indent="-342900">
+              <a:spcAft>
+                <a:spcPts val="1000"/>
+              </a:spcAft>
+              <a:buSzPct val="100000"/>
+              <a:buChar char="•"/>
+            </a:pPr>
+            <a:r>
+              <a:rPr lang="en-US" sz="2000" dirty="0">
+                <a:solidFill>
+                  <a:srgbClr val="EAF0FB"/>
+                </a:solidFill>
+                <a:latin typeface="Calibri" pitchFamily="34" charset="0"/>
+                <a:ea typeface="Calibri" pitchFamily="34" charset="-122"/>
+                <a:cs typeface="Calibri" pitchFamily="34" charset="-120"/>
+              </a:rPr>
+              <a:t>The framework's value concentrates on hard engineering — measured, reproducible, labeled.</a:t>
+            </a:r>
+            <a:endParaRPr lang="en-US" sz="2000" dirty="0"/>
+          </a:p>
+          <a:p>
+            <a:pPr marL="342900" indent="-342900">
+              <a:spcAft>
+                <a:spcPts val="1000"/>
+              </a:spcAft>
+              <a:buSzPct val="100000"/>
+              <a:buChar char="•"/>
+            </a:pPr>
+            <a:r>
+              <a:rPr lang="en-US" sz="2000" dirty="0">
+                <a:solidFill>
+                  <a:srgbClr val="EAF0FB"/>
+                </a:solidFill>
+                <a:latin typeface="Calibri" pitchFamily="34" charset="0"/>
+                <a:ea typeface="Calibri" pitchFamily="34" charset="-122"/>
+                <a:cs typeface="Calibri" pitchFamily="34" charset="-120"/>
+              </a:rPr>
+              <a:t>Gaps are shown, not hidden (cost metering, advisory guardrails, N=1 cells).</a:t>
+            </a:r>
+            <a:endParaRPr lang="en-US" sz="2000" dirty="0"/>
+          </a:p>
+          <a:p>
+            <a:pPr marL="342900" indent="-342900">
+              <a:spcAft>
+                <a:spcPts val="1000"/>
+              </a:spcAft>
+              <a:buSzPct val="100000"/>
+              <a:buChar char="•"/>
+            </a:pPr>
+            <a:r>
+              <a:rPr lang="en-US" sz="2000" dirty="0">
+                <a:solidFill>
+                  <a:srgbClr val="EAF0FB"/>
+                </a:solidFill>
+                <a:latin typeface="Calibri" pitchFamily="34" charset="0"/>
+                <a:ea typeface="Calibri" pitchFamily="34" charset="-122"/>
+                <a:cs typeface="Calibri" pitchFamily="34" charset="-120"/>
+              </a:rPr>
+              <a:t>Fork first: experiments live on the fork; the official ex-company repo stays read-only.</a:t>
+            </a:r>
+            <a:endParaRPr lang="en-US" sz="2000" dirty="0"/>
+          </a:p>
+        </p:txBody>
+      </p:sp>
+      <p:sp>
+        <p:nvSpPr>
+          <p:cNvPr id="6" name="Text 4"/>
+          <p:cNvSpPr/>
+          <p:nvPr/>
+        </p:nvSpPr>
+        <p:spPr>
+          <a:xfrm>
+            <a:off x="731520" y="5029200"/>
+            <a:ext cx="10698480" cy="457200"/>
+          </a:xfrm>
+          <a:prstGeom prst="rect">
+            <a:avLst/>
+          </a:prstGeom>
+          <a:noFill/>
+          <a:ln/>
+        </p:spPr>
+        <p:txBody>
+          <a:bodyPr wrap="square" rtlCol="0" anchor="ctr"/>
+          <a:lstStyle/>
+          <a:p>
+            <a:pPr indent="0" marL="0">
+              <a:buNone/>
+            </a:pPr>
+            <a:r>
+              <a:rPr lang="en-US" sz="1800" b="1" dirty="0">
+                <a:solidFill>
+                  <a:srgbClr val="F4B400"/>
+                </a:solidFill>
+                <a:latin typeface="Calibri" pitchFamily="34" charset="0"/>
+                <a:ea typeface="Calibri" pitchFamily="34" charset="-122"/>
+                <a:cs typeface="Calibri" pitchFamily="34" charset="-120"/>
+              </a:rPr>
+              <a:t>Everything ships in the repo: github.com/trac41799/claude-code-agentic-sdlc (evidence/ · docs/demo/live-demo-guide.md · docs/benchmarks/BENCHMARK-SUMMARY.md)</a:t>
+            </a:r>
+            <a:endParaRPr lang="en-US" sz="1800" dirty="0"/>
+          </a:p>
+        </p:txBody>
+      </p:sp>
+      <p:sp>
+        <p:nvSpPr>
+          <p:cNvPr id="7" name="Text 5"/>
+          <p:cNvSpPr/>
+          <p:nvPr/>
+        </p:nvSpPr>
+        <p:spPr>
+          <a:xfrm>
+            <a:off x="731520" y="5760720"/>
+            <a:ext cx="10698480" cy="457200"/>
+          </a:xfrm>
+          <a:prstGeom prst="rect">
+            <a:avLst/>
+          </a:prstGeom>
+          <a:noFill/>
+          <a:ln/>
+        </p:spPr>
+        <p:txBody>
+          <a:bodyPr wrap="square" rtlCol="0" anchor="ctr"/>
+          <a:lstStyle/>
+          <a:p>
+            <a:pPr indent="0" marL="0">
+              <a:buNone/>
+            </a:pPr>
+            <a:r>
+              <a:rPr lang="en-US" sz="2200" b="1" i="1" dirty="0">
+                <a:solidFill>
+                  <a:srgbClr val="FFFFFF"/>
+                </a:solidFill>
+                <a:latin typeface="Cambria" pitchFamily="34" charset="0"/>
+                <a:ea typeface="Cambria" pitchFamily="34" charset="-122"/>
+                <a:cs typeface="Cambria" pitchFamily="34" charset="-120"/>
+              </a:rPr>
+              <a:t>Not a solved discipline — a repeatable, honest one.</a:t>
+            </a:r>
+            <a:endParaRPr lang="en-US" sz="2200" dirty="0"/>
+          </a:p>
+        </p:txBody>
+      </p:sp>
+    </p:spTree>
+  </p:cSld>
+  <p:clrMapOvr>
+    <a:masterClrMapping/>
+  </p:clrMapOvr>
+</p:sld>
+</file>
+
 <file path=ppt/slides/slide2.xml><?xml version="1.0" encoding="utf-8"?>
 <p:sld xmlns:a="http://schemas.openxmlformats.org/drawingml/2006/main" xmlns:r="http://schemas.openxmlformats.org/officeDocument/2006/relationships" xmlns:p="http://schemas.openxmlformats.org/presentationml/2006/main">
   <p:cSld name="Slide 2">
@@ -4743,7 +5130,7 @@
       </p:sp>
       <p:pic>
         <p:nvPicPr>
-          <p:cNvPr id="5" name="Image 0" descr="D:\TRANSFER DATA\Coding\claude-code-agentic-sdlc\docs\slides/sdlc-cycle.png">    </p:cNvPr>
+          <p:cNvPr id="5" name="Image 0" descr="C:\Users\TracNguyen\Personal\BrainStorm\Research-Hub\claude-code-agentic-sdlc\docs\slides/sdlc-cycle.png">    </p:cNvPr>
           <p:cNvPicPr>
             <a:picLocks noChangeAspect="1"/>
           </p:cNvPicPr>
@@ -4955,7 +5342,7 @@
       </p:sp>
       <p:pic>
         <p:nvPicPr>
-          <p:cNvPr id="5" name="Image 0" descr="D:\TRANSFER DATA\Coding\claude-code-agentic-sdlc\docs\slides/workflow-diagram.png">    </p:cNvPr>
+          <p:cNvPr id="5" name="Image 0" descr="C:\Users\TracNguyen\Personal\BrainStorm\Research-Hub\claude-code-agentic-sdlc\docs\slides/workflow-diagram.png">    </p:cNvPr>
           <p:cNvPicPr>
             <a:picLocks noChangeAspect="1"/>
           </p:cNvPicPr>
@@ -5245,7 +5632,7 @@
       </p:sp>
       <p:pic>
         <p:nvPicPr>
-          <p:cNvPr id="7" name="Image 0" descr="D:\TRANSFER DATA\Coding\claude-code-agentic-sdlc\docs\slides/evidence-be-b.png">    </p:cNvPr>
+          <p:cNvPr id="7" name="Image 0" descr="C:\Users\TracNguyen\Personal\BrainStorm\Research-Hub\claude-code-agentic-sdlc\docs\slides/evidence-be-b.png">    </p:cNvPr>
           <p:cNvPicPr>
             <a:picLocks noChangeAspect="1"/>
           </p:cNvPicPr>
@@ -5269,7 +5656,7 @@
       </p:pic>
       <p:pic>
         <p:nvPicPr>
-          <p:cNvPr id="8" name="Image 1" descr="D:\TRANSFER DATA\Coding\claude-code-agentic-sdlc\docs\slides/evidence-be-a.png">    </p:cNvPr>
+          <p:cNvPr id="8" name="Image 1" descr="C:\Users\TracNguyen\Personal\BrainStorm\Research-Hub\claude-code-agentic-sdlc\docs\slides/evidence-be-a.png">    </p:cNvPr>
           <p:cNvPicPr>
             <a:picLocks noChangeAspect="1"/>
           </p:cNvPicPr>
@@ -7418,7 +7805,7 @@
     <p:bg>
       <p:bgPr>
         <a:solidFill>
-          <a:srgbClr val="1E2761"/>
+          <a:srgbClr val="FFFFFF"/>
         </a:solidFill>
       </p:bgPr>
     </p:bg>
@@ -7438,24 +7825,1367 @@
       </p:grpSpPr>
       <p:sp>
         <p:nvSpPr>
-          <p:cNvPr id="2" name="Shape 0"/>
-          <p:cNvSpPr/>
-          <p:nvPr/>
-        </p:nvSpPr>
-        <p:spPr>
-          <a:xfrm>
-            <a:off x="-2011680" y="4023360"/>
-            <a:ext cx="5120640" cy="5120640"/>
-          </a:xfrm>
-          <a:prstGeom prst="ellipse">
-            <a:avLst/>
+          <p:cNvPr id="2" name="Text 0"/>
+          <p:cNvSpPr/>
+          <p:nvPr/>
+        </p:nvSpPr>
+        <p:spPr>
+          <a:xfrm>
+            <a:off x="502920" y="256032"/>
+            <a:ext cx="10972800" cy="292608"/>
+          </a:xfrm>
+          <a:prstGeom prst="rect">
+            <a:avLst/>
+          </a:prstGeom>
+          <a:noFill/>
+          <a:ln/>
+        </p:spPr>
+        <p:txBody>
+          <a:bodyPr wrap="square" rtlCol="0" anchor="ctr"/>
+          <a:lstStyle/>
+          <a:p>
+            <a:pPr indent="0" marL="0">
+              <a:buNone/>
+            </a:pPr>
+            <a:r>
+              <a:rPr lang="en-US" sz="1300" b="1" spc="200" kern="0" dirty="0">
+                <a:solidFill>
+                  <a:srgbClr val="B98A00"/>
+                </a:solidFill>
+                <a:latin typeface="Calibri" pitchFamily="34" charset="0"/>
+                <a:ea typeface="Calibri" pitchFamily="34" charset="-122"/>
+                <a:cs typeface="Calibri" pitchFamily="34" charset="-120"/>
+              </a:rPr>
+              <a:t>ROADMAP · NEXT MOVES</a:t>
+            </a:r>
+            <a:endParaRPr lang="en-US" sz="1300" dirty="0"/>
+          </a:p>
+        </p:txBody>
+      </p:sp>
+      <p:sp>
+        <p:nvSpPr>
+          <p:cNvPr id="3" name="Text 1"/>
+          <p:cNvSpPr/>
+          <p:nvPr/>
+        </p:nvSpPr>
+        <p:spPr>
+          <a:xfrm>
+            <a:off x="502920" y="548640"/>
+            <a:ext cx="11155680" cy="777240"/>
+          </a:xfrm>
+          <a:prstGeom prst="rect">
+            <a:avLst/>
+          </a:prstGeom>
+          <a:noFill/>
+          <a:ln/>
+        </p:spPr>
+        <p:txBody>
+          <a:bodyPr wrap="square" rtlCol="0" anchor="ctr"/>
+          <a:lstStyle/>
+          <a:p>
+            <a:pPr indent="0" marL="0">
+              <a:buNone/>
+            </a:pPr>
+            <a:r>
+              <a:rPr lang="en-US" sz="4000" b="1" dirty="0">
+                <a:solidFill>
+                  <a:srgbClr val="1E2761"/>
+                </a:solidFill>
+                <a:latin typeface="Cambria" pitchFamily="34" charset="0"/>
+                <a:ea typeface="Cambria" pitchFamily="34" charset="-122"/>
+                <a:cs typeface="Cambria" pitchFamily="34" charset="-120"/>
+              </a:rPr>
+              <a:t>Open points → committed moves</a:t>
+            </a:r>
+            <a:endParaRPr lang="en-US" sz="4000" dirty="0"/>
+          </a:p>
+        </p:txBody>
+      </p:sp>
+      <p:sp>
+        <p:nvSpPr>
+          <p:cNvPr id="4" name="Text 2"/>
+          <p:cNvSpPr/>
+          <p:nvPr/>
+        </p:nvSpPr>
+        <p:spPr>
+          <a:xfrm>
+            <a:off x="502920" y="1325880"/>
+            <a:ext cx="11155680" cy="457200"/>
+          </a:xfrm>
+          <a:prstGeom prst="rect">
+            <a:avLst/>
+          </a:prstGeom>
+          <a:noFill/>
+          <a:ln/>
+        </p:spPr>
+        <p:txBody>
+          <a:bodyPr wrap="square" rtlCol="0" anchor="ctr"/>
+          <a:lstStyle/>
+          <a:p>
+            <a:pPr indent="0" marL="0">
+              <a:buNone/>
+            </a:pPr>
+            <a:r>
+              <a:rPr lang="en-US" sz="1800" dirty="0">
+                <a:solidFill>
+                  <a:srgbClr val="6B7280"/>
+                </a:solidFill>
+                <a:latin typeface="Calibri" pitchFamily="34" charset="0"/>
+                <a:ea typeface="Calibri" pitchFamily="34" charset="-122"/>
+                <a:cs typeface="Calibri" pitchFamily="34" charset="-120"/>
+              </a:rPr>
+              <a:t>Seven gaps we admit, seven fixes we're building — the post-meeting commitment list.</a:t>
+            </a:r>
+            <a:endParaRPr lang="en-US" sz="1800" dirty="0"/>
+          </a:p>
+        </p:txBody>
+      </p:sp>
+      <p:sp>
+        <p:nvSpPr>
+          <p:cNvPr id="5" name="Shape 3"/>
+          <p:cNvSpPr/>
+          <p:nvPr/>
+        </p:nvSpPr>
+        <p:spPr>
+          <a:xfrm>
+            <a:off x="685800" y="2011680"/>
+            <a:ext cx="5349240" cy="4114800"/>
+          </a:xfrm>
+          <a:prstGeom prst="roundRect">
+            <a:avLst>
+              <a:gd name="adj" fmla="val 2222"/>
+            </a:avLst>
           </a:prstGeom>
           <a:solidFill>
-            <a:srgbClr val="27346E"/>
+            <a:srgbClr val="FBF3E2"/>
+          </a:solidFill>
+          <a:ln w="15875">
+            <a:solidFill>
+              <a:srgbClr val="B98A00"/>
+            </a:solidFill>
+            <a:prstDash val="solid"/>
+          </a:ln>
+        </p:spPr>
+      </p:sp>
+      <p:sp>
+        <p:nvSpPr>
+          <p:cNvPr id="6" name="Text 4"/>
+          <p:cNvSpPr/>
+          <p:nvPr/>
+        </p:nvSpPr>
+        <p:spPr>
+          <a:xfrm>
+            <a:off x="960120" y="2194560"/>
+            <a:ext cx="4800600" cy="320040"/>
+          </a:xfrm>
+          <a:prstGeom prst="rect">
+            <a:avLst/>
+          </a:prstGeom>
+          <a:noFill/>
+          <a:ln/>
+        </p:spPr>
+        <p:txBody>
+          <a:bodyPr wrap="square" rtlCol="0" anchor="ctr"/>
+          <a:lstStyle/>
+          <a:p>
+            <a:pPr indent="0" marL="0">
+              <a:buNone/>
+            </a:pPr>
+            <a:r>
+              <a:rPr lang="en-US" sz="1500" b="1" dirty="0">
+                <a:solidFill>
+                  <a:srgbClr val="7A5C00"/>
+                </a:solidFill>
+                <a:latin typeface="Calibri" pitchFamily="34" charset="0"/>
+                <a:ea typeface="Calibri" pitchFamily="34" charset="-122"/>
+                <a:cs typeface="Calibri" pitchFamily="34" charset="-120"/>
+              </a:rPr>
+              <a:t>OPEN POINTS</a:t>
+            </a:r>
+            <a:endParaRPr lang="en-US" sz="1500" dirty="0"/>
+          </a:p>
+        </p:txBody>
+      </p:sp>
+      <p:sp>
+        <p:nvSpPr>
+          <p:cNvPr id="7" name="Text 5"/>
+          <p:cNvSpPr/>
+          <p:nvPr/>
+        </p:nvSpPr>
+        <p:spPr>
+          <a:xfrm>
+            <a:off x="960120" y="2606040"/>
+            <a:ext cx="1280160" cy="365760"/>
+          </a:xfrm>
+          <a:prstGeom prst="rect">
+            <a:avLst/>
+          </a:prstGeom>
+          <a:noFill/>
+          <a:ln/>
+        </p:spPr>
+        <p:txBody>
+          <a:bodyPr wrap="square" lIns="0" tIns="0" rIns="0" bIns="0" rtlCol="0" anchor="ctr"/>
+          <a:lstStyle/>
+          <a:p>
+            <a:pPr indent="0" marL="0">
+              <a:buNone/>
+            </a:pPr>
+            <a:r>
+              <a:rPr lang="en-US" sz="1150" b="1" dirty="0">
+                <a:solidFill>
+                  <a:srgbClr val="B91C1C"/>
+                </a:solidFill>
+                <a:latin typeface="Calibri" pitchFamily="34" charset="0"/>
+                <a:ea typeface="Calibri" pitchFamily="34" charset="-122"/>
+                <a:cs typeface="Calibri" pitchFamily="34" charset="-120"/>
+              </a:rPr>
+              <a:t>COST</a:t>
+            </a:r>
+            <a:endParaRPr lang="en-US" sz="1150" dirty="0"/>
+          </a:p>
+        </p:txBody>
+      </p:sp>
+      <p:sp>
+        <p:nvSpPr>
+          <p:cNvPr id="8" name="Text 6"/>
+          <p:cNvSpPr/>
+          <p:nvPr/>
+        </p:nvSpPr>
+        <p:spPr>
+          <a:xfrm>
+            <a:off x="2286000" y="2606040"/>
+            <a:ext cx="3337560" cy="411480"/>
+          </a:xfrm>
+          <a:prstGeom prst="rect">
+            <a:avLst/>
+          </a:prstGeom>
+          <a:noFill/>
+          <a:ln/>
+        </p:spPr>
+        <p:txBody>
+          <a:bodyPr wrap="square" lIns="0" tIns="0" rIns="0" bIns="0" rtlCol="0" anchor="ctr"/>
+          <a:lstStyle/>
+          <a:p>
+            <a:pPr indent="0" marL="0">
+              <a:buNone/>
+            </a:pPr>
+            <a:r>
+              <a:rPr lang="en-US" sz="1150" dirty="0">
+                <a:solidFill>
+                  <a:srgbClr val="1F2937"/>
+                </a:solidFill>
+                <a:latin typeface="Calibri" pitchFamily="34" charset="0"/>
+                <a:ea typeface="Calibri" pitchFamily="34" charset="-122"/>
+                <a:cs typeface="Calibri" pitchFamily="34" charset="-120"/>
+              </a:rPr>
+              <a:t>No trusted metering, no budget</a:t>
+            </a:r>
+            <a:endParaRPr lang="en-US" sz="1150" dirty="0"/>
+          </a:p>
+        </p:txBody>
+      </p:sp>
+      <p:sp>
+        <p:nvSpPr>
+          <p:cNvPr id="9" name="Text 7"/>
+          <p:cNvSpPr/>
+          <p:nvPr/>
+        </p:nvSpPr>
+        <p:spPr>
+          <a:xfrm>
+            <a:off x="960120" y="3081528"/>
+            <a:ext cx="1280160" cy="365760"/>
+          </a:xfrm>
+          <a:prstGeom prst="rect">
+            <a:avLst/>
+          </a:prstGeom>
+          <a:noFill/>
+          <a:ln/>
+        </p:spPr>
+        <p:txBody>
+          <a:bodyPr wrap="square" lIns="0" tIns="0" rIns="0" bIns="0" rtlCol="0" anchor="ctr"/>
+          <a:lstStyle/>
+          <a:p>
+            <a:pPr indent="0" marL="0">
+              <a:buNone/>
+            </a:pPr>
+            <a:r>
+              <a:rPr lang="en-US" sz="1150" b="1" dirty="0">
+                <a:solidFill>
+                  <a:srgbClr val="B91C1C"/>
+                </a:solidFill>
+                <a:latin typeface="Calibri" pitchFamily="34" charset="0"/>
+                <a:ea typeface="Calibri" pitchFamily="34" charset="-122"/>
+                <a:cs typeface="Calibri" pitchFamily="34" charset="-120"/>
+              </a:rPr>
+              <a:t>COMPARISON</a:t>
+            </a:r>
+            <a:endParaRPr lang="en-US" sz="1150" dirty="0"/>
+          </a:p>
+        </p:txBody>
+      </p:sp>
+      <p:sp>
+        <p:nvSpPr>
+          <p:cNvPr id="10" name="Text 8"/>
+          <p:cNvSpPr/>
+          <p:nvPr/>
+        </p:nvSpPr>
+        <p:spPr>
+          <a:xfrm>
+            <a:off x="2286000" y="3081528"/>
+            <a:ext cx="3337560" cy="411480"/>
+          </a:xfrm>
+          <a:prstGeom prst="rect">
+            <a:avLst/>
+          </a:prstGeom>
+          <a:noFill/>
+          <a:ln/>
+        </p:spPr>
+        <p:txBody>
+          <a:bodyPr wrap="square" lIns="0" tIns="0" rIns="0" bIns="0" rtlCol="0" anchor="ctr"/>
+          <a:lstStyle/>
+          <a:p>
+            <a:pPr indent="0" marL="0">
+              <a:buNone/>
+            </a:pPr>
+            <a:r>
+              <a:rPr lang="en-US" sz="1150" dirty="0">
+                <a:solidFill>
+                  <a:srgbClr val="1F2937"/>
+                </a:solidFill>
+                <a:latin typeface="Calibri" pitchFamily="34" charset="0"/>
+                <a:ea typeface="Calibri" pitchFamily="34" charset="-122"/>
+                <a:cs typeface="Calibri" pitchFamily="34" charset="-120"/>
+              </a:rPr>
+              <a:t>No arm vs another SDLC framework</a:t>
+            </a:r>
+            <a:endParaRPr lang="en-US" sz="1150" dirty="0"/>
+          </a:p>
+        </p:txBody>
+      </p:sp>
+      <p:sp>
+        <p:nvSpPr>
+          <p:cNvPr id="11" name="Text 9"/>
+          <p:cNvSpPr/>
+          <p:nvPr/>
+        </p:nvSpPr>
+        <p:spPr>
+          <a:xfrm>
+            <a:off x="960120" y="3557016"/>
+            <a:ext cx="1280160" cy="365760"/>
+          </a:xfrm>
+          <a:prstGeom prst="rect">
+            <a:avLst/>
+          </a:prstGeom>
+          <a:noFill/>
+          <a:ln/>
+        </p:spPr>
+        <p:txBody>
+          <a:bodyPr wrap="square" lIns="0" tIns="0" rIns="0" bIns="0" rtlCol="0" anchor="ctr"/>
+          <a:lstStyle/>
+          <a:p>
+            <a:pPr indent="0" marL="0">
+              <a:buNone/>
+            </a:pPr>
+            <a:r>
+              <a:rPr lang="en-US" sz="1150" b="1" dirty="0">
+                <a:solidFill>
+                  <a:srgbClr val="B91C1C"/>
+                </a:solidFill>
+                <a:latin typeface="Calibri" pitchFamily="34" charset="0"/>
+                <a:ea typeface="Calibri" pitchFamily="34" charset="-122"/>
+                <a:cs typeface="Calibri" pitchFamily="34" charset="-120"/>
+              </a:rPr>
+              <a:t>METRICS</a:t>
+            </a:r>
+            <a:endParaRPr lang="en-US" sz="1150" dirty="0"/>
+          </a:p>
+        </p:txBody>
+      </p:sp>
+      <p:sp>
+        <p:nvSpPr>
+          <p:cNvPr id="12" name="Text 10"/>
+          <p:cNvSpPr/>
+          <p:nvPr/>
+        </p:nvSpPr>
+        <p:spPr>
+          <a:xfrm>
+            <a:off x="2286000" y="3557016"/>
+            <a:ext cx="3337560" cy="411480"/>
+          </a:xfrm>
+          <a:prstGeom prst="rect">
+            <a:avLst/>
+          </a:prstGeom>
+          <a:noFill/>
+          <a:ln/>
+        </p:spPr>
+        <p:txBody>
+          <a:bodyPr wrap="square" lIns="0" tIns="0" rIns="0" bIns="0" rtlCol="0" anchor="ctr"/>
+          <a:lstStyle/>
+          <a:p>
+            <a:pPr indent="0" marL="0">
+              <a:buNone/>
+            </a:pPr>
+            <a:r>
+              <a:rPr lang="en-US" sz="1150" dirty="0">
+                <a:solidFill>
+                  <a:srgbClr val="1F2937"/>
+                </a:solidFill>
+                <a:latin typeface="Calibri" pitchFamily="34" charset="0"/>
+                <a:ea typeface="Calibri" pitchFamily="34" charset="-122"/>
+                <a:cs typeface="Calibri" pitchFamily="34" charset="-120"/>
+              </a:rPr>
+              <a:t>N=1 cells, variance unmeasured</a:t>
+            </a:r>
+            <a:endParaRPr lang="en-US" sz="1150" dirty="0"/>
+          </a:p>
+        </p:txBody>
+      </p:sp>
+      <p:sp>
+        <p:nvSpPr>
+          <p:cNvPr id="13" name="Text 11"/>
+          <p:cNvSpPr/>
+          <p:nvPr/>
+        </p:nvSpPr>
+        <p:spPr>
+          <a:xfrm>
+            <a:off x="960120" y="4032504"/>
+            <a:ext cx="1280160" cy="365760"/>
+          </a:xfrm>
+          <a:prstGeom prst="rect">
+            <a:avLst/>
+          </a:prstGeom>
+          <a:noFill/>
+          <a:ln/>
+        </p:spPr>
+        <p:txBody>
+          <a:bodyPr wrap="square" lIns="0" tIns="0" rIns="0" bIns="0" rtlCol="0" anchor="ctr"/>
+          <a:lstStyle/>
+          <a:p>
+            <a:pPr indent="0" marL="0">
+              <a:buNone/>
+            </a:pPr>
+            <a:r>
+              <a:rPr lang="en-US" sz="1150" b="1" dirty="0">
+                <a:solidFill>
+                  <a:srgbClr val="B91C1C"/>
+                </a:solidFill>
+                <a:latin typeface="Calibri" pitchFamily="34" charset="0"/>
+                <a:ea typeface="Calibri" pitchFamily="34" charset="-122"/>
+                <a:cs typeface="Calibri" pitchFamily="34" charset="-120"/>
+              </a:rPr>
+              <a:t>EVIDENCE</a:t>
+            </a:r>
+            <a:endParaRPr lang="en-US" sz="1150" dirty="0"/>
+          </a:p>
+        </p:txBody>
+      </p:sp>
+      <p:sp>
+        <p:nvSpPr>
+          <p:cNvPr id="14" name="Text 12"/>
+          <p:cNvSpPr/>
+          <p:nvPr/>
+        </p:nvSpPr>
+        <p:spPr>
+          <a:xfrm>
+            <a:off x="2286000" y="4032504"/>
+            <a:ext cx="3337560" cy="411480"/>
+          </a:xfrm>
+          <a:prstGeom prst="rect">
+            <a:avLst/>
+          </a:prstGeom>
+          <a:noFill/>
+          <a:ln/>
+        </p:spPr>
+        <p:txBody>
+          <a:bodyPr wrap="square" lIns="0" tIns="0" rIns="0" bIns="0" rtlCol="0" anchor="ctr"/>
+          <a:lstStyle/>
+          <a:p>
+            <a:pPr indent="0" marL="0">
+              <a:buNone/>
+            </a:pPr>
+            <a:r>
+              <a:rPr lang="en-US" sz="1150" dirty="0">
+                <a:solidFill>
+                  <a:srgbClr val="1F2937"/>
+                </a:solidFill>
+                <a:latin typeface="Calibri" pitchFamily="34" charset="0"/>
+                <a:ea typeface="Calibri" pitchFamily="34" charset="-122"/>
+                <a:cs typeface="Calibri" pitchFamily="34" charset="-120"/>
+              </a:rPr>
+              <a:t>Handoffs lean on tests; thin for UI/UX</a:t>
+            </a:r>
+            <a:endParaRPr lang="en-US" sz="1150" dirty="0"/>
+          </a:p>
+        </p:txBody>
+      </p:sp>
+      <p:sp>
+        <p:nvSpPr>
+          <p:cNvPr id="15" name="Text 13"/>
+          <p:cNvSpPr/>
+          <p:nvPr/>
+        </p:nvSpPr>
+        <p:spPr>
+          <a:xfrm>
+            <a:off x="960120" y="4507992"/>
+            <a:ext cx="1280160" cy="365760"/>
+          </a:xfrm>
+          <a:prstGeom prst="rect">
+            <a:avLst/>
+          </a:prstGeom>
+          <a:noFill/>
+          <a:ln/>
+        </p:spPr>
+        <p:txBody>
+          <a:bodyPr wrap="square" lIns="0" tIns="0" rIns="0" bIns="0" rtlCol="0" anchor="ctr"/>
+          <a:lstStyle/>
+          <a:p>
+            <a:pPr indent="0" marL="0">
+              <a:buNone/>
+            </a:pPr>
+            <a:r>
+              <a:rPr lang="en-US" sz="1150" b="1" dirty="0">
+                <a:solidFill>
+                  <a:srgbClr val="B91C1C"/>
+                </a:solidFill>
+                <a:latin typeface="Calibri" pitchFamily="34" charset="0"/>
+                <a:ea typeface="Calibri" pitchFamily="34" charset="-122"/>
+                <a:cs typeface="Calibri" pitchFamily="34" charset="-120"/>
+              </a:rPr>
+              <a:t>QUALITY</a:t>
+            </a:r>
+            <a:endParaRPr lang="en-US" sz="1150" dirty="0"/>
+          </a:p>
+        </p:txBody>
+      </p:sp>
+      <p:sp>
+        <p:nvSpPr>
+          <p:cNvPr id="16" name="Text 14"/>
+          <p:cNvSpPr/>
+          <p:nvPr/>
+        </p:nvSpPr>
+        <p:spPr>
+          <a:xfrm>
+            <a:off x="2286000" y="4507992"/>
+            <a:ext cx="3337560" cy="411480"/>
+          </a:xfrm>
+          <a:prstGeom prst="rect">
+            <a:avLst/>
+          </a:prstGeom>
+          <a:noFill/>
+          <a:ln/>
+        </p:spPr>
+        <p:txBody>
+          <a:bodyPr wrap="square" lIns="0" tIns="0" rIns="0" bIns="0" rtlCol="0" anchor="ctr"/>
+          <a:lstStyle/>
+          <a:p>
+            <a:pPr indent="0" marL="0">
+              <a:buNone/>
+            </a:pPr>
+            <a:r>
+              <a:rPr lang="en-US" sz="1150" dirty="0">
+                <a:solidFill>
+                  <a:srgbClr val="1F2937"/>
+                </a:solidFill>
+                <a:latin typeface="Calibri" pitchFamily="34" charset="0"/>
+                <a:ea typeface="Calibri" pitchFamily="34" charset="-122"/>
+                <a:cs typeface="Calibri" pitchFamily="34" charset="-120"/>
+              </a:rPr>
+              <a:t>TDD + human review only</a:t>
+            </a:r>
+            <a:endParaRPr lang="en-US" sz="1150" dirty="0"/>
+          </a:p>
+        </p:txBody>
+      </p:sp>
+      <p:sp>
+        <p:nvSpPr>
+          <p:cNvPr id="17" name="Text 15"/>
+          <p:cNvSpPr/>
+          <p:nvPr/>
+        </p:nvSpPr>
+        <p:spPr>
+          <a:xfrm>
+            <a:off x="960120" y="4983480"/>
+            <a:ext cx="1280160" cy="365760"/>
+          </a:xfrm>
+          <a:prstGeom prst="rect">
+            <a:avLst/>
+          </a:prstGeom>
+          <a:noFill/>
+          <a:ln/>
+        </p:spPr>
+        <p:txBody>
+          <a:bodyPr wrap="square" lIns="0" tIns="0" rIns="0" bIns="0" rtlCol="0" anchor="ctr"/>
+          <a:lstStyle/>
+          <a:p>
+            <a:pPr indent="0" marL="0">
+              <a:buNone/>
+            </a:pPr>
+            <a:r>
+              <a:rPr lang="en-US" sz="1150" b="1" dirty="0">
+                <a:solidFill>
+                  <a:srgbClr val="B91C1C"/>
+                </a:solidFill>
+                <a:latin typeface="Calibri" pitchFamily="34" charset="0"/>
+                <a:ea typeface="Calibri" pitchFamily="34" charset="-122"/>
+                <a:cs typeface="Calibri" pitchFamily="34" charset="-120"/>
+              </a:rPr>
+              <a:t>AGENTS</a:t>
+            </a:r>
+            <a:endParaRPr lang="en-US" sz="1150" dirty="0"/>
+          </a:p>
+        </p:txBody>
+      </p:sp>
+      <p:sp>
+        <p:nvSpPr>
+          <p:cNvPr id="18" name="Text 16"/>
+          <p:cNvSpPr/>
+          <p:nvPr/>
+        </p:nvSpPr>
+        <p:spPr>
+          <a:xfrm>
+            <a:off x="2286000" y="4983480"/>
+            <a:ext cx="3337560" cy="411480"/>
+          </a:xfrm>
+          <a:prstGeom prst="rect">
+            <a:avLst/>
+          </a:prstGeom>
+          <a:noFill/>
+          <a:ln/>
+        </p:spPr>
+        <p:txBody>
+          <a:bodyPr wrap="square" lIns="0" tIns="0" rIns="0" bIns="0" rtlCol="0" anchor="ctr"/>
+          <a:lstStyle/>
+          <a:p>
+            <a:pPr indent="0" marL="0">
+              <a:buNone/>
+            </a:pPr>
+            <a:r>
+              <a:rPr lang="en-US" sz="1150" dirty="0">
+                <a:solidFill>
+                  <a:srgbClr val="1F2937"/>
+                </a:solidFill>
+                <a:latin typeface="Calibri" pitchFamily="34" charset="0"/>
+                <a:ea typeface="Calibri" pitchFamily="34" charset="-122"/>
+                <a:cs typeface="Calibri" pitchFamily="34" charset="-120"/>
+              </a:rPr>
+              <a:t>Model/effort inherited from parent</a:t>
+            </a:r>
+            <a:endParaRPr lang="en-US" sz="1150" dirty="0"/>
+          </a:p>
+        </p:txBody>
+      </p:sp>
+      <p:sp>
+        <p:nvSpPr>
+          <p:cNvPr id="19" name="Text 17"/>
+          <p:cNvSpPr/>
+          <p:nvPr/>
+        </p:nvSpPr>
+        <p:spPr>
+          <a:xfrm>
+            <a:off x="960120" y="5458968"/>
+            <a:ext cx="1280160" cy="365760"/>
+          </a:xfrm>
+          <a:prstGeom prst="rect">
+            <a:avLst/>
+          </a:prstGeom>
+          <a:noFill/>
+          <a:ln/>
+        </p:spPr>
+        <p:txBody>
+          <a:bodyPr wrap="square" lIns="0" tIns="0" rIns="0" bIns="0" rtlCol="0" anchor="ctr"/>
+          <a:lstStyle/>
+          <a:p>
+            <a:pPr indent="0" marL="0">
+              <a:buNone/>
+            </a:pPr>
+            <a:r>
+              <a:rPr lang="en-US" sz="1150" b="1" dirty="0">
+                <a:solidFill>
+                  <a:srgbClr val="B91C1C"/>
+                </a:solidFill>
+                <a:latin typeface="Calibri" pitchFamily="34" charset="0"/>
+                <a:ea typeface="Calibri" pitchFamily="34" charset="-122"/>
+                <a:cs typeface="Calibri" pitchFamily="34" charset="-120"/>
+              </a:rPr>
+              <a:t>HUMANS</a:t>
+            </a:r>
+            <a:endParaRPr lang="en-US" sz="1150" dirty="0"/>
+          </a:p>
+        </p:txBody>
+      </p:sp>
+      <p:sp>
+        <p:nvSpPr>
+          <p:cNvPr id="20" name="Text 18"/>
+          <p:cNvSpPr/>
+          <p:nvPr/>
+        </p:nvSpPr>
+        <p:spPr>
+          <a:xfrm>
+            <a:off x="2286000" y="5458968"/>
+            <a:ext cx="3337560" cy="411480"/>
+          </a:xfrm>
+          <a:prstGeom prst="rect">
+            <a:avLst/>
+          </a:prstGeom>
+          <a:noFill/>
+          <a:ln/>
+        </p:spPr>
+        <p:txBody>
+          <a:bodyPr wrap="square" lIns="0" tIns="0" rIns="0" bIns="0" rtlCol="0" anchor="ctr"/>
+          <a:lstStyle/>
+          <a:p>
+            <a:pPr indent="0" marL="0">
+              <a:buNone/>
+            </a:pPr>
+            <a:r>
+              <a:rPr lang="en-US" sz="1150" dirty="0">
+                <a:solidFill>
+                  <a:srgbClr val="1F2937"/>
+                </a:solidFill>
+                <a:latin typeface="Calibri" pitchFamily="34" charset="0"/>
+                <a:ea typeface="Calibri" pitchFamily="34" charset="-122"/>
+                <a:cs typeface="Calibri" pitchFamily="34" charset="-120"/>
+              </a:rPr>
+              <a:t>No brownfield onboarding path</a:t>
+            </a:r>
+            <a:endParaRPr lang="en-US" sz="1150" dirty="0"/>
+          </a:p>
+        </p:txBody>
+      </p:sp>
+      <p:sp>
+        <p:nvSpPr>
+          <p:cNvPr id="21" name="Shape 19"/>
+          <p:cNvSpPr/>
+          <p:nvPr/>
+        </p:nvSpPr>
+        <p:spPr>
+          <a:xfrm>
+            <a:off x="6263640" y="2011680"/>
+            <a:ext cx="5257800" cy="4114800"/>
+          </a:xfrm>
+          <a:prstGeom prst="roundRect">
+            <a:avLst>
+              <a:gd name="adj" fmla="val 2222"/>
+            </a:avLst>
+          </a:prstGeom>
+          <a:solidFill>
+            <a:srgbClr val="EAF5EC"/>
+          </a:solidFill>
+          <a:ln w="15875">
+            <a:solidFill>
+              <a:srgbClr val="2E7D32"/>
+            </a:solidFill>
+            <a:prstDash val="solid"/>
+          </a:ln>
+        </p:spPr>
+      </p:sp>
+      <p:sp>
+        <p:nvSpPr>
+          <p:cNvPr id="22" name="Text 20"/>
+          <p:cNvSpPr/>
+          <p:nvPr/>
+        </p:nvSpPr>
+        <p:spPr>
+          <a:xfrm>
+            <a:off x="6537960" y="2194560"/>
+            <a:ext cx="4709160" cy="320040"/>
+          </a:xfrm>
+          <a:prstGeom prst="rect">
+            <a:avLst/>
+          </a:prstGeom>
+          <a:noFill/>
+          <a:ln/>
+        </p:spPr>
+        <p:txBody>
+          <a:bodyPr wrap="square" rtlCol="0" anchor="ctr"/>
+          <a:lstStyle/>
+          <a:p>
+            <a:pPr indent="0" marL="0">
+              <a:buNone/>
+            </a:pPr>
+            <a:r>
+              <a:rPr lang="en-US" sz="1500" b="1" dirty="0">
+                <a:solidFill>
+                  <a:srgbClr val="1B5E20"/>
+                </a:solidFill>
+                <a:latin typeface="Calibri" pitchFamily="34" charset="0"/>
+                <a:ea typeface="Calibri" pitchFamily="34" charset="-122"/>
+                <a:cs typeface="Calibri" pitchFamily="34" charset="-120"/>
+              </a:rPr>
+              <a:t>NEXT MOVES</a:t>
+            </a:r>
+            <a:endParaRPr lang="en-US" sz="1500" dirty="0"/>
+          </a:p>
+        </p:txBody>
+      </p:sp>
+      <p:sp>
+        <p:nvSpPr>
+          <p:cNvPr id="23" name="Text 21"/>
+          <p:cNvSpPr/>
+          <p:nvPr/>
+        </p:nvSpPr>
+        <p:spPr>
+          <a:xfrm>
+            <a:off x="6537960" y="2606040"/>
+            <a:ext cx="1417320" cy="365760"/>
+          </a:xfrm>
+          <a:prstGeom prst="rect">
+            <a:avLst/>
+          </a:prstGeom>
+          <a:noFill/>
+          <a:ln/>
+        </p:spPr>
+        <p:txBody>
+          <a:bodyPr wrap="square" lIns="0" tIns="0" rIns="0" bIns="0" rtlCol="0" anchor="ctr"/>
+          <a:lstStyle/>
+          <a:p>
+            <a:pPr indent="0" marL="0">
+              <a:buNone/>
+            </a:pPr>
+            <a:r>
+              <a:rPr lang="en-US" sz="1150" b="1" dirty="0">
+                <a:solidFill>
+                  <a:srgbClr val="1B5E20"/>
+                </a:solidFill>
+                <a:latin typeface="Calibri" pitchFamily="34" charset="0"/>
+                <a:ea typeface="Calibri" pitchFamily="34" charset="-122"/>
+                <a:cs typeface="Calibri" pitchFamily="34" charset="-120"/>
+              </a:rPr>
+              <a:t>GOVERNOR</a:t>
+            </a:r>
+            <a:endParaRPr lang="en-US" sz="1150" dirty="0"/>
+          </a:p>
+        </p:txBody>
+      </p:sp>
+      <p:sp>
+        <p:nvSpPr>
+          <p:cNvPr id="24" name="Text 22"/>
+          <p:cNvSpPr/>
+          <p:nvPr/>
+        </p:nvSpPr>
+        <p:spPr>
+          <a:xfrm>
+            <a:off x="8001000" y="2606040"/>
+            <a:ext cx="3246120" cy="411480"/>
+          </a:xfrm>
+          <a:prstGeom prst="rect">
+            <a:avLst/>
+          </a:prstGeom>
+          <a:noFill/>
+          <a:ln/>
+        </p:spPr>
+        <p:txBody>
+          <a:bodyPr wrap="square" lIns="0" tIns="0" rIns="0" bIns="0" rtlCol="0" anchor="ctr"/>
+          <a:lstStyle/>
+          <a:p>
+            <a:pPr indent="0" marL="0">
+              <a:buNone/>
+            </a:pPr>
+            <a:r>
+              <a:rPr lang="en-US" sz="1150" dirty="0">
+                <a:solidFill>
+                  <a:srgbClr val="1F2937"/>
+                </a:solidFill>
+                <a:latin typeface="Calibri" pitchFamily="34" charset="0"/>
+                <a:ea typeface="Calibri" pitchFamily="34" charset="-122"/>
+                <a:cs typeface="Calibri" pitchFamily="34" charset="-120"/>
+              </a:rPr>
+              <a:t>Hard USD cap per run + banner</a:t>
+            </a:r>
+            <a:endParaRPr lang="en-US" sz="1150" dirty="0"/>
+          </a:p>
+        </p:txBody>
+      </p:sp>
+      <p:sp>
+        <p:nvSpPr>
+          <p:cNvPr id="25" name="Text 23"/>
+          <p:cNvSpPr/>
+          <p:nvPr/>
+        </p:nvSpPr>
+        <p:spPr>
+          <a:xfrm>
+            <a:off x="6537960" y="3081528"/>
+            <a:ext cx="1417320" cy="365760"/>
+          </a:xfrm>
+          <a:prstGeom prst="rect">
+            <a:avLst/>
+          </a:prstGeom>
+          <a:noFill/>
+          <a:ln/>
+        </p:spPr>
+        <p:txBody>
+          <a:bodyPr wrap="square" lIns="0" tIns="0" rIns="0" bIns="0" rtlCol="0" anchor="ctr"/>
+          <a:lstStyle/>
+          <a:p>
+            <a:pPr indent="0" marL="0">
+              <a:buNone/>
+            </a:pPr>
+            <a:r>
+              <a:rPr lang="en-US" sz="1150" b="1" dirty="0">
+                <a:solidFill>
+                  <a:srgbClr val="1B5E20"/>
+                </a:solidFill>
+                <a:latin typeface="Calibri" pitchFamily="34" charset="0"/>
+                <a:ea typeface="Calibri" pitchFamily="34" charset="-122"/>
+                <a:cs typeface="Calibri" pitchFamily="34" charset="-120"/>
+              </a:rPr>
+              <a:t>BENCH ARM</a:t>
+            </a:r>
+            <a:endParaRPr lang="en-US" sz="1150" dirty="0"/>
+          </a:p>
+        </p:txBody>
+      </p:sp>
+      <p:sp>
+        <p:nvSpPr>
+          <p:cNvPr id="26" name="Text 24"/>
+          <p:cNvSpPr/>
+          <p:nvPr/>
+        </p:nvSpPr>
+        <p:spPr>
+          <a:xfrm>
+            <a:off x="8001000" y="3081528"/>
+            <a:ext cx="3246120" cy="411480"/>
+          </a:xfrm>
+          <a:prstGeom prst="rect">
+            <a:avLst/>
+          </a:prstGeom>
+          <a:noFill/>
+          <a:ln/>
+        </p:spPr>
+        <p:txBody>
+          <a:bodyPr wrap="square" lIns="0" tIns="0" rIns="0" bIns="0" rtlCol="0" anchor="ctr"/>
+          <a:lstStyle/>
+          <a:p>
+            <a:pPr indent="0" marL="0">
+              <a:buNone/>
+            </a:pPr>
+            <a:r>
+              <a:rPr lang="en-US" sz="1150" dirty="0">
+                <a:solidFill>
+                  <a:srgbClr val="1F2937"/>
+                </a:solidFill>
+                <a:latin typeface="Calibri" pitchFamily="34" charset="0"/>
+                <a:ea typeface="Calibri" pitchFamily="34" charset="-122"/>
+                <a:cs typeface="Calibri" pitchFamily="34" charset="-120"/>
+              </a:rPr>
+              <a:t>Mass real-world set + comparison arm</a:t>
+            </a:r>
+            <a:endParaRPr lang="en-US" sz="1150" dirty="0"/>
+          </a:p>
+        </p:txBody>
+      </p:sp>
+      <p:sp>
+        <p:nvSpPr>
+          <p:cNvPr id="27" name="Text 25"/>
+          <p:cNvSpPr/>
+          <p:nvPr/>
+        </p:nvSpPr>
+        <p:spPr>
+          <a:xfrm>
+            <a:off x="6537960" y="3557016"/>
+            <a:ext cx="1417320" cy="365760"/>
+          </a:xfrm>
+          <a:prstGeom prst="rect">
+            <a:avLst/>
+          </a:prstGeom>
+          <a:noFill/>
+          <a:ln/>
+        </p:spPr>
+        <p:txBody>
+          <a:bodyPr wrap="square" lIns="0" tIns="0" rIns="0" bIns="0" rtlCol="0" anchor="ctr"/>
+          <a:lstStyle/>
+          <a:p>
+            <a:pPr indent="0" marL="0">
+              <a:buNone/>
+            </a:pPr>
+            <a:r>
+              <a:rPr lang="en-US" sz="1150" b="1" dirty="0">
+                <a:solidFill>
+                  <a:srgbClr val="1B5E20"/>
+                </a:solidFill>
+                <a:latin typeface="Calibri" pitchFamily="34" charset="0"/>
+                <a:ea typeface="Calibri" pitchFamily="34" charset="-122"/>
+                <a:cs typeface="Calibri" pitchFamily="34" charset="-120"/>
+              </a:rPr>
+              <a:t>N≥3</a:t>
+            </a:r>
+            <a:endParaRPr lang="en-US" sz="1150" dirty="0"/>
+          </a:p>
+        </p:txBody>
+      </p:sp>
+      <p:sp>
+        <p:nvSpPr>
+          <p:cNvPr id="28" name="Text 26"/>
+          <p:cNvSpPr/>
+          <p:nvPr/>
+        </p:nvSpPr>
+        <p:spPr>
+          <a:xfrm>
+            <a:off x="8001000" y="3557016"/>
+            <a:ext cx="3246120" cy="411480"/>
+          </a:xfrm>
+          <a:prstGeom prst="rect">
+            <a:avLst/>
+          </a:prstGeom>
+          <a:noFill/>
+          <a:ln/>
+        </p:spPr>
+        <p:txBody>
+          <a:bodyPr wrap="square" lIns="0" tIns="0" rIns="0" bIns="0" rtlCol="0" anchor="ctr"/>
+          <a:lstStyle/>
+          <a:p>
+            <a:pPr indent="0" marL="0">
+              <a:buNone/>
+            </a:pPr>
+            <a:r>
+              <a:rPr lang="en-US" sz="1150" dirty="0">
+                <a:solidFill>
+                  <a:srgbClr val="1F2937"/>
+                </a:solidFill>
+                <a:latin typeface="Calibri" pitchFamily="34" charset="0"/>
+                <a:ea typeface="Calibri" pitchFamily="34" charset="-122"/>
+                <a:cs typeface="Calibri" pitchFamily="34" charset="-120"/>
+              </a:rPr>
+              <a:t>Variance + context-read metrics</a:t>
+            </a:r>
+            <a:endParaRPr lang="en-US" sz="1150" dirty="0"/>
+          </a:p>
+        </p:txBody>
+      </p:sp>
+      <p:sp>
+        <p:nvSpPr>
+          <p:cNvPr id="29" name="Text 27"/>
+          <p:cNvSpPr/>
+          <p:nvPr/>
+        </p:nvSpPr>
+        <p:spPr>
+          <a:xfrm>
+            <a:off x="6537960" y="4032504"/>
+            <a:ext cx="1417320" cy="365760"/>
+          </a:xfrm>
+          <a:prstGeom prst="rect">
+            <a:avLst/>
+          </a:prstGeom>
+          <a:noFill/>
+          <a:ln/>
+        </p:spPr>
+        <p:txBody>
+          <a:bodyPr wrap="square" lIns="0" tIns="0" rIns="0" bIns="0" rtlCol="0" anchor="ctr"/>
+          <a:lstStyle/>
+          <a:p>
+            <a:pPr indent="0" marL="0">
+              <a:buNone/>
+            </a:pPr>
+            <a:r>
+              <a:rPr lang="en-US" sz="1150" b="1" dirty="0">
+                <a:solidFill>
+                  <a:srgbClr val="1B5E20"/>
+                </a:solidFill>
+                <a:latin typeface="Calibri" pitchFamily="34" charset="0"/>
+                <a:ea typeface="Calibri" pitchFamily="34" charset="-122"/>
+                <a:cs typeface="Calibri" pitchFamily="34" charset="-120"/>
+              </a:rPr>
+              <a:t>GATES</a:t>
+            </a:r>
+            <a:endParaRPr lang="en-US" sz="1150" dirty="0"/>
+          </a:p>
+        </p:txBody>
+      </p:sp>
+      <p:sp>
+        <p:nvSpPr>
+          <p:cNvPr id="30" name="Text 28"/>
+          <p:cNvSpPr/>
+          <p:nvPr/>
+        </p:nvSpPr>
+        <p:spPr>
+          <a:xfrm>
+            <a:off x="8001000" y="4032504"/>
+            <a:ext cx="3246120" cy="411480"/>
+          </a:xfrm>
+          <a:prstGeom prst="rect">
+            <a:avLst/>
+          </a:prstGeom>
+          <a:noFill/>
+          <a:ln/>
+        </p:spPr>
+        <p:txBody>
+          <a:bodyPr wrap="square" lIns="0" tIns="0" rIns="0" bIns="0" rtlCol="0" anchor="ctr"/>
+          <a:lstStyle/>
+          <a:p>
+            <a:pPr indent="0" marL="0">
+              <a:buNone/>
+            </a:pPr>
+            <a:r>
+              <a:rPr lang="en-US" sz="1150" dirty="0">
+                <a:solidFill>
+                  <a:srgbClr val="1F2937"/>
+                </a:solidFill>
+                <a:latin typeface="Calibri" pitchFamily="34" charset="0"/>
+                <a:ea typeface="Calibri" pitchFamily="34" charset="-122"/>
+                <a:cs typeface="Calibri" pitchFamily="34" charset="-120"/>
+              </a:rPr>
+              <a:t>5-tier chain → manifest per PR</a:t>
+            </a:r>
+            <a:endParaRPr lang="en-US" sz="1150" dirty="0"/>
+          </a:p>
+        </p:txBody>
+      </p:sp>
+      <p:sp>
+        <p:nvSpPr>
+          <p:cNvPr id="31" name="Text 29"/>
+          <p:cNvSpPr/>
+          <p:nvPr/>
+        </p:nvSpPr>
+        <p:spPr>
+          <a:xfrm>
+            <a:off x="6537960" y="4507992"/>
+            <a:ext cx="1417320" cy="365760"/>
+          </a:xfrm>
+          <a:prstGeom prst="rect">
+            <a:avLst/>
+          </a:prstGeom>
+          <a:noFill/>
+          <a:ln/>
+        </p:spPr>
+        <p:txBody>
+          <a:bodyPr wrap="square" lIns="0" tIns="0" rIns="0" bIns="0" rtlCol="0" anchor="ctr"/>
+          <a:lstStyle/>
+          <a:p>
+            <a:pPr indent="0" marL="0">
+              <a:buNone/>
+            </a:pPr>
+            <a:r>
+              <a:rPr lang="en-US" sz="1150" b="1" dirty="0">
+                <a:solidFill>
+                  <a:srgbClr val="1B5E20"/>
+                </a:solidFill>
+                <a:latin typeface="Calibri" pitchFamily="34" charset="0"/>
+                <a:ea typeface="Calibri" pitchFamily="34" charset="-122"/>
+                <a:cs typeface="Calibri" pitchFamily="34" charset="-120"/>
+              </a:rPr>
+              <a:t>MUTATION</a:t>
+            </a:r>
+            <a:endParaRPr lang="en-US" sz="1150" dirty="0"/>
+          </a:p>
+        </p:txBody>
+      </p:sp>
+      <p:sp>
+        <p:nvSpPr>
+          <p:cNvPr id="32" name="Text 30"/>
+          <p:cNvSpPr/>
+          <p:nvPr/>
+        </p:nvSpPr>
+        <p:spPr>
+          <a:xfrm>
+            <a:off x="8001000" y="4507992"/>
+            <a:ext cx="3246120" cy="411480"/>
+          </a:xfrm>
+          <a:prstGeom prst="rect">
+            <a:avLst/>
+          </a:prstGeom>
+          <a:noFill/>
+          <a:ln/>
+        </p:spPr>
+        <p:txBody>
+          <a:bodyPr wrap="square" lIns="0" tIns="0" rIns="0" bIns="0" rtlCol="0" anchor="ctr"/>
+          <a:lstStyle/>
+          <a:p>
+            <a:pPr indent="0" marL="0">
+              <a:buNone/>
+            </a:pPr>
+            <a:r>
+              <a:rPr lang="en-US" sz="1150" dirty="0">
+                <a:solidFill>
+                  <a:srgbClr val="1F2937"/>
+                </a:solidFill>
+                <a:latin typeface="Calibri" pitchFamily="34" charset="0"/>
+                <a:ea typeface="Calibri" pitchFamily="34" charset="-122"/>
+                <a:cs typeface="Calibri" pitchFamily="34" charset="-120"/>
+              </a:rPr>
+              <a:t>Mutation/contract/BDD tiers + freezer</a:t>
+            </a:r>
+            <a:endParaRPr lang="en-US" sz="1150" dirty="0"/>
+          </a:p>
+        </p:txBody>
+      </p:sp>
+      <p:sp>
+        <p:nvSpPr>
+          <p:cNvPr id="33" name="Text 31"/>
+          <p:cNvSpPr/>
+          <p:nvPr/>
+        </p:nvSpPr>
+        <p:spPr>
+          <a:xfrm>
+            <a:off x="6537960" y="4983480"/>
+            <a:ext cx="1417320" cy="365760"/>
+          </a:xfrm>
+          <a:prstGeom prst="rect">
+            <a:avLst/>
+          </a:prstGeom>
+          <a:noFill/>
+          <a:ln/>
+        </p:spPr>
+        <p:txBody>
+          <a:bodyPr wrap="square" lIns="0" tIns="0" rIns="0" bIns="0" rtlCol="0" anchor="ctr"/>
+          <a:lstStyle/>
+          <a:p>
+            <a:pPr indent="0" marL="0">
+              <a:buNone/>
+            </a:pPr>
+            <a:r>
+              <a:rPr lang="en-US" sz="1150" b="1" dirty="0">
+                <a:solidFill>
+                  <a:srgbClr val="1B5E20"/>
+                </a:solidFill>
+                <a:latin typeface="Calibri" pitchFamily="34" charset="0"/>
+                <a:ea typeface="Calibri" pitchFamily="34" charset="-122"/>
+                <a:cs typeface="Calibri" pitchFamily="34" charset="-120"/>
+              </a:rPr>
+              <a:t>AGENTS</a:t>
+            </a:r>
+            <a:endParaRPr lang="en-US" sz="1150" dirty="0"/>
+          </a:p>
+        </p:txBody>
+      </p:sp>
+      <p:sp>
+        <p:nvSpPr>
+          <p:cNvPr id="34" name="Text 32"/>
+          <p:cNvSpPr/>
+          <p:nvPr/>
+        </p:nvSpPr>
+        <p:spPr>
+          <a:xfrm>
+            <a:off x="8001000" y="4983480"/>
+            <a:ext cx="3246120" cy="411480"/>
+          </a:xfrm>
+          <a:prstGeom prst="rect">
+            <a:avLst/>
+          </a:prstGeom>
+          <a:noFill/>
+          <a:ln/>
+        </p:spPr>
+        <p:txBody>
+          <a:bodyPr wrap="square" lIns="0" tIns="0" rIns="0" bIns="0" rtlCol="0" anchor="ctr"/>
+          <a:lstStyle/>
+          <a:p>
+            <a:pPr indent="0" marL="0">
+              <a:buNone/>
+            </a:pPr>
+            <a:r>
+              <a:rPr lang="en-US" sz="1150" dirty="0">
+                <a:solidFill>
+                  <a:srgbClr val="1F2937"/>
+                </a:solidFill>
+                <a:latin typeface="Calibri" pitchFamily="34" charset="0"/>
+                <a:ea typeface="Calibri" pitchFamily="34" charset="-122"/>
+                <a:cs typeface="Calibri" pitchFamily="34" charset="-120"/>
+              </a:rPr>
+              <a:t>TBD — candidate: model pin, reject wrong</a:t>
+            </a:r>
+            <a:endParaRPr lang="en-US" sz="1150" dirty="0"/>
+          </a:p>
+        </p:txBody>
+      </p:sp>
+      <p:sp>
+        <p:nvSpPr>
+          <p:cNvPr id="35" name="Text 33"/>
+          <p:cNvSpPr/>
+          <p:nvPr/>
+        </p:nvSpPr>
+        <p:spPr>
+          <a:xfrm>
+            <a:off x="6537960" y="5458968"/>
+            <a:ext cx="1417320" cy="365760"/>
+          </a:xfrm>
+          <a:prstGeom prst="rect">
+            <a:avLst/>
+          </a:prstGeom>
+          <a:noFill/>
+          <a:ln/>
+        </p:spPr>
+        <p:txBody>
+          <a:bodyPr wrap="square" lIns="0" tIns="0" rIns="0" bIns="0" rtlCol="0" anchor="ctr"/>
+          <a:lstStyle/>
+          <a:p>
+            <a:pPr indent="0" marL="0">
+              <a:buNone/>
+            </a:pPr>
+            <a:r>
+              <a:rPr lang="en-US" sz="1150" b="1" dirty="0">
+                <a:solidFill>
+                  <a:srgbClr val="1B5E20"/>
+                </a:solidFill>
+                <a:latin typeface="Calibri" pitchFamily="34" charset="0"/>
+                <a:ea typeface="Calibri" pitchFamily="34" charset="-122"/>
+                <a:cs typeface="Calibri" pitchFamily="34" charset="-120"/>
+              </a:rPr>
+              <a:t>BRIEF</a:t>
+            </a:r>
+            <a:endParaRPr lang="en-US" sz="1150" dirty="0"/>
+          </a:p>
+        </p:txBody>
+      </p:sp>
+      <p:sp>
+        <p:nvSpPr>
+          <p:cNvPr id="36" name="Text 34"/>
+          <p:cNvSpPr/>
+          <p:nvPr/>
+        </p:nvSpPr>
+        <p:spPr>
+          <a:xfrm>
+            <a:off x="8001000" y="5458968"/>
+            <a:ext cx="3246120" cy="411480"/>
+          </a:xfrm>
+          <a:prstGeom prst="rect">
+            <a:avLst/>
+          </a:prstGeom>
+          <a:noFill/>
+          <a:ln/>
+        </p:spPr>
+        <p:txBody>
+          <a:bodyPr wrap="square" lIns="0" tIns="0" rIns="0" bIns="0" rtlCol="0" anchor="ctr"/>
+          <a:lstStyle/>
+          <a:p>
+            <a:pPr indent="0" marL="0">
+              <a:buNone/>
+            </a:pPr>
+            <a:r>
+              <a:rPr lang="en-US" sz="1150" dirty="0">
+                <a:solidFill>
+                  <a:srgbClr val="1F2937"/>
+                </a:solidFill>
+                <a:latin typeface="Calibri" pitchFamily="34" charset="0"/>
+                <a:ea typeface="Calibri" pitchFamily="34" charset="-122"/>
+                <a:cs typeface="Calibri" pitchFamily="34" charset="-120"/>
+              </a:rPr>
+              <a:t>Onboarding map · commands · risks</a:t>
+            </a:r>
+            <a:endParaRPr lang="en-US" sz="1150" dirty="0"/>
+          </a:p>
+        </p:txBody>
+      </p:sp>
+      <p:sp>
+        <p:nvSpPr>
+          <p:cNvPr id="37" name="Shape 35"/>
+          <p:cNvSpPr/>
+          <p:nvPr/>
+        </p:nvSpPr>
+        <p:spPr>
+          <a:xfrm>
+            <a:off x="685800" y="6263640"/>
+            <a:ext cx="896112" cy="292608"/>
+          </a:xfrm>
+          <a:prstGeom prst="roundRect">
+            <a:avLst>
+              <a:gd name="adj" fmla="val 50000"/>
+            </a:avLst>
+          </a:prstGeom>
+          <a:solidFill>
+            <a:srgbClr val="7C8698"/>
           </a:solidFill>
           <a:ln w="12700">
             <a:solidFill>
-              <a:srgbClr val="333333"/>
+              <a:srgbClr val="7C8698"/>
             </a:solidFill>
             <a:prstDash val="solid"/>
           </a:ln>
@@ -7463,14 +9193,53 @@
       </p:sp>
       <p:sp>
         <p:nvSpPr>
-          <p:cNvPr id="3" name="Text 1"/>
-          <p:cNvSpPr/>
-          <p:nvPr/>
-        </p:nvSpPr>
-        <p:spPr>
-          <a:xfrm>
-            <a:off x="731520" y="777240"/>
-            <a:ext cx="10698480" cy="365760"/>
+          <p:cNvPr id="38" name="Text 36"/>
+          <p:cNvSpPr/>
+          <p:nvPr/>
+        </p:nvSpPr>
+        <p:spPr>
+          <a:xfrm>
+            <a:off x="685800" y="6236208"/>
+            <a:ext cx="896112" cy="292608"/>
+          </a:xfrm>
+          <a:prstGeom prst="rect">
+            <a:avLst/>
+          </a:prstGeom>
+          <a:noFill/>
+          <a:ln/>
+        </p:spPr>
+        <p:txBody>
+          <a:bodyPr wrap="square" lIns="0" tIns="0" rIns="0" bIns="0" rtlCol="0" anchor="ctr"/>
+          <a:lstStyle/>
+          <a:p>
+            <a:pPr algn="ctr" indent="0" marL="0">
+              <a:buNone/>
+            </a:pPr>
+            <a:r>
+              <a:rPr lang="en-US" sz="1100" b="1" dirty="0">
+                <a:solidFill>
+                  <a:srgbClr val="FFFFFF"/>
+                </a:solidFill>
+                <a:latin typeface="Calibri" pitchFamily="34" charset="0"/>
+                <a:ea typeface="Calibri" pitchFamily="34" charset="-122"/>
+                <a:cs typeface="Calibri" pitchFamily="34" charset="-120"/>
+              </a:rPr>
+              <a:t>PLANNED</a:t>
+            </a:r>
+            <a:endParaRPr lang="en-US" sz="1100" dirty="0"/>
+          </a:p>
+        </p:txBody>
+      </p:sp>
+      <p:sp>
+        <p:nvSpPr>
+          <p:cNvPr id="39" name="Text 37"/>
+          <p:cNvSpPr/>
+          <p:nvPr/>
+        </p:nvSpPr>
+        <p:spPr>
+          <a:xfrm>
+            <a:off x="2286000" y="6291072"/>
+            <a:ext cx="9144000" cy="320040"/>
           </a:xfrm>
           <a:prstGeom prst="rect">
             <a:avLst/>
@@ -7486,219 +9255,17 @@
               <a:buNone/>
             </a:pPr>
             <a:r>
-              <a:rPr lang="en-US" sz="1400" b="1" spc="300" kern="0" dirty="0">
-                <a:solidFill>
-                  <a:srgbClr val="F4B400"/>
-                </a:solidFill>
-                <a:latin typeface="Calibri" pitchFamily="34" charset="0"/>
-                <a:ea typeface="Calibri" pitchFamily="34" charset="-122"/>
-                <a:cs typeface="Calibri" pitchFamily="34" charset="-120"/>
-              </a:rPr>
-              <a:t>WHAT WE KNOW</a:t>
-            </a:r>
-            <a:endParaRPr lang="en-US" sz="1400" dirty="0"/>
-          </a:p>
-        </p:txBody>
-      </p:sp>
-      <p:sp>
-        <p:nvSpPr>
-          <p:cNvPr id="4" name="Text 2"/>
-          <p:cNvSpPr/>
-          <p:nvPr/>
-        </p:nvSpPr>
-        <p:spPr>
-          <a:xfrm>
-            <a:off x="731520" y="1188720"/>
-            <a:ext cx="10698480" cy="777240"/>
-          </a:xfrm>
-          <a:prstGeom prst="rect">
-            <a:avLst/>
-          </a:prstGeom>
-          <a:noFill/>
-          <a:ln/>
-        </p:spPr>
-        <p:txBody>
-          <a:bodyPr wrap="square" rtlCol="0" anchor="ctr"/>
-          <a:lstStyle/>
-          <a:p>
-            <a:pPr indent="0" marL="0">
-              <a:buNone/>
-            </a:pPr>
-            <a:r>
-              <a:rPr lang="en-US" sz="4000" b="1" dirty="0">
-                <a:solidFill>
-                  <a:srgbClr val="FFFFFF"/>
-                </a:solidFill>
-                <a:latin typeface="Cambria" pitchFamily="34" charset="0"/>
-                <a:ea typeface="Cambria" pitchFamily="34" charset="-122"/>
-                <a:cs typeface="Cambria" pitchFamily="34" charset="-120"/>
-              </a:rPr>
-              <a:t>Built from experience. Graded by evidence.</a:t>
-            </a:r>
-            <a:endParaRPr lang="en-US" sz="4000" dirty="0"/>
-          </a:p>
-        </p:txBody>
-      </p:sp>
-      <p:sp>
-        <p:nvSpPr>
-          <p:cNvPr id="5" name="Text 3"/>
-          <p:cNvSpPr/>
-          <p:nvPr/>
-        </p:nvSpPr>
-        <p:spPr>
-          <a:xfrm>
-            <a:off x="731520" y="2377440"/>
-            <a:ext cx="10698480" cy="2011680"/>
-          </a:xfrm>
-          <a:prstGeom prst="rect">
-            <a:avLst/>
-          </a:prstGeom>
-          <a:noFill/>
-          <a:ln/>
-        </p:spPr>
-        <p:txBody>
-          <a:bodyPr wrap="square" rtlCol="0" anchor="ctr"/>
-          <a:lstStyle/>
-          <a:p>
-            <a:pPr marL="342900" indent="-342900">
-              <a:spcAft>
-                <a:spcPts val="1000"/>
-              </a:spcAft>
-              <a:buSzPct val="100000"/>
-              <a:buChar char="•"/>
-            </a:pPr>
-            <a:r>
-              <a:rPr lang="en-US" sz="2000" dirty="0">
-                <a:solidFill>
-                  <a:srgbClr val="EAF0FB"/>
-                </a:solidFill>
-                <a:latin typeface="Calibri" pitchFamily="34" charset="0"/>
-                <a:ea typeface="Calibri" pitchFamily="34" charset="-122"/>
-                <a:cs typeface="Calibri" pitchFamily="34" charset="-120"/>
-              </a:rPr>
-              <a:t>The framework's value concentrates on hard engineering — measured, reproducible, labeled.</a:t>
-            </a:r>
-            <a:endParaRPr lang="en-US" sz="2000" dirty="0"/>
-          </a:p>
-          <a:p>
-            <a:pPr marL="342900" indent="-342900">
-              <a:spcAft>
-                <a:spcPts val="1000"/>
-              </a:spcAft>
-              <a:buSzPct val="100000"/>
-              <a:buChar char="•"/>
-            </a:pPr>
-            <a:r>
-              <a:rPr lang="en-US" sz="2000" dirty="0">
-                <a:solidFill>
-                  <a:srgbClr val="EAF0FB"/>
-                </a:solidFill>
-                <a:latin typeface="Calibri" pitchFamily="34" charset="0"/>
-                <a:ea typeface="Calibri" pitchFamily="34" charset="-122"/>
-                <a:cs typeface="Calibri" pitchFamily="34" charset="-120"/>
-              </a:rPr>
-              <a:t>Gaps are shown, not hidden (cost metering, advisory guardrails, N=1 cells).</a:t>
-            </a:r>
-            <a:endParaRPr lang="en-US" sz="2000" dirty="0"/>
-          </a:p>
-          <a:p>
-            <a:pPr marL="342900" indent="-342900">
-              <a:spcAft>
-                <a:spcPts val="1000"/>
-              </a:spcAft>
-              <a:buSzPct val="100000"/>
-              <a:buChar char="•"/>
-            </a:pPr>
-            <a:r>
-              <a:rPr lang="en-US" sz="2000" dirty="0">
-                <a:solidFill>
-                  <a:srgbClr val="EAF0FB"/>
-                </a:solidFill>
-                <a:latin typeface="Calibri" pitchFamily="34" charset="0"/>
-                <a:ea typeface="Calibri" pitchFamily="34" charset="-122"/>
-                <a:cs typeface="Calibri" pitchFamily="34" charset="-120"/>
-              </a:rPr>
-              <a:t>Fork first: experiments live on the fork; the official ex-company repo stays read-only.</a:t>
-            </a:r>
-            <a:endParaRPr lang="en-US" sz="2000" dirty="0"/>
-          </a:p>
-        </p:txBody>
-      </p:sp>
-      <p:sp>
-        <p:nvSpPr>
-          <p:cNvPr id="6" name="Text 4"/>
-          <p:cNvSpPr/>
-          <p:nvPr/>
-        </p:nvSpPr>
-        <p:spPr>
-          <a:xfrm>
-            <a:off x="731520" y="5029200"/>
-            <a:ext cx="10698480" cy="457200"/>
-          </a:xfrm>
-          <a:prstGeom prst="rect">
-            <a:avLst/>
-          </a:prstGeom>
-          <a:noFill/>
-          <a:ln/>
-        </p:spPr>
-        <p:txBody>
-          <a:bodyPr wrap="square" rtlCol="0" anchor="ctr"/>
-          <a:lstStyle/>
-          <a:p>
-            <a:pPr indent="0" marL="0">
-              <a:buNone/>
-            </a:pPr>
-            <a:r>
-              <a:rPr lang="en-US" sz="1800" b="1" dirty="0">
-                <a:solidFill>
-                  <a:srgbClr val="F4B400"/>
-                </a:solidFill>
-                <a:latin typeface="Calibri" pitchFamily="34" charset="0"/>
-                <a:ea typeface="Calibri" pitchFamily="34" charset="-122"/>
-                <a:cs typeface="Calibri" pitchFamily="34" charset="-120"/>
-              </a:rPr>
-              <a:t>Everything ships in the repo: github.com/trac41799/claude-code-agentic-sdlc (evidence/ · docs/demo/live-demo-guide.md · docs/benchmarks/BENCHMARK-SUMMARY.md)</a:t>
-            </a:r>
-            <a:endParaRPr lang="en-US" sz="1800" dirty="0"/>
-          </a:p>
-        </p:txBody>
-      </p:sp>
-      <p:sp>
-        <p:nvSpPr>
-          <p:cNvPr id="7" name="Text 5"/>
-          <p:cNvSpPr/>
-          <p:nvPr/>
-        </p:nvSpPr>
-        <p:spPr>
-          <a:xfrm>
-            <a:off x="731520" y="5760720"/>
-            <a:ext cx="10698480" cy="457200"/>
-          </a:xfrm>
-          <a:prstGeom prst="rect">
-            <a:avLst/>
-          </a:prstGeom>
-          <a:noFill/>
-          <a:ln/>
-        </p:spPr>
-        <p:txBody>
-          <a:bodyPr wrap="square" rtlCol="0" anchor="ctr"/>
-          <a:lstStyle/>
-          <a:p>
-            <a:pPr indent="0" marL="0">
-              <a:buNone/>
-            </a:pPr>
-            <a:r>
-              <a:rPr lang="en-US" sz="2200" b="1" i="1" dirty="0">
-                <a:solidFill>
-                  <a:srgbClr val="FFFFFF"/>
-                </a:solidFill>
-                <a:latin typeface="Cambria" pitchFamily="34" charset="0"/>
-                <a:ea typeface="Cambria" pitchFamily="34" charset="-122"/>
-                <a:cs typeface="Cambria" pitchFamily="34" charset="-120"/>
-              </a:rPr>
-              <a:t>Not a solved discipline — a repeatable, honest one.</a:t>
-            </a:r>
-            <a:endParaRPr lang="en-US" sz="2200" dirty="0"/>
+              <a:rPr lang="en-US" sz="1200" i="1" dirty="0">
+                <a:solidFill>
+                  <a:srgbClr val="6B7280"/>
+                </a:solidFill>
+                <a:latin typeface="Calibri" pitchFamily="34" charset="0"/>
+                <a:ea typeface="Calibri" pitchFamily="34" charset="-122"/>
+                <a:cs typeface="Calibri" pitchFamily="34" charset="-120"/>
+              </a:rPr>
+              <a:t>Seven gaps, seven committed moves — tracked in docs/demo/open-points.md · evidence in GAP-ANALYSIS.md.</a:t>
+            </a:r>
+            <a:endParaRPr lang="en-US" sz="1200" dirty="0"/>
           </a:p>
         </p:txBody>
       </p:sp>
